--- a/Science_Teesside/Teaching_Packs/BUILD/lessons/W3A/BUILD_Science_Autumn1_W3A_Backbones.pptx
+++ b/Science_Teesside/Teaching_Packs/BUILD/lessons/W3A/BUILD_Science_Autumn1_W3A_Backbones.pptx
@@ -2,23 +2,23 @@
 <file path=ppt/presentation.xml><?xml version="1.0" encoding="utf-8"?>
 <p:presentation xmlns:p="http://schemas.openxmlformats.org/presentationml/2006/main">
   <p:sldMasterIdLst>
-    <p:sldMasterId xmlns:r="http://schemas.openxmlformats.org/officeDocument/2006/relationships" id="2147483648" r:id="Re87c0f0cb1fa47a2"/>
+    <p:sldMasterId xmlns:r="http://schemas.openxmlformats.org/officeDocument/2006/relationships" id="2147483648" r:id="R2461ee7167524701"/>
   </p:sldMasterIdLst>
   <p:notesMasterIdLst>
-    <p:notesMasterId xmlns:r="http://schemas.openxmlformats.org/officeDocument/2006/relationships" r:id="R01a45cda59f94688"/>
+    <p:notesMasterId xmlns:r="http://schemas.openxmlformats.org/officeDocument/2006/relationships" r:id="R5c1838b11ec94230"/>
   </p:notesMasterIdLst>
   <p:sldIdLst>
-    <p:sldId xmlns:r="http://schemas.openxmlformats.org/officeDocument/2006/relationships" id="256" r:id="R1b1b1ae6122a441c"/>
-    <p:sldId xmlns:r="http://schemas.openxmlformats.org/officeDocument/2006/relationships" id="257" r:id="Rece6a0639c48494a"/>
-    <p:sldId xmlns:r="http://schemas.openxmlformats.org/officeDocument/2006/relationships" id="258" r:id="Rabd76c2f80584b93"/>
-    <p:sldId xmlns:r="http://schemas.openxmlformats.org/officeDocument/2006/relationships" id="259" r:id="R7d1dbe340a52495e"/>
-    <p:sldId xmlns:r="http://schemas.openxmlformats.org/officeDocument/2006/relationships" id="260" r:id="Rf776d9df9e6042da"/>
-    <p:sldId xmlns:r="http://schemas.openxmlformats.org/officeDocument/2006/relationships" id="261" r:id="Re1fff7dba29b4085"/>
-    <p:sldId xmlns:r="http://schemas.openxmlformats.org/officeDocument/2006/relationships" id="262" r:id="R3226b876b92f4731"/>
-    <p:sldId xmlns:r="http://schemas.openxmlformats.org/officeDocument/2006/relationships" id="263" r:id="Rd694e1a7ad7a44af"/>
-    <p:sldId xmlns:r="http://schemas.openxmlformats.org/officeDocument/2006/relationships" id="264" r:id="R7380a467b2eb4f1a"/>
-    <p:sldId xmlns:r="http://schemas.openxmlformats.org/officeDocument/2006/relationships" id="265" r:id="R04a431f4ec2b4516"/>
-    <p:sldId xmlns:r="http://schemas.openxmlformats.org/officeDocument/2006/relationships" id="266" r:id="R170629fe24094894"/>
+    <p:sldId xmlns:r="http://schemas.openxmlformats.org/officeDocument/2006/relationships" id="256" r:id="R4708f18446f74e54"/>
+    <p:sldId xmlns:r="http://schemas.openxmlformats.org/officeDocument/2006/relationships" id="257" r:id="R2d68cc9181584a83"/>
+    <p:sldId xmlns:r="http://schemas.openxmlformats.org/officeDocument/2006/relationships" id="258" r:id="R9db5c68f51a84c2b"/>
+    <p:sldId xmlns:r="http://schemas.openxmlformats.org/officeDocument/2006/relationships" id="259" r:id="Rdd84ebc1b60e4f3c"/>
+    <p:sldId xmlns:r="http://schemas.openxmlformats.org/officeDocument/2006/relationships" id="260" r:id="R95d785dfd29946a1"/>
+    <p:sldId xmlns:r="http://schemas.openxmlformats.org/officeDocument/2006/relationships" id="261" r:id="Ra4785f1e80fc49ce"/>
+    <p:sldId xmlns:r="http://schemas.openxmlformats.org/officeDocument/2006/relationships" id="262" r:id="Ra077c7d1b05f4070"/>
+    <p:sldId xmlns:r="http://schemas.openxmlformats.org/officeDocument/2006/relationships" id="263" r:id="R71b39fd4eb2d48e7"/>
+    <p:sldId xmlns:r="http://schemas.openxmlformats.org/officeDocument/2006/relationships" id="264" r:id="R1884ea67ce5d440a"/>
+    <p:sldId xmlns:r="http://schemas.openxmlformats.org/officeDocument/2006/relationships" id="265" r:id="R82f01764871e4687"/>
+    <p:sldId xmlns:r="http://schemas.openxmlformats.org/officeDocument/2006/relationships" id="266" r:id="R2d5fca58377347df"/>
   </p:sldIdLst>
   <p:sldSz cx="12192000" cy="6858000"/>
   <p:notesSz cx="6858000" cy="9144000"/>
@@ -500,6 +500,15 @@
               <a:t>[/Sources]</a:t>
             </a:r>
           </a:p>
+          <a:p xmlns:a="http://schemas.openxmlformats.org/drawingml/2006/main">
+            <a:r>
+              <a:t>
+[Sources]
+https://madebymatt.uk/Lessons/Science_Teesside/Teaching_Packs/BUILD/ — original lesson text, timings and teacher notes retained.
+https://madebymatt.uk/Lessons/Science_Teesside/Build/ — existing Made by Matt scientific artwork, where shown.
+[/Sources]</a:t>
+            </a:r>
+          </a:p>
         </p:txBody>
       </p:sp>
       <p:sp>
@@ -615,6 +624,15 @@
               <a:t>[/Sources]</a:t>
             </a:r>
           </a:p>
+          <a:p xmlns:a="http://schemas.openxmlformats.org/drawingml/2006/main">
+            <a:r>
+              <a:t>
+[Sources]
+https://madebymatt.uk/Lessons/Science_Teesside/Teaching_Packs/BUILD/ — original lesson text, timings and teacher notes retained.
+https://madebymatt.uk/Lessons/Science_Teesside/Build/ — existing Made by Matt scientific artwork, where shown.
+[/Sources]</a:t>
+            </a:r>
+          </a:p>
         </p:txBody>
       </p:sp>
       <p:sp>
@@ -730,6 +748,15 @@
               <a:t>[/Sources]</a:t>
             </a:r>
           </a:p>
+          <a:p xmlns:a="http://schemas.openxmlformats.org/drawingml/2006/main">
+            <a:r>
+              <a:t>
+[Sources]
+https://madebymatt.uk/Lessons/Science_Teesside/Teaching_Packs/BUILD/ — original lesson text, timings and teacher notes retained.
+https://madebymatt.uk/Lessons/Science_Teesside/Build/ — existing Made by Matt scientific artwork, where shown.
+[/Sources]</a:t>
+            </a:r>
+          </a:p>
         </p:txBody>
       </p:sp>
       <p:sp>
@@ -845,6 +872,15 @@
               <a:t>[/Sources]</a:t>
             </a:r>
           </a:p>
+          <a:p xmlns:a="http://schemas.openxmlformats.org/drawingml/2006/main">
+            <a:r>
+              <a:t>
+[Sources]
+https://madebymatt.uk/Lessons/Science_Teesside/Teaching_Packs/BUILD/ — original lesson text, timings and teacher notes retained.
+https://madebymatt.uk/Lessons/Science_Teesside/Build/ — existing Made by Matt scientific artwork, where shown.
+[/Sources]</a:t>
+            </a:r>
+          </a:p>
         </p:txBody>
       </p:sp>
       <p:sp>
@@ -960,6 +996,15 @@
               <a:t>[/Sources]</a:t>
             </a:r>
           </a:p>
+          <a:p xmlns:a="http://schemas.openxmlformats.org/drawingml/2006/main">
+            <a:r>
+              <a:t>
+[Sources]
+https://madebymatt.uk/Lessons/Science_Teesside/Teaching_Packs/BUILD/ — original lesson text, timings and teacher notes retained.
+https://madebymatt.uk/Lessons/Science_Teesside/Build/ — existing Made by Matt scientific artwork, where shown.
+[/Sources]</a:t>
+            </a:r>
+          </a:p>
         </p:txBody>
       </p:sp>
       <p:sp>
@@ -1075,6 +1120,15 @@
               <a:t>[/Sources]</a:t>
             </a:r>
           </a:p>
+          <a:p xmlns:a="http://schemas.openxmlformats.org/drawingml/2006/main">
+            <a:r>
+              <a:t>
+[Sources]
+https://madebymatt.uk/Lessons/Science_Teesside/Teaching_Packs/BUILD/ — original lesson text, timings and teacher notes retained.
+https://madebymatt.uk/Lessons/Science_Teesside/Build/ — existing Made by Matt scientific artwork, where shown.
+[/Sources]</a:t>
+            </a:r>
+          </a:p>
         </p:txBody>
       </p:sp>
       <p:sp>
@@ -1190,6 +1244,15 @@
               <a:t>[/Sources]</a:t>
             </a:r>
           </a:p>
+          <a:p xmlns:a="http://schemas.openxmlformats.org/drawingml/2006/main">
+            <a:r>
+              <a:t>
+[Sources]
+https://madebymatt.uk/Lessons/Science_Teesside/Teaching_Packs/BUILD/ — original lesson text, timings and teacher notes retained.
+https://madebymatt.uk/Lessons/Science_Teesside/Build/ — existing Made by Matt scientific artwork, where shown.
+[/Sources]</a:t>
+            </a:r>
+          </a:p>
         </p:txBody>
       </p:sp>
       <p:sp>
@@ -1305,6 +1368,15 @@
               <a:t>[/Sources]</a:t>
             </a:r>
           </a:p>
+          <a:p xmlns:a="http://schemas.openxmlformats.org/drawingml/2006/main">
+            <a:r>
+              <a:t>
+[Sources]
+https://madebymatt.uk/Lessons/Science_Teesside/Teaching_Packs/BUILD/ — original lesson text, timings and teacher notes retained.
+https://madebymatt.uk/Lessons/Science_Teesside/Build/ — existing Made by Matt scientific artwork, where shown.
+[/Sources]</a:t>
+            </a:r>
+          </a:p>
         </p:txBody>
       </p:sp>
       <p:sp>
@@ -1420,6 +1492,15 @@
               <a:t>[/Sources]</a:t>
             </a:r>
           </a:p>
+          <a:p xmlns:a="http://schemas.openxmlformats.org/drawingml/2006/main">
+            <a:r>
+              <a:t>
+[Sources]
+https://madebymatt.uk/Lessons/Science_Teesside/Teaching_Packs/BUILD/ — original lesson text, timings and teacher notes retained.
+https://madebymatt.uk/Lessons/Science_Teesside/Build/ — existing Made by Matt scientific artwork, where shown.
+[/Sources]</a:t>
+            </a:r>
+          </a:p>
         </p:txBody>
       </p:sp>
       <p:sp>
@@ -1535,6 +1616,15 @@
               <a:t>[/Sources]</a:t>
             </a:r>
           </a:p>
+          <a:p xmlns:a="http://schemas.openxmlformats.org/drawingml/2006/main">
+            <a:r>
+              <a:t>
+[Sources]
+https://madebymatt.uk/Lessons/Science_Teesside/Teaching_Packs/BUILD/ — original lesson text, timings and teacher notes retained.
+https://madebymatt.uk/Lessons/Science_Teesside/Build/ — existing Made by Matt scientific artwork, where shown.
+[/Sources]</a:t>
+            </a:r>
+          </a:p>
         </p:txBody>
       </p:sp>
       <p:sp>
@@ -1648,6 +1738,15 @@
           <a:p xmlns:a="http://schemas.openxmlformats.org/drawingml/2006/main">
             <a:r>
               <a:t>[/Sources]</a:t>
+            </a:r>
+          </a:p>
+          <a:p xmlns:a="http://schemas.openxmlformats.org/drawingml/2006/main">
+            <a:r>
+              <a:t>
+[Sources]
+https://madebymatt.uk/Lessons/Science_Teesside/Teaching_Packs/BUILD/ — original lesson text, timings and teacher notes retained.
+https://madebymatt.uk/Lessons/Science_Teesside/Build/ — existing Made by Matt scientific artwork, where shown.
+[/Sources]</a:t>
             </a:r>
           </a:p>
         </p:txBody>
@@ -1715,7 +1814,7 @@
   </p:cSld>
   <p:clrMap bg1="lt1" tx1="dk1" bg2="lt2" tx2="dk2" accent1="accent1" accent2="accent2" accent3="accent3" accent4="accent4" accent5="accent5" accent6="accent6" hlink="hlink" folHlink="folHlink"/>
   <p:sldLayoutIdLst>
-    <p:sldLayoutId xmlns:r="http://schemas.openxmlformats.org/officeDocument/2006/relationships" id="2147483649" r:id="Rd236859869fb44bf"/>
+    <p:sldLayoutId xmlns:r="http://schemas.openxmlformats.org/officeDocument/2006/relationships" id="2147483649" r:id="Rcb5090639aa84d7f"/>
   </p:sldLayoutIdLst>
   <p:txStyles>
     <p:titleStyle>
@@ -2248,7 +2347,7 @@
     <p:bg>
       <p:bgPr>
         <a:solidFill xmlns:a="http://schemas.openxmlformats.org/drawingml/2006/main">
-          <a:srgbClr val="F5F1E8"/>
+          <a:srgbClr val="FBF9F3"/>
         </a:solidFill>
       </p:bgPr>
     </p:bg>
@@ -2277,8 +2376,8 @@
         </p:nvSpPr>
         <p:spPr>
           <a:xfrm xmlns:a="http://schemas.openxmlformats.org/drawingml/2006/main">
-            <a:off x="609600" y="552450"/>
-            <a:ext cx="781050" cy="57150"/>
+            <a:off x="609600" y="742950"/>
+            <a:ext cx="9906000" cy="38100"/>
           </a:xfrm>
           <a:prstGeom xmlns:a="http://schemas.openxmlformats.org/drawingml/2006/main" prst="rect">
             <a:avLst/>
@@ -2308,8 +2407,8 @@
         </p:nvSpPr>
         <p:spPr>
           <a:xfrm xmlns:a="http://schemas.openxmlformats.org/drawingml/2006/main">
-            <a:off x="609600" y="762000"/>
-            <a:ext cx="9334500" cy="285750"/>
+            <a:off x="609600" y="342900"/>
+            <a:ext cx="9334500" cy="266700"/>
           </a:xfrm>
           <a:prstGeom xmlns:a="http://schemas.openxmlformats.org/drawingml/2006/main" prst="rect">
             <a:avLst/>
@@ -2321,21 +2420,30 @@
           </a:ln>
         </p:spPr>
         <p:txBody>
-          <a:bodyPr xmlns:a="http://schemas.openxmlformats.org/drawingml/2006/main" lIns="0" tIns="0" rIns="0" bIns="0" anchor="ctr"/>
+          <a:bodyPr xmlns:a="http://schemas.openxmlformats.org/drawingml/2006/main" wrap="square" lIns="0" tIns="0" rIns="0" bIns="0" anchor="ctr">
+            <a:noAutofit/>
+          </a:bodyPr>
           <a:lstStyle xmlns:a="http://schemas.openxmlformats.org/drawingml/2006/main"/>
           <a:p xmlns:a="http://schemas.openxmlformats.org/drawingml/2006/main">
             <a:pPr>
-              <a:defRPr sz="1500" b="1">
+              <a:buNone/>
+              <a:defRPr sz="1425" b="1">
                 <a:solidFill>
                   <a:srgbClr val="28685E"/>
                 </a:solidFill>
+                <a:latin typeface="Arial"/>
+                <a:ea typeface="Arial"/>
+                <a:cs typeface="Arial"/>
               </a:defRPr>
             </a:pPr>
             <a:r>
-              <a:rPr sz="1500" b="1">
+              <a:rPr sz="1425" b="1">
                 <a:solidFill>
                   <a:srgbClr val="28685E"/>
                 </a:solidFill>
+                <a:latin typeface="Arial"/>
+                <a:ea typeface="Arial"/>
+                <a:cs typeface="Arial"/>
               </a:rPr>
               <a:t>MADE BY MATT  /  BUILD SCIENCE</a:t>
             </a:r>
@@ -2344,14 +2452,14 @@
       </p:sp>
       <p:pic>
         <p:nvPicPr>
-          <p:cNvPr id="12" name=""/>
+          <p:cNvPr id="15" name=""/>
           <p:cNvPicPr>
             <a:picLocks xmlns:a="http://schemas.openxmlformats.org/drawingml/2006/main" noChangeAspect="1"/>
           </p:cNvPicPr>
           <p:nvPr/>
         </p:nvPicPr>
         <p:blipFill>
-          <a:blip xmlns:r="http://schemas.openxmlformats.org/officeDocument/2006/relationships" xmlns:a="http://schemas.openxmlformats.org/drawingml/2006/main" r:embed="Ra742187a61824acb"/>
+          <a:blip xmlns:r="http://schemas.openxmlformats.org/officeDocument/2006/relationships" xmlns:a="http://schemas.openxmlformats.org/drawingml/2006/main" r:embed="R62a81b6f74714276"/>
           <a:stretch xmlns:a="http://schemas.openxmlformats.org/drawingml/2006/main"/>
         </p:blipFill>
         <p:spPr>
@@ -2380,8 +2488,8 @@
         </p:nvSpPr>
         <p:spPr>
           <a:xfrm xmlns:a="http://schemas.openxmlformats.org/drawingml/2006/main">
-            <a:off x="609600" y="1352550"/>
-            <a:ext cx="10972800" cy="952500"/>
+            <a:off x="609600" y="1047750"/>
+            <a:ext cx="10972800" cy="895350"/>
           </a:xfrm>
           <a:prstGeom xmlns:a="http://schemas.openxmlformats.org/drawingml/2006/main" prst="rect">
             <a:avLst/>
@@ -2393,21 +2501,30 @@
           </a:ln>
         </p:spPr>
         <p:txBody>
-          <a:bodyPr xmlns:a="http://schemas.openxmlformats.org/drawingml/2006/main" lIns="0" tIns="0" rIns="0" bIns="0" anchor="ctr"/>
+          <a:bodyPr xmlns:a="http://schemas.openxmlformats.org/drawingml/2006/main" wrap="square" lIns="0" tIns="0" rIns="0" bIns="0" anchor="ctr">
+            <a:noAutofit/>
+          </a:bodyPr>
           <a:lstStyle xmlns:a="http://schemas.openxmlformats.org/drawingml/2006/main"/>
           <a:p xmlns:a="http://schemas.openxmlformats.org/drawingml/2006/main">
             <a:pPr>
-              <a:defRPr sz="3750" b="1">
-                <a:solidFill>
-                  <a:srgbClr val="152B3A"/>
-                </a:solidFill>
+              <a:buNone/>
+              <a:defRPr sz="3600" b="1">
+                <a:solidFill>
+                  <a:srgbClr val="152B3A"/>
+                </a:solidFill>
+                <a:latin typeface="Arial"/>
+                <a:ea typeface="Arial"/>
+                <a:cs typeface="Arial"/>
               </a:defRPr>
             </a:pPr>
             <a:r>
-              <a:rPr sz="3750" b="1">
-                <a:solidFill>
-                  <a:srgbClr val="152B3A"/>
-                </a:solidFill>
+              <a:rPr sz="3600" b="1">
+                <a:solidFill>
+                  <a:srgbClr val="152B3A"/>
+                </a:solidFill>
+                <a:latin typeface="Arial"/>
+                <a:ea typeface="Arial"/>
+                <a:cs typeface="Arial"/>
               </a:rPr>
               <a:t>Backbones and no backbones</a:t>
             </a:r>
@@ -2474,21 +2591,30 @@
           </a:ln>
         </p:spPr>
         <p:txBody>
-          <a:bodyPr xmlns:a="http://schemas.openxmlformats.org/drawingml/2006/main" lIns="0" tIns="0" rIns="0" bIns="0" anchor="ctr"/>
+          <a:bodyPr xmlns:a="http://schemas.openxmlformats.org/drawingml/2006/main" wrap="square" lIns="0" tIns="0" rIns="0" bIns="0" anchor="ctr">
+            <a:noAutofit/>
+          </a:bodyPr>
           <a:lstStyle xmlns:a="http://schemas.openxmlformats.org/drawingml/2006/main"/>
           <a:p xmlns:a="http://schemas.openxmlformats.org/drawingml/2006/main">
             <a:pPr>
-              <a:defRPr sz="1275" b="0">
+              <a:buNone/>
+              <a:defRPr sz="1200" b="0">
                 <a:solidFill>
                   <a:srgbClr val="50616B"/>
                 </a:solidFill>
+                <a:latin typeface="Arial"/>
+                <a:ea typeface="Arial"/>
+                <a:cs typeface="Arial"/>
               </a:defRPr>
             </a:pPr>
             <a:r>
-              <a:rPr sz="1275" b="0">
+              <a:rPr sz="1200" b="0">
                 <a:solidFill>
                   <a:srgbClr val="50616B"/>
                 </a:solidFill>
+                <a:latin typeface="Arial"/>
+                <a:ea typeface="Arial"/>
+                <a:cs typeface="Arial"/>
               </a:rPr>
               <a:t>AUTUMN 1  ·  WEEK 3  ·  LESSON A</a:t>
             </a:r>
@@ -2524,14 +2650,20 @@
           </a:ln>
         </p:spPr>
         <p:txBody>
-          <a:bodyPr xmlns:a="http://schemas.openxmlformats.org/drawingml/2006/main" lIns="0" tIns="0" rIns="0" bIns="0" anchor="ctr"/>
+          <a:bodyPr xmlns:a="http://schemas.openxmlformats.org/drawingml/2006/main" wrap="square" lIns="0" tIns="0" rIns="0" bIns="0" anchor="ctr">
+            <a:noAutofit/>
+          </a:bodyPr>
           <a:lstStyle xmlns:a="http://schemas.openxmlformats.org/drawingml/2006/main"/>
           <a:p xmlns:a="http://schemas.openxmlformats.org/drawingml/2006/main">
             <a:pPr>
+              <a:buNone/>
               <a:defRPr sz="1350" b="1">
                 <a:solidFill>
                   <a:srgbClr val="28685E"/>
                 </a:solidFill>
+                <a:latin typeface="Arial"/>
+                <a:ea typeface="Arial"/>
+                <a:cs typeface="Arial"/>
               </a:defRPr>
             </a:pPr>
             <a:r>
@@ -2539,6 +2671,9 @@
                 <a:solidFill>
                   <a:srgbClr val="28685E"/>
                 </a:solidFill>
+                <a:latin typeface="Arial"/>
+                <a:ea typeface="Arial"/>
+                <a:cs typeface="Arial"/>
               </a:rPr>
               <a:t>01</a:t>
             </a:r>
@@ -2561,8 +2696,8 @@
         </p:nvSpPr>
         <p:spPr>
           <a:xfrm xmlns:a="http://schemas.openxmlformats.org/drawingml/2006/main">
-            <a:off x="609600" y="2809875"/>
-            <a:ext cx="10668000" cy="1000125"/>
+            <a:off x="609600" y="2400300"/>
+            <a:ext cx="6191250" cy="1409700"/>
           </a:xfrm>
           <a:prstGeom xmlns:a="http://schemas.openxmlformats.org/drawingml/2006/main" prst="rect">
             <a:avLst/>
@@ -2574,21 +2709,30 @@
           </a:ln>
         </p:spPr>
         <p:txBody>
-          <a:bodyPr xmlns:a="http://schemas.openxmlformats.org/drawingml/2006/main" lIns="0" tIns="0" rIns="0" bIns="0" anchor="ctr"/>
+          <a:bodyPr xmlns:a="http://schemas.openxmlformats.org/drawingml/2006/main" wrap="square" lIns="0" tIns="0" rIns="0" bIns="0" anchor="ctr">
+            <a:noAutofit/>
+          </a:bodyPr>
           <a:lstStyle xmlns:a="http://schemas.openxmlformats.org/drawingml/2006/main"/>
           <a:p xmlns:a="http://schemas.openxmlformats.org/drawingml/2006/main">
             <a:pPr>
-              <a:defRPr sz="3900" b="1">
+              <a:buNone/>
+              <a:defRPr sz="3450" b="1">
                 <a:solidFill>
                   <a:srgbClr val="28685E"/>
                 </a:solidFill>
+                <a:latin typeface="Arial"/>
+                <a:ea typeface="Arial"/>
+                <a:cs typeface="Arial"/>
               </a:defRPr>
             </a:pPr>
             <a:r>
-              <a:rPr sz="3900" b="1">
+              <a:rPr sz="3450" b="1">
                 <a:solidFill>
                   <a:srgbClr val="28685E"/>
                 </a:solidFill>
+                <a:latin typeface="Arial"/>
+                <a:ea typeface="Arial"/>
+                <a:cs typeface="Arial"/>
               </a:rPr>
               <a:t>One body clue. Two animal groups.</a:t>
             </a:r>
@@ -2611,8 +2755,8 @@
         </p:nvSpPr>
         <p:spPr>
           <a:xfrm xmlns:a="http://schemas.openxmlformats.org/drawingml/2006/main">
-            <a:off x="609600" y="4143375"/>
-            <a:ext cx="10668000" cy="1143000"/>
+            <a:off x="609600" y="4286250"/>
+            <a:ext cx="6667500" cy="1314450"/>
           </a:xfrm>
           <a:prstGeom xmlns:a="http://schemas.openxmlformats.org/drawingml/2006/main" prst="rect">
             <a:avLst/>
@@ -2624,27 +2768,58 @@
           </a:ln>
         </p:spPr>
         <p:txBody>
-          <a:bodyPr xmlns:a="http://schemas.openxmlformats.org/drawingml/2006/main" lIns="0" tIns="0" rIns="0" bIns="0" anchor="ctr"/>
+          <a:bodyPr xmlns:a="http://schemas.openxmlformats.org/drawingml/2006/main" wrap="square" lIns="0" tIns="0" rIns="0" bIns="0" anchor="ctr">
+            <a:noAutofit/>
+          </a:bodyPr>
           <a:lstStyle xmlns:a="http://schemas.openxmlformats.org/drawingml/2006/main"/>
           <a:p xmlns:a="http://schemas.openxmlformats.org/drawingml/2006/main">
             <a:pPr>
-              <a:defRPr sz="2550" b="0">
-                <a:solidFill>
-                  <a:srgbClr val="152B3A"/>
-                </a:solidFill>
+              <a:buNone/>
+              <a:defRPr sz="2400" b="0">
+                <a:solidFill>
+                  <a:srgbClr val="152B3A"/>
+                </a:solidFill>
+                <a:latin typeface="Arial"/>
+                <a:ea typeface="Arial"/>
+                <a:cs typeface="Arial"/>
               </a:defRPr>
             </a:pPr>
             <a:r>
-              <a:rPr sz="2550" b="0">
-                <a:solidFill>
-                  <a:srgbClr val="152B3A"/>
-                </a:solidFill>
+              <a:rPr sz="2400" b="0">
+                <a:solidFill>
+                  <a:srgbClr val="152B3A"/>
+                </a:solidFill>
+                <a:latin typeface="Arial"/>
+                <a:ea typeface="Arial"/>
+                <a:cs typeface="Arial"/>
               </a:rPr>
               <a:t>I can use evidence to decide whether an animal has a backbone.</a:t>
             </a:r>
           </a:p>
         </p:txBody>
       </p:sp>
+      <p:pic>
+        <p:nvPicPr>
+          <p:cNvPr id="22" name=""/>
+          <p:cNvPicPr>
+            <a:picLocks xmlns:a="http://schemas.openxmlformats.org/drawingml/2006/main" noChangeAspect="1"/>
+          </p:cNvPicPr>
+          <p:nvPr/>
+        </p:nvPicPr>
+        <p:blipFill>
+          <a:blip xmlns:r="http://schemas.openxmlformats.org/officeDocument/2006/relationships" xmlns:a="http://schemas.openxmlformats.org/drawingml/2006/main" r:embed="R378fa956864546f5"/>
+          <a:stretch xmlns:a="http://schemas.openxmlformats.org/drawingml/2006/main"/>
+        </p:blipFill>
+        <p:spPr>
+          <a:xfrm xmlns:a="http://schemas.openxmlformats.org/drawingml/2006/main">
+            <a:off x="7620000" y="2369344"/>
+            <a:ext cx="3714750" cy="2786063"/>
+          </a:xfrm>
+          <a:prstGeom xmlns:a="http://schemas.openxmlformats.org/drawingml/2006/main" prst="rect">
+            <a:avLst/>
+          </a:prstGeom>
+        </p:spPr>
+      </p:pic>
     </p:spTree>
     <p:extLst>
       <p:ext uri="{BB962C8B-B14F-4D97-AF65-F5344CB8AC3E}">
@@ -2661,7 +2836,7 @@
     <p:bg>
       <p:bgPr>
         <a:solidFill xmlns:a="http://schemas.openxmlformats.org/drawingml/2006/main">
-          <a:srgbClr val="F5F1E8"/>
+          <a:srgbClr val="FBF9F3"/>
         </a:solidFill>
       </p:bgPr>
     </p:bg>
@@ -2690,8 +2865,8 @@
         </p:nvSpPr>
         <p:spPr>
           <a:xfrm xmlns:a="http://schemas.openxmlformats.org/drawingml/2006/main">
-            <a:off x="609600" y="552450"/>
-            <a:ext cx="781050" cy="57150"/>
+            <a:off x="609600" y="742950"/>
+            <a:ext cx="9906000" cy="38100"/>
           </a:xfrm>
           <a:prstGeom xmlns:a="http://schemas.openxmlformats.org/drawingml/2006/main" prst="rect">
             <a:avLst/>
@@ -2721,8 +2896,8 @@
         </p:nvSpPr>
         <p:spPr>
           <a:xfrm xmlns:a="http://schemas.openxmlformats.org/drawingml/2006/main">
-            <a:off x="609600" y="762000"/>
-            <a:ext cx="9334500" cy="285750"/>
+            <a:off x="609600" y="342900"/>
+            <a:ext cx="9334500" cy="266700"/>
           </a:xfrm>
           <a:prstGeom xmlns:a="http://schemas.openxmlformats.org/drawingml/2006/main" prst="rect">
             <a:avLst/>
@@ -2734,21 +2909,30 @@
           </a:ln>
         </p:spPr>
         <p:txBody>
-          <a:bodyPr xmlns:a="http://schemas.openxmlformats.org/drawingml/2006/main" lIns="0" tIns="0" rIns="0" bIns="0" anchor="ctr"/>
+          <a:bodyPr xmlns:a="http://schemas.openxmlformats.org/drawingml/2006/main" wrap="square" lIns="0" tIns="0" rIns="0" bIns="0" anchor="ctr">
+            <a:noAutofit/>
+          </a:bodyPr>
           <a:lstStyle xmlns:a="http://schemas.openxmlformats.org/drawingml/2006/main"/>
           <a:p xmlns:a="http://schemas.openxmlformats.org/drawingml/2006/main">
             <a:pPr>
-              <a:defRPr sz="1500" b="1">
+              <a:buNone/>
+              <a:defRPr sz="1425" b="1">
                 <a:solidFill>
                   <a:srgbClr val="28685E"/>
                 </a:solidFill>
+                <a:latin typeface="Arial"/>
+                <a:ea typeface="Arial"/>
+                <a:cs typeface="Arial"/>
               </a:defRPr>
             </a:pPr>
             <a:r>
-              <a:rPr sz="1500" b="1">
+              <a:rPr sz="1425" b="1">
                 <a:solidFill>
                   <a:srgbClr val="28685E"/>
                 </a:solidFill>
+                <a:latin typeface="Arial"/>
+                <a:ea typeface="Arial"/>
+                <a:cs typeface="Arial"/>
               </a:rPr>
               <a:t>MADE BY MATT  /  BUILD SCIENCE</a:t>
             </a:r>
@@ -2757,14 +2941,14 @@
       </p:sp>
       <p:pic>
         <p:nvPicPr>
-          <p:cNvPr id="14" name=""/>
+          <p:cNvPr id="18" name=""/>
           <p:cNvPicPr>
             <a:picLocks xmlns:a="http://schemas.openxmlformats.org/drawingml/2006/main" noChangeAspect="1"/>
           </p:cNvPicPr>
           <p:nvPr/>
         </p:nvPicPr>
         <p:blipFill>
-          <a:blip xmlns:r="http://schemas.openxmlformats.org/officeDocument/2006/relationships" xmlns:a="http://schemas.openxmlformats.org/drawingml/2006/main" r:embed="Rc534a565238a4398"/>
+          <a:blip xmlns:r="http://schemas.openxmlformats.org/officeDocument/2006/relationships" xmlns:a="http://schemas.openxmlformats.org/drawingml/2006/main" r:embed="Rb88c461d5ffc4cdc"/>
           <a:stretch xmlns:a="http://schemas.openxmlformats.org/drawingml/2006/main"/>
         </p:blipFill>
         <p:spPr>
@@ -2793,8 +2977,8 @@
         </p:nvSpPr>
         <p:spPr>
           <a:xfrm xmlns:a="http://schemas.openxmlformats.org/drawingml/2006/main">
-            <a:off x="609600" y="1352550"/>
-            <a:ext cx="10972800" cy="952500"/>
+            <a:off x="609600" y="1047750"/>
+            <a:ext cx="10972800" cy="895350"/>
           </a:xfrm>
           <a:prstGeom xmlns:a="http://schemas.openxmlformats.org/drawingml/2006/main" prst="rect">
             <a:avLst/>
@@ -2806,21 +2990,30 @@
           </a:ln>
         </p:spPr>
         <p:txBody>
-          <a:bodyPr xmlns:a="http://schemas.openxmlformats.org/drawingml/2006/main" lIns="0" tIns="0" rIns="0" bIns="0" anchor="ctr"/>
+          <a:bodyPr xmlns:a="http://schemas.openxmlformats.org/drawingml/2006/main" wrap="square" lIns="0" tIns="0" rIns="0" bIns="0" anchor="ctr">
+            <a:noAutofit/>
+          </a:bodyPr>
           <a:lstStyle xmlns:a="http://schemas.openxmlformats.org/drawingml/2006/main"/>
           <a:p xmlns:a="http://schemas.openxmlformats.org/drawingml/2006/main">
             <a:pPr>
-              <a:defRPr sz="3750" b="1">
-                <a:solidFill>
-                  <a:srgbClr val="152B3A"/>
-                </a:solidFill>
+              <a:buNone/>
+              <a:defRPr sz="3600" b="1">
+                <a:solidFill>
+                  <a:srgbClr val="152B3A"/>
+                </a:solidFill>
+                <a:latin typeface="Arial"/>
+                <a:ea typeface="Arial"/>
+                <a:cs typeface="Arial"/>
               </a:defRPr>
             </a:pPr>
             <a:r>
-              <a:rPr sz="3750" b="1">
-                <a:solidFill>
-                  <a:srgbClr val="152B3A"/>
-                </a:solidFill>
+              <a:rPr sz="3600" b="1">
+                <a:solidFill>
+                  <a:srgbClr val="152B3A"/>
+                </a:solidFill>
+                <a:latin typeface="Arial"/>
+                <a:ea typeface="Arial"/>
+                <a:cs typeface="Arial"/>
               </a:rPr>
               <a:t>Sort the evidence cards</a:t>
             </a:r>
@@ -2887,21 +3080,30 @@
           </a:ln>
         </p:spPr>
         <p:txBody>
-          <a:bodyPr xmlns:a="http://schemas.openxmlformats.org/drawingml/2006/main" lIns="0" tIns="0" rIns="0" bIns="0" anchor="ctr"/>
+          <a:bodyPr xmlns:a="http://schemas.openxmlformats.org/drawingml/2006/main" wrap="square" lIns="0" tIns="0" rIns="0" bIns="0" anchor="ctr">
+            <a:noAutofit/>
+          </a:bodyPr>
           <a:lstStyle xmlns:a="http://schemas.openxmlformats.org/drawingml/2006/main"/>
           <a:p xmlns:a="http://schemas.openxmlformats.org/drawingml/2006/main">
             <a:pPr>
-              <a:defRPr sz="1275" b="0">
+              <a:buNone/>
+              <a:defRPr sz="1200" b="0">
                 <a:solidFill>
                   <a:srgbClr val="50616B"/>
                 </a:solidFill>
+                <a:latin typeface="Arial"/>
+                <a:ea typeface="Arial"/>
+                <a:cs typeface="Arial"/>
               </a:defRPr>
             </a:pPr>
             <a:r>
-              <a:rPr sz="1275" b="0">
+              <a:rPr sz="1200" b="0">
                 <a:solidFill>
                   <a:srgbClr val="50616B"/>
                 </a:solidFill>
+                <a:latin typeface="Arial"/>
+                <a:ea typeface="Arial"/>
+                <a:cs typeface="Arial"/>
               </a:rPr>
               <a:t>AUTUMN 1  ·  WEEK 3  ·  LESSON A</a:t>
             </a:r>
@@ -2937,14 +3139,20 @@
           </a:ln>
         </p:spPr>
         <p:txBody>
-          <a:bodyPr xmlns:a="http://schemas.openxmlformats.org/drawingml/2006/main" lIns="0" tIns="0" rIns="0" bIns="0" anchor="ctr"/>
+          <a:bodyPr xmlns:a="http://schemas.openxmlformats.org/drawingml/2006/main" wrap="square" lIns="0" tIns="0" rIns="0" bIns="0" anchor="ctr">
+            <a:noAutofit/>
+          </a:bodyPr>
           <a:lstStyle xmlns:a="http://schemas.openxmlformats.org/drawingml/2006/main"/>
           <a:p xmlns:a="http://schemas.openxmlformats.org/drawingml/2006/main">
             <a:pPr>
+              <a:buNone/>
               <a:defRPr sz="1350" b="1">
                 <a:solidFill>
                   <a:srgbClr val="28685E"/>
                 </a:solidFill>
+                <a:latin typeface="Arial"/>
+                <a:ea typeface="Arial"/>
+                <a:cs typeface="Arial"/>
               </a:defRPr>
             </a:pPr>
             <a:r>
@@ -2952,6 +3160,9 @@
                 <a:solidFill>
                   <a:srgbClr val="28685E"/>
                 </a:solidFill>
+                <a:latin typeface="Arial"/>
+                <a:ea typeface="Arial"/>
+                <a:cs typeface="Arial"/>
               </a:rPr>
               <a:t>10</a:t>
             </a:r>
@@ -2974,8 +3185,8 @@
         </p:nvSpPr>
         <p:spPr>
           <a:xfrm xmlns:a="http://schemas.openxmlformats.org/drawingml/2006/main">
-            <a:off x="609600" y="2619375"/>
-            <a:ext cx="4953000" cy="428625"/>
+            <a:off x="609600" y="2257425"/>
+            <a:ext cx="5143500" cy="533400"/>
           </a:xfrm>
           <a:prstGeom xmlns:a="http://schemas.openxmlformats.org/drawingml/2006/main" prst="rect">
             <a:avLst/>
@@ -2987,21 +3198,30 @@
           </a:ln>
         </p:spPr>
         <p:txBody>
-          <a:bodyPr xmlns:a="http://schemas.openxmlformats.org/drawingml/2006/main" lIns="0" tIns="0" rIns="0" bIns="0" anchor="ctr"/>
+          <a:bodyPr xmlns:a="http://schemas.openxmlformats.org/drawingml/2006/main" wrap="square" lIns="0" tIns="0" rIns="0" bIns="0" anchor="ctr">
+            <a:noAutofit/>
+          </a:bodyPr>
           <a:lstStyle xmlns:a="http://schemas.openxmlformats.org/drawingml/2006/main"/>
           <a:p xmlns:a="http://schemas.openxmlformats.org/drawingml/2006/main">
             <a:pPr>
-              <a:defRPr sz="2025" b="1">
+              <a:buNone/>
+              <a:defRPr sz="2100" b="1">
                 <a:solidFill>
                   <a:srgbClr val="28685E"/>
                 </a:solidFill>
+                <a:latin typeface="Arial"/>
+                <a:ea typeface="Arial"/>
+                <a:cs typeface="Arial"/>
               </a:defRPr>
             </a:pPr>
             <a:r>
-              <a:rPr sz="2025" b="1">
+              <a:rPr sz="2100" b="1">
                 <a:solidFill>
                   <a:srgbClr val="28685E"/>
                 </a:solidFill>
+                <a:latin typeface="Arial"/>
+                <a:ea typeface="Arial"/>
+                <a:cs typeface="Arial"/>
               </a:rPr>
               <a:t>ANIMAL CARDS</a:t>
             </a:r>
@@ -3024,8 +3244,8 @@
         </p:nvSpPr>
         <p:spPr>
           <a:xfrm xmlns:a="http://schemas.openxmlformats.org/drawingml/2006/main">
-            <a:off x="6572250" y="2619375"/>
-            <a:ext cx="4953000" cy="428625"/>
+            <a:off x="6572250" y="2257425"/>
+            <a:ext cx="5010150" cy="533400"/>
           </a:xfrm>
           <a:prstGeom xmlns:a="http://schemas.openxmlformats.org/drawingml/2006/main" prst="rect">
             <a:avLst/>
@@ -3037,21 +3257,30 @@
           </a:ln>
         </p:spPr>
         <p:txBody>
-          <a:bodyPr xmlns:a="http://schemas.openxmlformats.org/drawingml/2006/main" lIns="0" tIns="0" rIns="0" bIns="0" anchor="ctr"/>
+          <a:bodyPr xmlns:a="http://schemas.openxmlformats.org/drawingml/2006/main" wrap="square" lIns="0" tIns="0" rIns="0" bIns="0" anchor="ctr">
+            <a:noAutofit/>
+          </a:bodyPr>
           <a:lstStyle xmlns:a="http://schemas.openxmlformats.org/drawingml/2006/main"/>
           <a:p xmlns:a="http://schemas.openxmlformats.org/drawingml/2006/main">
             <a:pPr>
-              <a:defRPr sz="2025" b="1">
+              <a:buNone/>
+              <a:defRPr sz="2100" b="1">
                 <a:solidFill>
                   <a:srgbClr val="A65D25"/>
                 </a:solidFill>
+                <a:latin typeface="Arial"/>
+                <a:ea typeface="Arial"/>
+                <a:cs typeface="Arial"/>
               </a:defRPr>
             </a:pPr>
             <a:r>
-              <a:rPr sz="2025" b="1">
+              <a:rPr sz="2100" b="1">
                 <a:solidFill>
                   <a:srgbClr val="A65D25"/>
                 </a:solidFill>
+                <a:latin typeface="Arial"/>
+                <a:ea typeface="Arial"/>
+                <a:cs typeface="Arial"/>
               </a:rPr>
               <a:t>IS THIS A RELIABLE TEST?</a:t>
             </a:r>
@@ -3074,8 +3303,8 @@
         </p:nvSpPr>
         <p:spPr>
           <a:xfrm xmlns:a="http://schemas.openxmlformats.org/drawingml/2006/main">
-            <a:off x="609600" y="3333750"/>
-            <a:ext cx="4953000" cy="2524125"/>
+            <a:off x="609600" y="3238500"/>
+            <a:ext cx="5143500" cy="2286000"/>
           </a:xfrm>
           <a:prstGeom xmlns:a="http://schemas.openxmlformats.org/drawingml/2006/main" prst="rect">
             <a:avLst/>
@@ -3087,14 +3316,20 @@
           </a:ln>
         </p:spPr>
         <p:txBody>
-          <a:bodyPr xmlns:a="http://schemas.openxmlformats.org/drawingml/2006/main" lIns="0" tIns="0" rIns="0" bIns="0" anchor="ctr"/>
+          <a:bodyPr xmlns:a="http://schemas.openxmlformats.org/drawingml/2006/main" wrap="square" lIns="0" tIns="0" rIns="0" bIns="0" anchor="ctr">
+            <a:noAutofit/>
+          </a:bodyPr>
           <a:lstStyle xmlns:a="http://schemas.openxmlformats.org/drawingml/2006/main"/>
           <a:p xmlns:a="http://schemas.openxmlformats.org/drawingml/2006/main">
             <a:pPr>
+              <a:buNone/>
               <a:defRPr sz="2400" b="0">
                 <a:solidFill>
                   <a:srgbClr val="152B3A"/>
                 </a:solidFill>
+                <a:latin typeface="Arial"/>
+                <a:ea typeface="Arial"/>
+                <a:cs typeface="Arial"/>
               </a:defRPr>
             </a:pPr>
             <a:r>
@@ -3102,16 +3337,23 @@
                 <a:solidFill>
                   <a:srgbClr val="152B3A"/>
                 </a:solidFill>
+                <a:latin typeface="Arial"/>
+                <a:ea typeface="Arial"/>
+                <a:cs typeface="Arial"/>
               </a:rPr>
               <a:t>Bat</a:t>
             </a:r>
           </a:p>
           <a:p xmlns:a="http://schemas.openxmlformats.org/drawingml/2006/main">
             <a:pPr>
+              <a:buNone/>
               <a:defRPr sz="2400" b="0">
                 <a:solidFill>
                   <a:srgbClr val="152B3A"/>
                 </a:solidFill>
+                <a:latin typeface="Arial"/>
+                <a:ea typeface="Arial"/>
+                <a:cs typeface="Arial"/>
               </a:defRPr>
             </a:pPr>
             <a:r>
@@ -3119,16 +3361,23 @@
                 <a:solidFill>
                   <a:srgbClr val="152B3A"/>
                 </a:solidFill>
+                <a:latin typeface="Arial"/>
+                <a:ea typeface="Arial"/>
+                <a:cs typeface="Arial"/>
               </a:rPr>
               <a:t>Crab</a:t>
             </a:r>
           </a:p>
           <a:p xmlns:a="http://schemas.openxmlformats.org/drawingml/2006/main">
             <a:pPr>
+              <a:buNone/>
               <a:defRPr sz="2400" b="0">
                 <a:solidFill>
                   <a:srgbClr val="152B3A"/>
                 </a:solidFill>
+                <a:latin typeface="Arial"/>
+                <a:ea typeface="Arial"/>
+                <a:cs typeface="Arial"/>
               </a:defRPr>
             </a:pPr>
             <a:r>
@@ -3136,16 +3385,23 @@
                 <a:solidFill>
                   <a:srgbClr val="152B3A"/>
                 </a:solidFill>
+                <a:latin typeface="Arial"/>
+                <a:ea typeface="Arial"/>
+                <a:cs typeface="Arial"/>
               </a:rPr>
               <a:t>Snake</a:t>
             </a:r>
           </a:p>
           <a:p xmlns:a="http://schemas.openxmlformats.org/drawingml/2006/main">
             <a:pPr>
+              <a:buNone/>
               <a:defRPr sz="2400" b="0">
                 <a:solidFill>
                   <a:srgbClr val="152B3A"/>
                 </a:solidFill>
+                <a:latin typeface="Arial"/>
+                <a:ea typeface="Arial"/>
+                <a:cs typeface="Arial"/>
               </a:defRPr>
             </a:pPr>
             <a:r>
@@ -3153,6 +3409,9 @@
                 <a:solidFill>
                   <a:srgbClr val="152B3A"/>
                 </a:solidFill>
+                <a:latin typeface="Arial"/>
+                <a:ea typeface="Arial"/>
+                <a:cs typeface="Arial"/>
               </a:rPr>
               <a:t>Jellyfish</a:t>
             </a:r>
@@ -3175,8 +3434,8 @@
         </p:nvSpPr>
         <p:spPr>
           <a:xfrm xmlns:a="http://schemas.openxmlformats.org/drawingml/2006/main">
-            <a:off x="6572250" y="3333750"/>
-            <a:ext cx="4857750" cy="2524125"/>
+            <a:off x="6572250" y="3238500"/>
+            <a:ext cx="5010150" cy="2286000"/>
           </a:xfrm>
           <a:prstGeom xmlns:a="http://schemas.openxmlformats.org/drawingml/2006/main" prst="rect">
             <a:avLst/>
@@ -3188,14 +3447,20 @@
           </a:ln>
         </p:spPr>
         <p:txBody>
-          <a:bodyPr xmlns:a="http://schemas.openxmlformats.org/drawingml/2006/main" lIns="0" tIns="0" rIns="0" bIns="0" anchor="ctr"/>
+          <a:bodyPr xmlns:a="http://schemas.openxmlformats.org/drawingml/2006/main" wrap="square" lIns="0" tIns="0" rIns="0" bIns="0" anchor="ctr">
+            <a:noAutofit/>
+          </a:bodyPr>
           <a:lstStyle xmlns:a="http://schemas.openxmlformats.org/drawingml/2006/main"/>
           <a:p xmlns:a="http://schemas.openxmlformats.org/drawingml/2006/main">
             <a:pPr>
+              <a:buNone/>
               <a:defRPr sz="2400" b="0">
                 <a:solidFill>
                   <a:srgbClr val="152B3A"/>
                 </a:solidFill>
+                <a:latin typeface="Arial"/>
+                <a:ea typeface="Arial"/>
+                <a:cs typeface="Arial"/>
               </a:defRPr>
             </a:pPr>
             <a:r>
@@ -3203,16 +3468,23 @@
                 <a:solidFill>
                   <a:srgbClr val="152B3A"/>
                 </a:solidFill>
+                <a:latin typeface="Arial"/>
+                <a:ea typeface="Arial"/>
+                <a:cs typeface="Arial"/>
               </a:rPr>
               <a:t>It has a backbone inside.</a:t>
             </a:r>
           </a:p>
           <a:p xmlns:a="http://schemas.openxmlformats.org/drawingml/2006/main">
             <a:pPr>
+              <a:buNone/>
               <a:defRPr sz="2400" b="0">
                 <a:solidFill>
                   <a:srgbClr val="152B3A"/>
                 </a:solidFill>
+                <a:latin typeface="Arial"/>
+                <a:ea typeface="Arial"/>
+                <a:cs typeface="Arial"/>
               </a:defRPr>
             </a:pPr>
             <a:r>
@@ -3220,16 +3492,23 @@
                 <a:solidFill>
                   <a:srgbClr val="152B3A"/>
                 </a:solidFill>
+                <a:latin typeface="Arial"/>
+                <a:ea typeface="Arial"/>
+                <a:cs typeface="Arial"/>
               </a:rPr>
               <a:t>It is furry.</a:t>
             </a:r>
           </a:p>
           <a:p xmlns:a="http://schemas.openxmlformats.org/drawingml/2006/main">
             <a:pPr>
+              <a:buNone/>
               <a:defRPr sz="2400" b="0">
                 <a:solidFill>
                   <a:srgbClr val="152B3A"/>
                 </a:solidFill>
+                <a:latin typeface="Arial"/>
+                <a:ea typeface="Arial"/>
+                <a:cs typeface="Arial"/>
               </a:defRPr>
             </a:pPr>
             <a:r>
@@ -3237,11 +3516,76 @@
                 <a:solidFill>
                   <a:srgbClr val="152B3A"/>
                 </a:solidFill>
+                <a:latin typeface="Arial"/>
+                <a:ea typeface="Arial"/>
+                <a:cs typeface="Arial"/>
               </a:rPr>
               <a:t>It is small.</a:t>
             </a:r>
           </a:p>
         </p:txBody>
+      </p:sp>
+      <p:sp>
+        <p:nvSpPr>
+          <p:cNvPr id="14" name="">
+            <a:extLst xmlns:a="http://schemas.openxmlformats.org/drawingml/2006/main">
+              <a:ext uri="{FF2B5EF4-FFF2-40B4-BE49-F238E27FC236}">
+                <a16:creationId xmlns:a16="http://schemas.microsoft.com/office/drawing/2014/main" id="{4115969A-BA15-4E1F-A083-96BBA606B106}"/>
+              </a:ext>
+            </a:extLst>
+          </p:cNvPr>
+          <p:cNvSpPr>
+            <a:spLocks xmlns:a="http://schemas.openxmlformats.org/drawingml/2006/main" noGrp="1"/>
+          </p:cNvSpPr>
+          <p:nvPr/>
+        </p:nvSpPr>
+        <p:spPr>
+          <a:xfrm xmlns:a="http://schemas.openxmlformats.org/drawingml/2006/main">
+            <a:off x="609600" y="2886075"/>
+            <a:ext cx="5048250" cy="0"/>
+          </a:xfrm>
+          <a:prstGeom xmlns:a="http://schemas.openxmlformats.org/drawingml/2006/main" prst="line">
+            <a:avLst/>
+          </a:prstGeom>
+          <a:noFill xmlns:a="http://schemas.openxmlformats.org/drawingml/2006/main"/>
+          <a:ln xmlns:a="http://schemas.openxmlformats.org/drawingml/2006/main" w="28575">
+            <a:solidFill>
+              <a:srgbClr val="DCE7DD"/>
+            </a:solidFill>
+            <a:prstDash val="solid"/>
+          </a:ln>
+        </p:spPr>
+      </p:sp>
+      <p:sp>
+        <p:nvSpPr>
+          <p:cNvPr id="15" name="">
+            <a:extLst xmlns:a="http://schemas.openxmlformats.org/drawingml/2006/main">
+              <a:ext uri="{FF2B5EF4-FFF2-40B4-BE49-F238E27FC236}">
+                <a16:creationId xmlns:a16="http://schemas.microsoft.com/office/drawing/2014/main" id="{3A2DEDD4-59F5-431E-89FD-407BD400D451}"/>
+              </a:ext>
+            </a:extLst>
+          </p:cNvPr>
+          <p:cNvSpPr>
+            <a:spLocks xmlns:a="http://schemas.openxmlformats.org/drawingml/2006/main" noGrp="1"/>
+          </p:cNvSpPr>
+          <p:nvPr/>
+        </p:nvSpPr>
+        <p:spPr>
+          <a:xfrm xmlns:a="http://schemas.openxmlformats.org/drawingml/2006/main">
+            <a:off x="6572250" y="2886075"/>
+            <a:ext cx="5010150" cy="0"/>
+          </a:xfrm>
+          <a:prstGeom xmlns:a="http://schemas.openxmlformats.org/drawingml/2006/main" prst="line">
+            <a:avLst/>
+          </a:prstGeom>
+          <a:noFill xmlns:a="http://schemas.openxmlformats.org/drawingml/2006/main"/>
+          <a:ln xmlns:a="http://schemas.openxmlformats.org/drawingml/2006/main" w="28575">
+            <a:solidFill>
+              <a:srgbClr val="DCE7DD"/>
+            </a:solidFill>
+            <a:prstDash val="solid"/>
+          </a:ln>
+        </p:spPr>
       </p:sp>
     </p:spTree>
     <p:extLst>
@@ -3259,7 +3603,7 @@
     <p:bg>
       <p:bgPr>
         <a:solidFill xmlns:a="http://schemas.openxmlformats.org/drawingml/2006/main">
-          <a:srgbClr val="F5F1E8"/>
+          <a:srgbClr val="FBF9F3"/>
         </a:solidFill>
       </p:bgPr>
     </p:bg>
@@ -3288,8 +3632,8 @@
         </p:nvSpPr>
         <p:spPr>
           <a:xfrm xmlns:a="http://schemas.openxmlformats.org/drawingml/2006/main">
-            <a:off x="609600" y="552450"/>
-            <a:ext cx="781050" cy="57150"/>
+            <a:off x="609600" y="742950"/>
+            <a:ext cx="9906000" cy="38100"/>
           </a:xfrm>
           <a:prstGeom xmlns:a="http://schemas.openxmlformats.org/drawingml/2006/main" prst="rect">
             <a:avLst/>
@@ -3319,8 +3663,8 @@
         </p:nvSpPr>
         <p:spPr>
           <a:xfrm xmlns:a="http://schemas.openxmlformats.org/drawingml/2006/main">
-            <a:off x="609600" y="762000"/>
-            <a:ext cx="9334500" cy="285750"/>
+            <a:off x="609600" y="342900"/>
+            <a:ext cx="9334500" cy="266700"/>
           </a:xfrm>
           <a:prstGeom xmlns:a="http://schemas.openxmlformats.org/drawingml/2006/main" prst="rect">
             <a:avLst/>
@@ -3332,21 +3676,30 @@
           </a:ln>
         </p:spPr>
         <p:txBody>
-          <a:bodyPr xmlns:a="http://schemas.openxmlformats.org/drawingml/2006/main" lIns="0" tIns="0" rIns="0" bIns="0" anchor="ctr"/>
+          <a:bodyPr xmlns:a="http://schemas.openxmlformats.org/drawingml/2006/main" wrap="square" lIns="0" tIns="0" rIns="0" bIns="0" anchor="ctr">
+            <a:noAutofit/>
+          </a:bodyPr>
           <a:lstStyle xmlns:a="http://schemas.openxmlformats.org/drawingml/2006/main"/>
           <a:p xmlns:a="http://schemas.openxmlformats.org/drawingml/2006/main">
             <a:pPr>
-              <a:defRPr sz="1500" b="1">
+              <a:buNone/>
+              <a:defRPr sz="1425" b="1">
                 <a:solidFill>
                   <a:srgbClr val="28685E"/>
                 </a:solidFill>
+                <a:latin typeface="Arial"/>
+                <a:ea typeface="Arial"/>
+                <a:cs typeface="Arial"/>
               </a:defRPr>
             </a:pPr>
             <a:r>
-              <a:rPr sz="1500" b="1">
+              <a:rPr sz="1425" b="1">
                 <a:solidFill>
                   <a:srgbClr val="28685E"/>
                 </a:solidFill>
+                <a:latin typeface="Arial"/>
+                <a:ea typeface="Arial"/>
+                <a:cs typeface="Arial"/>
               </a:rPr>
               <a:t>MADE BY MATT  /  BUILD SCIENCE</a:t>
             </a:r>
@@ -3355,14 +3708,14 @@
       </p:sp>
       <p:pic>
         <p:nvPicPr>
-          <p:cNvPr id="14" name=""/>
+          <p:cNvPr id="16" name=""/>
           <p:cNvPicPr>
             <a:picLocks xmlns:a="http://schemas.openxmlformats.org/drawingml/2006/main" noChangeAspect="1"/>
           </p:cNvPicPr>
           <p:nvPr/>
         </p:nvPicPr>
         <p:blipFill>
-          <a:blip xmlns:r="http://schemas.openxmlformats.org/officeDocument/2006/relationships" xmlns:a="http://schemas.openxmlformats.org/drawingml/2006/main" r:embed="R3abe7c0f165b481e"/>
+          <a:blip xmlns:r="http://schemas.openxmlformats.org/officeDocument/2006/relationships" xmlns:a="http://schemas.openxmlformats.org/drawingml/2006/main" r:embed="Rfc516940d6134d71"/>
           <a:stretch xmlns:a="http://schemas.openxmlformats.org/drawingml/2006/main"/>
         </p:blipFill>
         <p:spPr>
@@ -3391,8 +3744,8 @@
         </p:nvSpPr>
         <p:spPr>
           <a:xfrm xmlns:a="http://schemas.openxmlformats.org/drawingml/2006/main">
-            <a:off x="609600" y="1352550"/>
-            <a:ext cx="10972800" cy="952500"/>
+            <a:off x="609600" y="1047750"/>
+            <a:ext cx="10972800" cy="895350"/>
           </a:xfrm>
           <a:prstGeom xmlns:a="http://schemas.openxmlformats.org/drawingml/2006/main" prst="rect">
             <a:avLst/>
@@ -3404,21 +3757,30 @@
           </a:ln>
         </p:spPr>
         <p:txBody>
-          <a:bodyPr xmlns:a="http://schemas.openxmlformats.org/drawingml/2006/main" lIns="0" tIns="0" rIns="0" bIns="0" anchor="ctr"/>
+          <a:bodyPr xmlns:a="http://schemas.openxmlformats.org/drawingml/2006/main" wrap="square" lIns="0" tIns="0" rIns="0" bIns="0" anchor="ctr">
+            <a:noAutofit/>
+          </a:bodyPr>
           <a:lstStyle xmlns:a="http://schemas.openxmlformats.org/drawingml/2006/main"/>
           <a:p xmlns:a="http://schemas.openxmlformats.org/drawingml/2006/main">
             <a:pPr>
-              <a:defRPr sz="3750" b="1">
-                <a:solidFill>
-                  <a:srgbClr val="152B3A"/>
-                </a:solidFill>
+              <a:buNone/>
+              <a:defRPr sz="3600" b="1">
+                <a:solidFill>
+                  <a:srgbClr val="152B3A"/>
+                </a:solidFill>
+                <a:latin typeface="Arial"/>
+                <a:ea typeface="Arial"/>
+                <a:cs typeface="Arial"/>
               </a:defRPr>
             </a:pPr>
             <a:r>
-              <a:rPr sz="3750" b="1">
-                <a:solidFill>
-                  <a:srgbClr val="152B3A"/>
-                </a:solidFill>
+              <a:rPr sz="3600" b="1">
+                <a:solidFill>
+                  <a:srgbClr val="152B3A"/>
+                </a:solidFill>
+                <a:latin typeface="Arial"/>
+                <a:ea typeface="Arial"/>
+                <a:cs typeface="Arial"/>
               </a:rPr>
               <a:t>Check one choice and keep it</a:t>
             </a:r>
@@ -3485,21 +3847,30 @@
           </a:ln>
         </p:spPr>
         <p:txBody>
-          <a:bodyPr xmlns:a="http://schemas.openxmlformats.org/drawingml/2006/main" lIns="0" tIns="0" rIns="0" bIns="0" anchor="ctr"/>
+          <a:bodyPr xmlns:a="http://schemas.openxmlformats.org/drawingml/2006/main" wrap="square" lIns="0" tIns="0" rIns="0" bIns="0" anchor="ctr">
+            <a:noAutofit/>
+          </a:bodyPr>
           <a:lstStyle xmlns:a="http://schemas.openxmlformats.org/drawingml/2006/main"/>
           <a:p xmlns:a="http://schemas.openxmlformats.org/drawingml/2006/main">
             <a:pPr>
-              <a:defRPr sz="1275" b="0">
+              <a:buNone/>
+              <a:defRPr sz="1200" b="0">
                 <a:solidFill>
                   <a:srgbClr val="50616B"/>
                 </a:solidFill>
+                <a:latin typeface="Arial"/>
+                <a:ea typeface="Arial"/>
+                <a:cs typeface="Arial"/>
               </a:defRPr>
             </a:pPr>
             <a:r>
-              <a:rPr sz="1275" b="0">
+              <a:rPr sz="1200" b="0">
                 <a:solidFill>
                   <a:srgbClr val="50616B"/>
                 </a:solidFill>
+                <a:latin typeface="Arial"/>
+                <a:ea typeface="Arial"/>
+                <a:cs typeface="Arial"/>
               </a:rPr>
               <a:t>AUTUMN 1  ·  WEEK 3  ·  LESSON A</a:t>
             </a:r>
@@ -3535,14 +3906,20 @@
           </a:ln>
         </p:spPr>
         <p:txBody>
-          <a:bodyPr xmlns:a="http://schemas.openxmlformats.org/drawingml/2006/main" lIns="0" tIns="0" rIns="0" bIns="0" anchor="ctr"/>
+          <a:bodyPr xmlns:a="http://schemas.openxmlformats.org/drawingml/2006/main" wrap="square" lIns="0" tIns="0" rIns="0" bIns="0" anchor="ctr">
+            <a:noAutofit/>
+          </a:bodyPr>
           <a:lstStyle xmlns:a="http://schemas.openxmlformats.org/drawingml/2006/main"/>
           <a:p xmlns:a="http://schemas.openxmlformats.org/drawingml/2006/main">
             <a:pPr>
+              <a:buNone/>
               <a:defRPr sz="1350" b="1">
                 <a:solidFill>
                   <a:srgbClr val="28685E"/>
                 </a:solidFill>
+                <a:latin typeface="Arial"/>
+                <a:ea typeface="Arial"/>
+                <a:cs typeface="Arial"/>
               </a:defRPr>
             </a:pPr>
             <a:r>
@@ -3550,6 +3927,9 @@
                 <a:solidFill>
                   <a:srgbClr val="28685E"/>
                 </a:solidFill>
+                <a:latin typeface="Arial"/>
+                <a:ea typeface="Arial"/>
+                <a:cs typeface="Arial"/>
               </a:rPr>
               <a:t>11</a:t>
             </a:r>
@@ -3572,8 +3952,8 @@
         </p:nvSpPr>
         <p:spPr>
           <a:xfrm xmlns:a="http://schemas.openxmlformats.org/drawingml/2006/main">
-            <a:off x="609600" y="2619375"/>
-            <a:ext cx="10972800" cy="714375"/>
+            <a:off x="609600" y="2305050"/>
+            <a:ext cx="10972800" cy="704850"/>
           </a:xfrm>
           <a:prstGeom xmlns:a="http://schemas.openxmlformats.org/drawingml/2006/main" prst="rect">
             <a:avLst/>
@@ -3585,14 +3965,20 @@
           </a:ln>
         </p:spPr>
         <p:txBody>
-          <a:bodyPr xmlns:a="http://schemas.openxmlformats.org/drawingml/2006/main" lIns="0" tIns="0" rIns="0" bIns="0" anchor="ctr"/>
+          <a:bodyPr xmlns:a="http://schemas.openxmlformats.org/drawingml/2006/main" wrap="square" lIns="0" tIns="0" rIns="0" bIns="0" anchor="ctr">
+            <a:noAutofit/>
+          </a:bodyPr>
           <a:lstStyle xmlns:a="http://schemas.openxmlformats.org/drawingml/2006/main"/>
           <a:p xmlns:a="http://schemas.openxmlformats.org/drawingml/2006/main">
             <a:pPr>
+              <a:buNone/>
               <a:defRPr sz="2550" b="0">
                 <a:solidFill>
                   <a:srgbClr val="152B3A"/>
                 </a:solidFill>
+                <a:latin typeface="Arial"/>
+                <a:ea typeface="Arial"/>
+                <a:cs typeface="Arial"/>
               </a:defRPr>
             </a:pPr>
             <a:r>
@@ -3600,6 +3986,9 @@
                 <a:solidFill>
                   <a:srgbClr val="152B3A"/>
                 </a:solidFill>
+                <a:latin typeface="Arial"/>
+                <a:ea typeface="Arial"/>
+                <a:cs typeface="Arial"/>
               </a:rPr>
               <a:t>Choose one animal card.</a:t>
             </a:r>
@@ -3622,8 +4011,8 @@
         </p:nvSpPr>
         <p:spPr>
           <a:xfrm xmlns:a="http://schemas.openxmlformats.org/drawingml/2006/main">
-            <a:off x="609600" y="3409950"/>
-            <a:ext cx="10972800" cy="714375"/>
+            <a:off x="609600" y="3143250"/>
+            <a:ext cx="10972800" cy="704850"/>
           </a:xfrm>
           <a:prstGeom xmlns:a="http://schemas.openxmlformats.org/drawingml/2006/main" prst="rect">
             <a:avLst/>
@@ -3635,14 +4024,20 @@
           </a:ln>
         </p:spPr>
         <p:txBody>
-          <a:bodyPr xmlns:a="http://schemas.openxmlformats.org/drawingml/2006/main" lIns="0" tIns="0" rIns="0" bIns="0" anchor="ctr"/>
+          <a:bodyPr xmlns:a="http://schemas.openxmlformats.org/drawingml/2006/main" wrap="square" lIns="0" tIns="0" rIns="0" bIns="0" anchor="ctr">
+            <a:noAutofit/>
+          </a:bodyPr>
           <a:lstStyle xmlns:a="http://schemas.openxmlformats.org/drawingml/2006/main"/>
           <a:p xmlns:a="http://schemas.openxmlformats.org/drawingml/2006/main">
             <a:pPr>
+              <a:buNone/>
               <a:defRPr sz="2550" b="0">
                 <a:solidFill>
                   <a:srgbClr val="152B3A"/>
                 </a:solidFill>
+                <a:latin typeface="Arial"/>
+                <a:ea typeface="Arial"/>
+                <a:cs typeface="Arial"/>
               </a:defRPr>
             </a:pPr>
             <a:r>
@@ -3650,6 +4045,9 @@
                 <a:solidFill>
                   <a:srgbClr val="152B3A"/>
                 </a:solidFill>
+                <a:latin typeface="Arial"/>
+                <a:ea typeface="Arial"/>
+                <a:cs typeface="Arial"/>
               </a:rPr>
               <a:t>Point to or say the body evidence.</a:t>
             </a:r>
@@ -3672,8 +4070,8 @@
         </p:nvSpPr>
         <p:spPr>
           <a:xfrm xmlns:a="http://schemas.openxmlformats.org/drawingml/2006/main">
-            <a:off x="609600" y="4200525"/>
-            <a:ext cx="10972800" cy="714375"/>
+            <a:off x="609600" y="3981450"/>
+            <a:ext cx="10972800" cy="704850"/>
           </a:xfrm>
           <a:prstGeom xmlns:a="http://schemas.openxmlformats.org/drawingml/2006/main" prst="rect">
             <a:avLst/>
@@ -3685,14 +4083,20 @@
           </a:ln>
         </p:spPr>
         <p:txBody>
-          <a:bodyPr xmlns:a="http://schemas.openxmlformats.org/drawingml/2006/main" lIns="0" tIns="0" rIns="0" bIns="0" anchor="ctr"/>
+          <a:bodyPr xmlns:a="http://schemas.openxmlformats.org/drawingml/2006/main" wrap="square" lIns="0" tIns="0" rIns="0" bIns="0" anchor="ctr">
+            <a:noAutofit/>
+          </a:bodyPr>
           <a:lstStyle xmlns:a="http://schemas.openxmlformats.org/drawingml/2006/main"/>
           <a:p xmlns:a="http://schemas.openxmlformats.org/drawingml/2006/main">
             <a:pPr>
+              <a:buNone/>
               <a:defRPr sz="2550" b="0">
                 <a:solidFill>
                   <a:srgbClr val="152B3A"/>
                 </a:solidFill>
+                <a:latin typeface="Arial"/>
+                <a:ea typeface="Arial"/>
+                <a:cs typeface="Arial"/>
               </a:defRPr>
             </a:pPr>
             <a:r>
@@ -3700,6 +4104,9 @@
                 <a:solidFill>
                   <a:srgbClr val="152B3A"/>
                 </a:solidFill>
+                <a:latin typeface="Arial"/>
+                <a:ea typeface="Arial"/>
+                <a:cs typeface="Arial"/>
               </a:rPr>
               <a:t>Keep or change your first choice.</a:t>
             </a:r>
@@ -3722,8 +4129,8 @@
         </p:nvSpPr>
         <p:spPr>
           <a:xfrm xmlns:a="http://schemas.openxmlformats.org/drawingml/2006/main">
-            <a:off x="609600" y="4991100"/>
-            <a:ext cx="10972800" cy="714375"/>
+            <a:off x="609600" y="4819650"/>
+            <a:ext cx="10972800" cy="704850"/>
           </a:xfrm>
           <a:prstGeom xmlns:a="http://schemas.openxmlformats.org/drawingml/2006/main" prst="rect">
             <a:avLst/>
@@ -3735,21 +4142,30 @@
           </a:ln>
         </p:spPr>
         <p:txBody>
-          <a:bodyPr xmlns:a="http://schemas.openxmlformats.org/drawingml/2006/main" lIns="0" tIns="0" rIns="0" bIns="0" anchor="ctr"/>
+          <a:bodyPr xmlns:a="http://schemas.openxmlformats.org/drawingml/2006/main" wrap="square" lIns="0" tIns="0" rIns="0" bIns="0" anchor="ctr">
+            <a:noAutofit/>
+          </a:bodyPr>
           <a:lstStyle xmlns:a="http://schemas.openxmlformats.org/drawingml/2006/main"/>
           <a:p xmlns:a="http://schemas.openxmlformats.org/drawingml/2006/main">
             <a:pPr>
-              <a:defRPr sz="2550" b="0">
-                <a:solidFill>
-                  <a:srgbClr val="152B3A"/>
-                </a:solidFill>
+              <a:buNone/>
+              <a:defRPr sz="2550" b="1">
+                <a:solidFill>
+                  <a:srgbClr val="28685E"/>
+                </a:solidFill>
+                <a:latin typeface="Arial"/>
+                <a:ea typeface="Arial"/>
+                <a:cs typeface="Arial"/>
               </a:defRPr>
             </a:pPr>
             <a:r>
-              <a:rPr sz="2550" b="0">
-                <a:solidFill>
-                  <a:srgbClr val="152B3A"/>
-                </a:solidFill>
+              <a:rPr sz="2550" b="1">
+                <a:solidFill>
+                  <a:srgbClr val="28685E"/>
+                </a:solidFill>
+                <a:latin typeface="Arial"/>
+                <a:ea typeface="Arial"/>
+                <a:cs typeface="Arial"/>
               </a:rPr>
               <a:t>Label and save your work for Wednesday.</a:t>
             </a:r>
@@ -3772,7 +4188,7 @@
     <p:bg>
       <p:bgPr>
         <a:solidFill xmlns:a="http://schemas.openxmlformats.org/drawingml/2006/main">
-          <a:srgbClr val="F5F1E8"/>
+          <a:srgbClr val="FBF9F3"/>
         </a:solidFill>
       </p:bgPr>
     </p:bg>
@@ -3801,8 +4217,8 @@
         </p:nvSpPr>
         <p:spPr>
           <a:xfrm xmlns:a="http://schemas.openxmlformats.org/drawingml/2006/main">
-            <a:off x="609600" y="552450"/>
-            <a:ext cx="781050" cy="57150"/>
+            <a:off x="609600" y="742950"/>
+            <a:ext cx="9906000" cy="38100"/>
           </a:xfrm>
           <a:prstGeom xmlns:a="http://schemas.openxmlformats.org/drawingml/2006/main" prst="rect">
             <a:avLst/>
@@ -3832,8 +4248,8 @@
         </p:nvSpPr>
         <p:spPr>
           <a:xfrm xmlns:a="http://schemas.openxmlformats.org/drawingml/2006/main">
-            <a:off x="609600" y="762000"/>
-            <a:ext cx="9334500" cy="285750"/>
+            <a:off x="609600" y="342900"/>
+            <a:ext cx="9334500" cy="266700"/>
           </a:xfrm>
           <a:prstGeom xmlns:a="http://schemas.openxmlformats.org/drawingml/2006/main" prst="rect">
             <a:avLst/>
@@ -3845,21 +4261,30 @@
           </a:ln>
         </p:spPr>
         <p:txBody>
-          <a:bodyPr xmlns:a="http://schemas.openxmlformats.org/drawingml/2006/main" lIns="0" tIns="0" rIns="0" bIns="0" anchor="ctr"/>
+          <a:bodyPr xmlns:a="http://schemas.openxmlformats.org/drawingml/2006/main" wrap="square" lIns="0" tIns="0" rIns="0" bIns="0" anchor="ctr">
+            <a:noAutofit/>
+          </a:bodyPr>
           <a:lstStyle xmlns:a="http://schemas.openxmlformats.org/drawingml/2006/main"/>
           <a:p xmlns:a="http://schemas.openxmlformats.org/drawingml/2006/main">
             <a:pPr>
-              <a:defRPr sz="1500" b="1">
+              <a:buNone/>
+              <a:defRPr sz="1425" b="1">
                 <a:solidFill>
                   <a:srgbClr val="28685E"/>
                 </a:solidFill>
+                <a:latin typeface="Arial"/>
+                <a:ea typeface="Arial"/>
+                <a:cs typeface="Arial"/>
               </a:defRPr>
             </a:pPr>
             <a:r>
-              <a:rPr sz="1500" b="1">
+              <a:rPr sz="1425" b="1">
                 <a:solidFill>
                   <a:srgbClr val="28685E"/>
                 </a:solidFill>
+                <a:latin typeface="Arial"/>
+                <a:ea typeface="Arial"/>
+                <a:cs typeface="Arial"/>
               </a:rPr>
               <a:t>MADE BY MATT  /  BUILD SCIENCE</a:t>
             </a:r>
@@ -3868,14 +4293,14 @@
       </p:sp>
       <p:pic>
         <p:nvPicPr>
-          <p:cNvPr id="13" name=""/>
+          <p:cNvPr id="15" name=""/>
           <p:cNvPicPr>
             <a:picLocks xmlns:a="http://schemas.openxmlformats.org/drawingml/2006/main" noChangeAspect="1"/>
           </p:cNvPicPr>
           <p:nvPr/>
         </p:nvPicPr>
         <p:blipFill>
-          <a:blip xmlns:r="http://schemas.openxmlformats.org/officeDocument/2006/relationships" xmlns:a="http://schemas.openxmlformats.org/drawingml/2006/main" r:embed="R3705b2b1065241a3"/>
+          <a:blip xmlns:r="http://schemas.openxmlformats.org/officeDocument/2006/relationships" xmlns:a="http://schemas.openxmlformats.org/drawingml/2006/main" r:embed="R3a36815b1fad4ad0"/>
           <a:stretch xmlns:a="http://schemas.openxmlformats.org/drawingml/2006/main"/>
         </p:blipFill>
         <p:spPr>
@@ -3904,8 +4329,8 @@
         </p:nvSpPr>
         <p:spPr>
           <a:xfrm xmlns:a="http://schemas.openxmlformats.org/drawingml/2006/main">
-            <a:off x="609600" y="1352550"/>
-            <a:ext cx="10972800" cy="952500"/>
+            <a:off x="609600" y="1047750"/>
+            <a:ext cx="10972800" cy="895350"/>
           </a:xfrm>
           <a:prstGeom xmlns:a="http://schemas.openxmlformats.org/drawingml/2006/main" prst="rect">
             <a:avLst/>
@@ -3917,21 +4342,30 @@
           </a:ln>
         </p:spPr>
         <p:txBody>
-          <a:bodyPr xmlns:a="http://schemas.openxmlformats.org/drawingml/2006/main" lIns="0" tIns="0" rIns="0" bIns="0" anchor="ctr"/>
+          <a:bodyPr xmlns:a="http://schemas.openxmlformats.org/drawingml/2006/main" wrap="square" lIns="0" tIns="0" rIns="0" bIns="0" anchor="ctr">
+            <a:noAutofit/>
+          </a:bodyPr>
           <a:lstStyle xmlns:a="http://schemas.openxmlformats.org/drawingml/2006/main"/>
           <a:p xmlns:a="http://schemas.openxmlformats.org/drawingml/2006/main">
             <a:pPr>
-              <a:defRPr sz="3750" b="1">
-                <a:solidFill>
-                  <a:srgbClr val="152B3A"/>
-                </a:solidFill>
+              <a:buNone/>
+              <a:defRPr sz="3600" b="1">
+                <a:solidFill>
+                  <a:srgbClr val="152B3A"/>
+                </a:solidFill>
+                <a:latin typeface="Arial"/>
+                <a:ea typeface="Arial"/>
+                <a:cs typeface="Arial"/>
               </a:defRPr>
             </a:pPr>
             <a:r>
-              <a:rPr sz="3750" b="1">
-                <a:solidFill>
-                  <a:srgbClr val="152B3A"/>
-                </a:solidFill>
+              <a:rPr sz="3600" b="1">
+                <a:solidFill>
+                  <a:srgbClr val="152B3A"/>
+                </a:solidFill>
+                <a:latin typeface="Arial"/>
+                <a:ea typeface="Arial"/>
+                <a:cs typeface="Arial"/>
               </a:rPr>
               <a:t>Start with your own idea</a:t>
             </a:r>
@@ -3998,21 +4432,30 @@
           </a:ln>
         </p:spPr>
         <p:txBody>
-          <a:bodyPr xmlns:a="http://schemas.openxmlformats.org/drawingml/2006/main" lIns="0" tIns="0" rIns="0" bIns="0" anchor="ctr"/>
+          <a:bodyPr xmlns:a="http://schemas.openxmlformats.org/drawingml/2006/main" wrap="square" lIns="0" tIns="0" rIns="0" bIns="0" anchor="ctr">
+            <a:noAutofit/>
+          </a:bodyPr>
           <a:lstStyle xmlns:a="http://schemas.openxmlformats.org/drawingml/2006/main"/>
           <a:p xmlns:a="http://schemas.openxmlformats.org/drawingml/2006/main">
             <a:pPr>
-              <a:defRPr sz="1275" b="0">
+              <a:buNone/>
+              <a:defRPr sz="1200" b="0">
                 <a:solidFill>
                   <a:srgbClr val="50616B"/>
                 </a:solidFill>
+                <a:latin typeface="Arial"/>
+                <a:ea typeface="Arial"/>
+                <a:cs typeface="Arial"/>
               </a:defRPr>
             </a:pPr>
             <a:r>
-              <a:rPr sz="1275" b="0">
+              <a:rPr sz="1200" b="0">
                 <a:solidFill>
                   <a:srgbClr val="50616B"/>
                 </a:solidFill>
+                <a:latin typeface="Arial"/>
+                <a:ea typeface="Arial"/>
+                <a:cs typeface="Arial"/>
               </a:rPr>
               <a:t>AUTUMN 1  ·  WEEK 3  ·  LESSON A</a:t>
             </a:r>
@@ -4048,14 +4491,20 @@
           </a:ln>
         </p:spPr>
         <p:txBody>
-          <a:bodyPr xmlns:a="http://schemas.openxmlformats.org/drawingml/2006/main" lIns="0" tIns="0" rIns="0" bIns="0" anchor="ctr"/>
+          <a:bodyPr xmlns:a="http://schemas.openxmlformats.org/drawingml/2006/main" wrap="square" lIns="0" tIns="0" rIns="0" bIns="0" anchor="ctr">
+            <a:noAutofit/>
+          </a:bodyPr>
           <a:lstStyle xmlns:a="http://schemas.openxmlformats.org/drawingml/2006/main"/>
           <a:p xmlns:a="http://schemas.openxmlformats.org/drawingml/2006/main">
             <a:pPr>
+              <a:buNone/>
               <a:defRPr sz="1350" b="1">
                 <a:solidFill>
                   <a:srgbClr val="28685E"/>
                 </a:solidFill>
+                <a:latin typeface="Arial"/>
+                <a:ea typeface="Arial"/>
+                <a:cs typeface="Arial"/>
               </a:defRPr>
             </a:pPr>
             <a:r>
@@ -4063,6 +4512,9 @@
                 <a:solidFill>
                   <a:srgbClr val="28685E"/>
                 </a:solidFill>
+                <a:latin typeface="Arial"/>
+                <a:ea typeface="Arial"/>
+                <a:cs typeface="Arial"/>
               </a:rPr>
               <a:t>02</a:t>
             </a:r>
@@ -4085,8 +4537,8 @@
         </p:nvSpPr>
         <p:spPr>
           <a:xfrm xmlns:a="http://schemas.openxmlformats.org/drawingml/2006/main">
-            <a:off x="609600" y="2619375"/>
-            <a:ext cx="10972800" cy="781050"/>
+            <a:off x="609600" y="2305050"/>
+            <a:ext cx="10972800" cy="914400"/>
           </a:xfrm>
           <a:prstGeom xmlns:a="http://schemas.openxmlformats.org/drawingml/2006/main" prst="rect">
             <a:avLst/>
@@ -4098,14 +4550,20 @@
           </a:ln>
         </p:spPr>
         <p:txBody>
-          <a:bodyPr xmlns:a="http://schemas.openxmlformats.org/drawingml/2006/main" lIns="0" tIns="0" rIns="0" bIns="0" anchor="ctr"/>
+          <a:bodyPr xmlns:a="http://schemas.openxmlformats.org/drawingml/2006/main" wrap="square" lIns="0" tIns="0" rIns="0" bIns="0" anchor="ctr">
+            <a:noAutofit/>
+          </a:bodyPr>
           <a:lstStyle xmlns:a="http://schemas.openxmlformats.org/drawingml/2006/main"/>
           <a:p xmlns:a="http://schemas.openxmlformats.org/drawingml/2006/main">
             <a:pPr>
+              <a:buNone/>
               <a:defRPr sz="2550" b="0">
                 <a:solidFill>
                   <a:srgbClr val="152B3A"/>
                 </a:solidFill>
+                <a:latin typeface="Arial"/>
+                <a:ea typeface="Arial"/>
+                <a:cs typeface="Arial"/>
               </a:defRPr>
             </a:pPr>
             <a:r>
@@ -4113,6 +4571,9 @@
                 <a:solidFill>
                   <a:srgbClr val="152B3A"/>
                 </a:solidFill>
+                <a:latin typeface="Arial"/>
+                <a:ea typeface="Arial"/>
+                <a:cs typeface="Arial"/>
               </a:rPr>
               <a:t>Name or point to an animal.</a:t>
             </a:r>
@@ -4135,8 +4596,8 @@
         </p:nvSpPr>
         <p:spPr>
           <a:xfrm xmlns:a="http://schemas.openxmlformats.org/drawingml/2006/main">
-            <a:off x="609600" y="3476625"/>
-            <a:ext cx="10972800" cy="781050"/>
+            <a:off x="609600" y="3352800"/>
+            <a:ext cx="10972800" cy="914400"/>
           </a:xfrm>
           <a:prstGeom xmlns:a="http://schemas.openxmlformats.org/drawingml/2006/main" prst="rect">
             <a:avLst/>
@@ -4148,14 +4609,20 @@
           </a:ln>
         </p:spPr>
         <p:txBody>
-          <a:bodyPr xmlns:a="http://schemas.openxmlformats.org/drawingml/2006/main" lIns="0" tIns="0" rIns="0" bIns="0" anchor="ctr"/>
+          <a:bodyPr xmlns:a="http://schemas.openxmlformats.org/drawingml/2006/main" wrap="square" lIns="0" tIns="0" rIns="0" bIns="0" anchor="ctr">
+            <a:noAutofit/>
+          </a:bodyPr>
           <a:lstStyle xmlns:a="http://schemas.openxmlformats.org/drawingml/2006/main"/>
           <a:p xmlns:a="http://schemas.openxmlformats.org/drawingml/2006/main">
             <a:pPr>
+              <a:buNone/>
               <a:defRPr sz="2550" b="0">
                 <a:solidFill>
                   <a:srgbClr val="152B3A"/>
                 </a:solidFill>
+                <a:latin typeface="Arial"/>
+                <a:ea typeface="Arial"/>
+                <a:cs typeface="Arial"/>
               </a:defRPr>
             </a:pPr>
             <a:r>
@@ -4163,6 +4630,9 @@
                 <a:solidFill>
                   <a:srgbClr val="152B3A"/>
                 </a:solidFill>
+                <a:latin typeface="Arial"/>
+                <a:ea typeface="Arial"/>
+                <a:cs typeface="Arial"/>
               </a:rPr>
               <a:t>Do you think it has a backbone?</a:t>
             </a:r>
@@ -4185,8 +4655,8 @@
         </p:nvSpPr>
         <p:spPr>
           <a:xfrm xmlns:a="http://schemas.openxmlformats.org/drawingml/2006/main">
-            <a:off x="609600" y="4333875"/>
-            <a:ext cx="10972800" cy="781050"/>
+            <a:off x="609600" y="4400550"/>
+            <a:ext cx="10972800" cy="914400"/>
           </a:xfrm>
           <a:prstGeom xmlns:a="http://schemas.openxmlformats.org/drawingml/2006/main" prst="rect">
             <a:avLst/>
@@ -4198,21 +4668,30 @@
           </a:ln>
         </p:spPr>
         <p:txBody>
-          <a:bodyPr xmlns:a="http://schemas.openxmlformats.org/drawingml/2006/main" lIns="0" tIns="0" rIns="0" bIns="0" anchor="ctr"/>
+          <a:bodyPr xmlns:a="http://schemas.openxmlformats.org/drawingml/2006/main" wrap="square" lIns="0" tIns="0" rIns="0" bIns="0" anchor="ctr">
+            <a:noAutofit/>
+          </a:bodyPr>
           <a:lstStyle xmlns:a="http://schemas.openxmlformats.org/drawingml/2006/main"/>
           <a:p xmlns:a="http://schemas.openxmlformats.org/drawingml/2006/main">
             <a:pPr>
-              <a:defRPr sz="2550" b="0">
-                <a:solidFill>
-                  <a:srgbClr val="152B3A"/>
-                </a:solidFill>
+              <a:buNone/>
+              <a:defRPr sz="2550" b="1">
+                <a:solidFill>
+                  <a:srgbClr val="28685E"/>
+                </a:solidFill>
+                <a:latin typeface="Arial"/>
+                <a:ea typeface="Arial"/>
+                <a:cs typeface="Arial"/>
               </a:defRPr>
             </a:pPr>
             <a:r>
-              <a:rPr sz="2550" b="0">
-                <a:solidFill>
-                  <a:srgbClr val="152B3A"/>
-                </a:solidFill>
+              <a:rPr sz="2550" b="1">
+                <a:solidFill>
+                  <a:srgbClr val="28685E"/>
+                </a:solidFill>
+                <a:latin typeface="Arial"/>
+                <a:ea typeface="Arial"/>
+                <a:cs typeface="Arial"/>
               </a:rPr>
               <a:t>Keep your first idea. We will check evidence.</a:t>
             </a:r>
@@ -4235,7 +4714,7 @@
     <p:bg>
       <p:bgPr>
         <a:solidFill xmlns:a="http://schemas.openxmlformats.org/drawingml/2006/main">
-          <a:srgbClr val="F5F1E8"/>
+          <a:srgbClr val="FBF9F3"/>
         </a:solidFill>
       </p:bgPr>
     </p:bg>
@@ -4264,8 +4743,8 @@
         </p:nvSpPr>
         <p:spPr>
           <a:xfrm xmlns:a="http://schemas.openxmlformats.org/drawingml/2006/main">
-            <a:off x="609600" y="552450"/>
-            <a:ext cx="781050" cy="57150"/>
+            <a:off x="609600" y="742950"/>
+            <a:ext cx="9906000" cy="38100"/>
           </a:xfrm>
           <a:prstGeom xmlns:a="http://schemas.openxmlformats.org/drawingml/2006/main" prst="rect">
             <a:avLst/>
@@ -4295,8 +4774,8 @@
         </p:nvSpPr>
         <p:spPr>
           <a:xfrm xmlns:a="http://schemas.openxmlformats.org/drawingml/2006/main">
-            <a:off x="609600" y="762000"/>
-            <a:ext cx="9334500" cy="285750"/>
+            <a:off x="609600" y="342900"/>
+            <a:ext cx="9334500" cy="266700"/>
           </a:xfrm>
           <a:prstGeom xmlns:a="http://schemas.openxmlformats.org/drawingml/2006/main" prst="rect">
             <a:avLst/>
@@ -4308,21 +4787,30 @@
           </a:ln>
         </p:spPr>
         <p:txBody>
-          <a:bodyPr xmlns:a="http://schemas.openxmlformats.org/drawingml/2006/main" lIns="0" tIns="0" rIns="0" bIns="0" anchor="ctr"/>
+          <a:bodyPr xmlns:a="http://schemas.openxmlformats.org/drawingml/2006/main" wrap="square" lIns="0" tIns="0" rIns="0" bIns="0" anchor="ctr">
+            <a:noAutofit/>
+          </a:bodyPr>
           <a:lstStyle xmlns:a="http://schemas.openxmlformats.org/drawingml/2006/main"/>
           <a:p xmlns:a="http://schemas.openxmlformats.org/drawingml/2006/main">
             <a:pPr>
-              <a:defRPr sz="1500" b="1">
+              <a:buNone/>
+              <a:defRPr sz="1425" b="1">
                 <a:solidFill>
                   <a:srgbClr val="28685E"/>
                 </a:solidFill>
+                <a:latin typeface="Arial"/>
+                <a:ea typeface="Arial"/>
+                <a:cs typeface="Arial"/>
               </a:defRPr>
             </a:pPr>
             <a:r>
-              <a:rPr sz="1500" b="1">
+              <a:rPr sz="1425" b="1">
                 <a:solidFill>
                   <a:srgbClr val="28685E"/>
                 </a:solidFill>
+                <a:latin typeface="Arial"/>
+                <a:ea typeface="Arial"/>
+                <a:cs typeface="Arial"/>
               </a:rPr>
               <a:t>MADE BY MATT  /  BUILD SCIENCE</a:t>
             </a:r>
@@ -4331,14 +4819,14 @@
       </p:sp>
       <p:pic>
         <p:nvPicPr>
-          <p:cNvPr id="13" name=""/>
+          <p:cNvPr id="15" name=""/>
           <p:cNvPicPr>
             <a:picLocks xmlns:a="http://schemas.openxmlformats.org/drawingml/2006/main" noChangeAspect="1"/>
           </p:cNvPicPr>
           <p:nvPr/>
         </p:nvPicPr>
         <p:blipFill>
-          <a:blip xmlns:r="http://schemas.openxmlformats.org/officeDocument/2006/relationships" xmlns:a="http://schemas.openxmlformats.org/drawingml/2006/main" r:embed="Rdce0f98e8ba94221"/>
+          <a:blip xmlns:r="http://schemas.openxmlformats.org/officeDocument/2006/relationships" xmlns:a="http://schemas.openxmlformats.org/drawingml/2006/main" r:embed="Rb274d7a7479f4e59"/>
           <a:stretch xmlns:a="http://schemas.openxmlformats.org/drawingml/2006/main"/>
         </p:blipFill>
         <p:spPr>
@@ -4367,8 +4855,8 @@
         </p:nvSpPr>
         <p:spPr>
           <a:xfrm xmlns:a="http://schemas.openxmlformats.org/drawingml/2006/main">
-            <a:off x="609600" y="1352550"/>
-            <a:ext cx="10972800" cy="952500"/>
+            <a:off x="609600" y="1047750"/>
+            <a:ext cx="10972800" cy="895350"/>
           </a:xfrm>
           <a:prstGeom xmlns:a="http://schemas.openxmlformats.org/drawingml/2006/main" prst="rect">
             <a:avLst/>
@@ -4380,21 +4868,30 @@
           </a:ln>
         </p:spPr>
         <p:txBody>
-          <a:bodyPr xmlns:a="http://schemas.openxmlformats.org/drawingml/2006/main" lIns="0" tIns="0" rIns="0" bIns="0" anchor="ctr"/>
+          <a:bodyPr xmlns:a="http://schemas.openxmlformats.org/drawingml/2006/main" wrap="square" lIns="0" tIns="0" rIns="0" bIns="0" anchor="ctr">
+            <a:noAutofit/>
+          </a:bodyPr>
           <a:lstStyle xmlns:a="http://schemas.openxmlformats.org/drawingml/2006/main"/>
           <a:p xmlns:a="http://schemas.openxmlformats.org/drawingml/2006/main">
             <a:pPr>
-              <a:defRPr sz="3750" b="1">
-                <a:solidFill>
-                  <a:srgbClr val="152B3A"/>
-                </a:solidFill>
+              <a:buNone/>
+              <a:defRPr sz="3600" b="1">
+                <a:solidFill>
+                  <a:srgbClr val="152B3A"/>
+                </a:solidFill>
+                <a:latin typeface="Arial"/>
+                <a:ea typeface="Arial"/>
+                <a:cs typeface="Arial"/>
               </a:defRPr>
             </a:pPr>
             <a:r>
-              <a:rPr sz="3750" b="1">
-                <a:solidFill>
-                  <a:srgbClr val="152B3A"/>
-                </a:solidFill>
+              <a:rPr sz="3600" b="1">
+                <a:solidFill>
+                  <a:srgbClr val="152B3A"/>
+                </a:solidFill>
+                <a:latin typeface="Arial"/>
+                <a:ea typeface="Arial"/>
+                <a:cs typeface="Arial"/>
               </a:rPr>
               <a:t>Three things we will do</a:t>
             </a:r>
@@ -4461,21 +4958,30 @@
           </a:ln>
         </p:spPr>
         <p:txBody>
-          <a:bodyPr xmlns:a="http://schemas.openxmlformats.org/drawingml/2006/main" lIns="0" tIns="0" rIns="0" bIns="0" anchor="ctr"/>
+          <a:bodyPr xmlns:a="http://schemas.openxmlformats.org/drawingml/2006/main" wrap="square" lIns="0" tIns="0" rIns="0" bIns="0" anchor="ctr">
+            <a:noAutofit/>
+          </a:bodyPr>
           <a:lstStyle xmlns:a="http://schemas.openxmlformats.org/drawingml/2006/main"/>
           <a:p xmlns:a="http://schemas.openxmlformats.org/drawingml/2006/main">
             <a:pPr>
-              <a:defRPr sz="1275" b="0">
+              <a:buNone/>
+              <a:defRPr sz="1200" b="0">
                 <a:solidFill>
                   <a:srgbClr val="50616B"/>
                 </a:solidFill>
+                <a:latin typeface="Arial"/>
+                <a:ea typeface="Arial"/>
+                <a:cs typeface="Arial"/>
               </a:defRPr>
             </a:pPr>
             <a:r>
-              <a:rPr sz="1275" b="0">
+              <a:rPr sz="1200" b="0">
                 <a:solidFill>
                   <a:srgbClr val="50616B"/>
                 </a:solidFill>
+                <a:latin typeface="Arial"/>
+                <a:ea typeface="Arial"/>
+                <a:cs typeface="Arial"/>
               </a:rPr>
               <a:t>AUTUMN 1  ·  WEEK 3  ·  LESSON A</a:t>
             </a:r>
@@ -4511,14 +5017,20 @@
           </a:ln>
         </p:spPr>
         <p:txBody>
-          <a:bodyPr xmlns:a="http://schemas.openxmlformats.org/drawingml/2006/main" lIns="0" tIns="0" rIns="0" bIns="0" anchor="ctr"/>
+          <a:bodyPr xmlns:a="http://schemas.openxmlformats.org/drawingml/2006/main" wrap="square" lIns="0" tIns="0" rIns="0" bIns="0" anchor="ctr">
+            <a:noAutofit/>
+          </a:bodyPr>
           <a:lstStyle xmlns:a="http://schemas.openxmlformats.org/drawingml/2006/main"/>
           <a:p xmlns:a="http://schemas.openxmlformats.org/drawingml/2006/main">
             <a:pPr>
+              <a:buNone/>
               <a:defRPr sz="1350" b="1">
                 <a:solidFill>
                   <a:srgbClr val="28685E"/>
                 </a:solidFill>
+                <a:latin typeface="Arial"/>
+                <a:ea typeface="Arial"/>
+                <a:cs typeface="Arial"/>
               </a:defRPr>
             </a:pPr>
             <a:r>
@@ -4526,6 +5038,9 @@
                 <a:solidFill>
                   <a:srgbClr val="28685E"/>
                 </a:solidFill>
+                <a:latin typeface="Arial"/>
+                <a:ea typeface="Arial"/>
+                <a:cs typeface="Arial"/>
               </a:rPr>
               <a:t>03</a:t>
             </a:r>
@@ -4548,8 +5063,8 @@
         </p:nvSpPr>
         <p:spPr>
           <a:xfrm xmlns:a="http://schemas.openxmlformats.org/drawingml/2006/main">
-            <a:off x="609600" y="2619375"/>
-            <a:ext cx="10972800" cy="781050"/>
+            <a:off x="609600" y="2305050"/>
+            <a:ext cx="10972800" cy="914400"/>
           </a:xfrm>
           <a:prstGeom xmlns:a="http://schemas.openxmlformats.org/drawingml/2006/main" prst="rect">
             <a:avLst/>
@@ -4561,14 +5076,20 @@
           </a:ln>
         </p:spPr>
         <p:txBody>
-          <a:bodyPr xmlns:a="http://schemas.openxmlformats.org/drawingml/2006/main" lIns="0" tIns="0" rIns="0" bIns="0" anchor="ctr"/>
+          <a:bodyPr xmlns:a="http://schemas.openxmlformats.org/drawingml/2006/main" wrap="square" lIns="0" tIns="0" rIns="0" bIns="0" anchor="ctr">
+            <a:noAutofit/>
+          </a:bodyPr>
           <a:lstStyle xmlns:a="http://schemas.openxmlformats.org/drawingml/2006/main"/>
           <a:p xmlns:a="http://schemas.openxmlformats.org/drawingml/2006/main">
             <a:pPr>
+              <a:buNone/>
               <a:defRPr sz="2550" b="0">
                 <a:solidFill>
                   <a:srgbClr val="152B3A"/>
                 </a:solidFill>
+                <a:latin typeface="Arial"/>
+                <a:ea typeface="Arial"/>
+                <a:cs typeface="Arial"/>
               </a:defRPr>
             </a:pPr>
             <a:r>
@@ -4576,6 +5097,9 @@
                 <a:solidFill>
                   <a:srgbClr val="152B3A"/>
                 </a:solidFill>
+                <a:latin typeface="Arial"/>
+                <a:ea typeface="Arial"/>
+                <a:cs typeface="Arial"/>
               </a:rPr>
               <a:t>Find a backbone in a model.</a:t>
             </a:r>
@@ -4598,8 +5122,8 @@
         </p:nvSpPr>
         <p:spPr>
           <a:xfrm xmlns:a="http://schemas.openxmlformats.org/drawingml/2006/main">
-            <a:off x="609600" y="3476625"/>
-            <a:ext cx="10972800" cy="781050"/>
+            <a:off x="609600" y="3352800"/>
+            <a:ext cx="10972800" cy="914400"/>
           </a:xfrm>
           <a:prstGeom xmlns:a="http://schemas.openxmlformats.org/drawingml/2006/main" prst="rect">
             <a:avLst/>
@@ -4611,14 +5135,20 @@
           </a:ln>
         </p:spPr>
         <p:txBody>
-          <a:bodyPr xmlns:a="http://schemas.openxmlformats.org/drawingml/2006/main" lIns="0" tIns="0" rIns="0" bIns="0" anchor="ctr"/>
+          <a:bodyPr xmlns:a="http://schemas.openxmlformats.org/drawingml/2006/main" wrap="square" lIns="0" tIns="0" rIns="0" bIns="0" anchor="ctr">
+            <a:noAutofit/>
+          </a:bodyPr>
           <a:lstStyle xmlns:a="http://schemas.openxmlformats.org/drawingml/2006/main"/>
           <a:p xmlns:a="http://schemas.openxmlformats.org/drawingml/2006/main">
             <a:pPr>
+              <a:buNone/>
               <a:defRPr sz="2550" b="0">
                 <a:solidFill>
                   <a:srgbClr val="152B3A"/>
                 </a:solidFill>
+                <a:latin typeface="Arial"/>
+                <a:ea typeface="Arial"/>
+                <a:cs typeface="Arial"/>
               </a:defRPr>
             </a:pPr>
             <a:r>
@@ -4626,6 +5156,9 @@
                 <a:solidFill>
                   <a:srgbClr val="152B3A"/>
                 </a:solidFill>
+                <a:latin typeface="Arial"/>
+                <a:ea typeface="Arial"/>
+                <a:cs typeface="Arial"/>
               </a:rPr>
               <a:t>Sort animals using body evidence.</a:t>
             </a:r>
@@ -4648,8 +5181,8 @@
         </p:nvSpPr>
         <p:spPr>
           <a:xfrm xmlns:a="http://schemas.openxmlformats.org/drawingml/2006/main">
-            <a:off x="609600" y="4333875"/>
-            <a:ext cx="10972800" cy="781050"/>
+            <a:off x="609600" y="4400550"/>
+            <a:ext cx="10972800" cy="914400"/>
           </a:xfrm>
           <a:prstGeom xmlns:a="http://schemas.openxmlformats.org/drawingml/2006/main" prst="rect">
             <a:avLst/>
@@ -4661,21 +5194,30 @@
           </a:ln>
         </p:spPr>
         <p:txBody>
-          <a:bodyPr xmlns:a="http://schemas.openxmlformats.org/drawingml/2006/main" lIns="0" tIns="0" rIns="0" bIns="0" anchor="ctr"/>
+          <a:bodyPr xmlns:a="http://schemas.openxmlformats.org/drawingml/2006/main" wrap="square" lIns="0" tIns="0" rIns="0" bIns="0" anchor="ctr">
+            <a:noAutofit/>
+          </a:bodyPr>
           <a:lstStyle xmlns:a="http://schemas.openxmlformats.org/drawingml/2006/main"/>
           <a:p xmlns:a="http://schemas.openxmlformats.org/drawingml/2006/main">
             <a:pPr>
-              <a:defRPr sz="2550" b="0">
-                <a:solidFill>
-                  <a:srgbClr val="152B3A"/>
-                </a:solidFill>
+              <a:buNone/>
+              <a:defRPr sz="2550" b="1">
+                <a:solidFill>
+                  <a:srgbClr val="28685E"/>
+                </a:solidFill>
+                <a:latin typeface="Arial"/>
+                <a:ea typeface="Arial"/>
+                <a:cs typeface="Arial"/>
               </a:defRPr>
             </a:pPr>
             <a:r>
-              <a:rPr sz="2550" b="0">
-                <a:solidFill>
-                  <a:srgbClr val="152B3A"/>
-                </a:solidFill>
+              <a:rPr sz="2550" b="1">
+                <a:solidFill>
+                  <a:srgbClr val="28685E"/>
+                </a:solidFill>
+                <a:latin typeface="Arial"/>
+                <a:ea typeface="Arial"/>
+                <a:cs typeface="Arial"/>
               </a:rPr>
               <a:t>Explain one decision using because.</a:t>
             </a:r>
@@ -4698,7 +5240,7 @@
     <p:bg>
       <p:bgPr>
         <a:solidFill xmlns:a="http://schemas.openxmlformats.org/drawingml/2006/main">
-          <a:srgbClr val="F5F1E8"/>
+          <a:srgbClr val="FBF9F3"/>
         </a:solidFill>
       </p:bgPr>
     </p:bg>
@@ -4727,8 +5269,8 @@
         </p:nvSpPr>
         <p:spPr>
           <a:xfrm xmlns:a="http://schemas.openxmlformats.org/drawingml/2006/main">
-            <a:off x="609600" y="552450"/>
-            <a:ext cx="781050" cy="57150"/>
+            <a:off x="609600" y="742950"/>
+            <a:ext cx="9906000" cy="38100"/>
           </a:xfrm>
           <a:prstGeom xmlns:a="http://schemas.openxmlformats.org/drawingml/2006/main" prst="rect">
             <a:avLst/>
@@ -4758,8 +5300,8 @@
         </p:nvSpPr>
         <p:spPr>
           <a:xfrm xmlns:a="http://schemas.openxmlformats.org/drawingml/2006/main">
-            <a:off x="609600" y="762000"/>
-            <a:ext cx="9334500" cy="285750"/>
+            <a:off x="609600" y="342900"/>
+            <a:ext cx="9334500" cy="266700"/>
           </a:xfrm>
           <a:prstGeom xmlns:a="http://schemas.openxmlformats.org/drawingml/2006/main" prst="rect">
             <a:avLst/>
@@ -4771,21 +5313,30 @@
           </a:ln>
         </p:spPr>
         <p:txBody>
-          <a:bodyPr xmlns:a="http://schemas.openxmlformats.org/drawingml/2006/main" lIns="0" tIns="0" rIns="0" bIns="0" anchor="ctr"/>
+          <a:bodyPr xmlns:a="http://schemas.openxmlformats.org/drawingml/2006/main" wrap="square" lIns="0" tIns="0" rIns="0" bIns="0" anchor="ctr">
+            <a:noAutofit/>
+          </a:bodyPr>
           <a:lstStyle xmlns:a="http://schemas.openxmlformats.org/drawingml/2006/main"/>
           <a:p xmlns:a="http://schemas.openxmlformats.org/drawingml/2006/main">
             <a:pPr>
-              <a:defRPr sz="1500" b="1">
+              <a:buNone/>
+              <a:defRPr sz="1425" b="1">
                 <a:solidFill>
                   <a:srgbClr val="28685E"/>
                 </a:solidFill>
+                <a:latin typeface="Arial"/>
+                <a:ea typeface="Arial"/>
+                <a:cs typeface="Arial"/>
               </a:defRPr>
             </a:pPr>
             <a:r>
-              <a:rPr sz="1500" b="1">
+              <a:rPr sz="1425" b="1">
                 <a:solidFill>
                   <a:srgbClr val="28685E"/>
                 </a:solidFill>
+                <a:latin typeface="Arial"/>
+                <a:ea typeface="Arial"/>
+                <a:cs typeface="Arial"/>
               </a:rPr>
               <a:t>MADE BY MATT  /  BUILD SCIENCE</a:t>
             </a:r>
@@ -4794,14 +5345,14 @@
       </p:sp>
       <p:pic>
         <p:nvPicPr>
-          <p:cNvPr id="19" name=""/>
+          <p:cNvPr id="22" name=""/>
           <p:cNvPicPr>
             <a:picLocks xmlns:a="http://schemas.openxmlformats.org/drawingml/2006/main" noChangeAspect="1"/>
           </p:cNvPicPr>
           <p:nvPr/>
         </p:nvPicPr>
         <p:blipFill>
-          <a:blip xmlns:r="http://schemas.openxmlformats.org/officeDocument/2006/relationships" xmlns:a="http://schemas.openxmlformats.org/drawingml/2006/main" r:embed="R532bb0fc1e484c7d"/>
+          <a:blip xmlns:r="http://schemas.openxmlformats.org/officeDocument/2006/relationships" xmlns:a="http://schemas.openxmlformats.org/drawingml/2006/main" r:embed="Rff40edf752bc4267"/>
           <a:stretch xmlns:a="http://schemas.openxmlformats.org/drawingml/2006/main"/>
         </p:blipFill>
         <p:spPr>
@@ -4830,8 +5381,8 @@
         </p:nvSpPr>
         <p:spPr>
           <a:xfrm xmlns:a="http://schemas.openxmlformats.org/drawingml/2006/main">
-            <a:off x="609600" y="1352550"/>
-            <a:ext cx="10972800" cy="952500"/>
+            <a:off x="609600" y="1047750"/>
+            <a:ext cx="10972800" cy="895350"/>
           </a:xfrm>
           <a:prstGeom xmlns:a="http://schemas.openxmlformats.org/drawingml/2006/main" prst="rect">
             <a:avLst/>
@@ -4843,21 +5394,30 @@
           </a:ln>
         </p:spPr>
         <p:txBody>
-          <a:bodyPr xmlns:a="http://schemas.openxmlformats.org/drawingml/2006/main" lIns="0" tIns="0" rIns="0" bIns="0" anchor="ctr"/>
+          <a:bodyPr xmlns:a="http://schemas.openxmlformats.org/drawingml/2006/main" wrap="square" lIns="0" tIns="0" rIns="0" bIns="0" anchor="ctr">
+            <a:noAutofit/>
+          </a:bodyPr>
           <a:lstStyle xmlns:a="http://schemas.openxmlformats.org/drawingml/2006/main"/>
           <a:p xmlns:a="http://schemas.openxmlformats.org/drawingml/2006/main">
             <a:pPr>
-              <a:defRPr sz="3750" b="1">
-                <a:solidFill>
-                  <a:srgbClr val="152B3A"/>
-                </a:solidFill>
+              <a:buNone/>
+              <a:defRPr sz="3600" b="1">
+                <a:solidFill>
+                  <a:srgbClr val="152B3A"/>
+                </a:solidFill>
+                <a:latin typeface="Arial"/>
+                <a:ea typeface="Arial"/>
+                <a:cs typeface="Arial"/>
               </a:defRPr>
             </a:pPr>
             <a:r>
-              <a:rPr sz="3750" b="1">
-                <a:solidFill>
-                  <a:srgbClr val="152B3A"/>
-                </a:solidFill>
+              <a:rPr sz="3600" b="1">
+                <a:solidFill>
+                  <a:srgbClr val="152B3A"/>
+                </a:solidFill>
+                <a:latin typeface="Arial"/>
+                <a:ea typeface="Arial"/>
+                <a:cs typeface="Arial"/>
               </a:rPr>
               <a:t>Look for bones inside</a:t>
             </a:r>
@@ -4924,21 +5484,30 @@
           </a:ln>
         </p:spPr>
         <p:txBody>
-          <a:bodyPr xmlns:a="http://schemas.openxmlformats.org/drawingml/2006/main" lIns="0" tIns="0" rIns="0" bIns="0" anchor="ctr"/>
+          <a:bodyPr xmlns:a="http://schemas.openxmlformats.org/drawingml/2006/main" wrap="square" lIns="0" tIns="0" rIns="0" bIns="0" anchor="ctr">
+            <a:noAutofit/>
+          </a:bodyPr>
           <a:lstStyle xmlns:a="http://schemas.openxmlformats.org/drawingml/2006/main"/>
           <a:p xmlns:a="http://schemas.openxmlformats.org/drawingml/2006/main">
             <a:pPr>
-              <a:defRPr sz="1275" b="0">
+              <a:buNone/>
+              <a:defRPr sz="1200" b="0">
                 <a:solidFill>
                   <a:srgbClr val="50616B"/>
                 </a:solidFill>
+                <a:latin typeface="Arial"/>
+                <a:ea typeface="Arial"/>
+                <a:cs typeface="Arial"/>
               </a:defRPr>
             </a:pPr>
             <a:r>
-              <a:rPr sz="1275" b="0">
+              <a:rPr sz="1200" b="0">
                 <a:solidFill>
                   <a:srgbClr val="50616B"/>
                 </a:solidFill>
+                <a:latin typeface="Arial"/>
+                <a:ea typeface="Arial"/>
+                <a:cs typeface="Arial"/>
               </a:rPr>
               <a:t>AUTUMN 1  ·  WEEK 3  ·  LESSON A</a:t>
             </a:r>
@@ -4974,14 +5543,20 @@
           </a:ln>
         </p:spPr>
         <p:txBody>
-          <a:bodyPr xmlns:a="http://schemas.openxmlformats.org/drawingml/2006/main" lIns="0" tIns="0" rIns="0" bIns="0" anchor="ctr"/>
+          <a:bodyPr xmlns:a="http://schemas.openxmlformats.org/drawingml/2006/main" wrap="square" lIns="0" tIns="0" rIns="0" bIns="0" anchor="ctr">
+            <a:noAutofit/>
+          </a:bodyPr>
           <a:lstStyle xmlns:a="http://schemas.openxmlformats.org/drawingml/2006/main"/>
           <a:p xmlns:a="http://schemas.openxmlformats.org/drawingml/2006/main">
             <a:pPr>
+              <a:buNone/>
               <a:defRPr sz="1350" b="1">
                 <a:solidFill>
                   <a:srgbClr val="28685E"/>
                 </a:solidFill>
+                <a:latin typeface="Arial"/>
+                <a:ea typeface="Arial"/>
+                <a:cs typeface="Arial"/>
               </a:defRPr>
             </a:pPr>
             <a:r>
@@ -4989,6 +5564,9 @@
                 <a:solidFill>
                   <a:srgbClr val="28685E"/>
                 </a:solidFill>
+                <a:latin typeface="Arial"/>
+                <a:ea typeface="Arial"/>
+                <a:cs typeface="Arial"/>
               </a:rPr>
               <a:t>04</a:t>
             </a:r>
@@ -5011,8 +5589,41 @@
         </p:nvSpPr>
         <p:spPr>
           <a:xfrm xmlns:a="http://schemas.openxmlformats.org/drawingml/2006/main">
-            <a:off x="2762250" y="2781300"/>
-            <a:ext cx="762000" cy="361950"/>
+            <a:off x="876300" y="2571750"/>
+            <a:ext cx="666750" cy="304800"/>
+          </a:xfrm>
+          <a:prstGeom xmlns:a="http://schemas.openxmlformats.org/drawingml/2006/main" prst="rect">
+            <a:avLst/>
+          </a:prstGeom>
+          <a:solidFill xmlns:a="http://schemas.openxmlformats.org/drawingml/2006/main">
+            <a:srgbClr val="B7D3C4"/>
+          </a:solidFill>
+          <a:ln xmlns:a="http://schemas.openxmlformats.org/drawingml/2006/main" w="19050">
+            <a:solidFill>
+              <a:srgbClr val="152B3A"/>
+            </a:solidFill>
+            <a:prstDash val="solid"/>
+          </a:ln>
+        </p:spPr>
+      </p:sp>
+      <p:sp>
+        <p:nvSpPr>
+          <p:cNvPr id="9" name="diagram-shape-1">
+            <a:extLst xmlns:a="http://schemas.openxmlformats.org/drawingml/2006/main">
+              <a:ext uri="{FF2B5EF4-FFF2-40B4-BE49-F238E27FC236}">
+                <a16:creationId xmlns:a16="http://schemas.microsoft.com/office/drawing/2014/main" id="{7F03FAC8-68FD-4968-9B1C-E46FB13DEF0C}"/>
+              </a:ext>
+            </a:extLst>
+          </p:cNvPr>
+          <p:cNvSpPr>
+            <a:spLocks xmlns:a="http://schemas.openxmlformats.org/drawingml/2006/main" noGrp="1"/>
+          </p:cNvSpPr>
+          <p:nvPr/>
+        </p:nvSpPr>
+        <p:spPr>
+          <a:xfrm xmlns:a="http://schemas.openxmlformats.org/drawingml/2006/main">
+            <a:off x="876300" y="2971800"/>
+            <a:ext cx="666750" cy="304800"/>
           </a:xfrm>
           <a:prstGeom xmlns:a="http://schemas.openxmlformats.org/drawingml/2006/main" prst="rect">
             <a:avLst/>
@@ -5030,22 +5641,55 @@
       </p:sp>
       <p:sp>
         <p:nvSpPr>
-          <p:cNvPr id="9" name="diagram-shape-1">
-            <a:extLst xmlns:a="http://schemas.openxmlformats.org/drawingml/2006/main">
-              <a:ext uri="{FF2B5EF4-FFF2-40B4-BE49-F238E27FC236}">
-                <a16:creationId xmlns:a16="http://schemas.microsoft.com/office/drawing/2014/main" id="{7F03FAC8-68FD-4968-9B1C-E46FB13DEF0C}"/>
-              </a:ext>
-            </a:extLst>
-          </p:cNvPr>
-          <p:cNvSpPr>
-            <a:spLocks xmlns:a="http://schemas.openxmlformats.org/drawingml/2006/main" noGrp="1"/>
-          </p:cNvSpPr>
-          <p:nvPr/>
-        </p:nvSpPr>
-        <p:spPr>
-          <a:xfrm xmlns:a="http://schemas.openxmlformats.org/drawingml/2006/main">
-            <a:off x="2762250" y="3209925"/>
-            <a:ext cx="762000" cy="361950"/>
+          <p:cNvPr id="10" name="diagram-shape-2">
+            <a:extLst xmlns:a="http://schemas.openxmlformats.org/drawingml/2006/main">
+              <a:ext uri="{FF2B5EF4-FFF2-40B4-BE49-F238E27FC236}">
+                <a16:creationId xmlns:a16="http://schemas.microsoft.com/office/drawing/2014/main" id="{E73F6559-8E96-4901-9DC6-A4FD45CBA14C}"/>
+              </a:ext>
+            </a:extLst>
+          </p:cNvPr>
+          <p:cNvSpPr>
+            <a:spLocks xmlns:a="http://schemas.openxmlformats.org/drawingml/2006/main" noGrp="1"/>
+          </p:cNvSpPr>
+          <p:nvPr/>
+        </p:nvSpPr>
+        <p:spPr>
+          <a:xfrm xmlns:a="http://schemas.openxmlformats.org/drawingml/2006/main">
+            <a:off x="876300" y="3371850"/>
+            <a:ext cx="666750" cy="304800"/>
+          </a:xfrm>
+          <a:prstGeom xmlns:a="http://schemas.openxmlformats.org/drawingml/2006/main" prst="rect">
+            <a:avLst/>
+          </a:prstGeom>
+          <a:solidFill xmlns:a="http://schemas.openxmlformats.org/drawingml/2006/main">
+            <a:srgbClr val="B7D3C4"/>
+          </a:solidFill>
+          <a:ln xmlns:a="http://schemas.openxmlformats.org/drawingml/2006/main" w="19050">
+            <a:solidFill>
+              <a:srgbClr val="152B3A"/>
+            </a:solidFill>
+            <a:prstDash val="solid"/>
+          </a:ln>
+        </p:spPr>
+      </p:sp>
+      <p:sp>
+        <p:nvSpPr>
+          <p:cNvPr id="11" name="diagram-shape-3">
+            <a:extLst xmlns:a="http://schemas.openxmlformats.org/drawingml/2006/main">
+              <a:ext uri="{FF2B5EF4-FFF2-40B4-BE49-F238E27FC236}">
+                <a16:creationId xmlns:a16="http://schemas.microsoft.com/office/drawing/2014/main" id="{F6A35044-92B8-48E3-B8A2-E108583D86C2}"/>
+              </a:ext>
+            </a:extLst>
+          </p:cNvPr>
+          <p:cNvSpPr>
+            <a:spLocks xmlns:a="http://schemas.openxmlformats.org/drawingml/2006/main" noGrp="1"/>
+          </p:cNvSpPr>
+          <p:nvPr/>
+        </p:nvSpPr>
+        <p:spPr>
+          <a:xfrm xmlns:a="http://schemas.openxmlformats.org/drawingml/2006/main">
+            <a:off x="876300" y="3771900"/>
+            <a:ext cx="666750" cy="304800"/>
           </a:xfrm>
           <a:prstGeom xmlns:a="http://schemas.openxmlformats.org/drawingml/2006/main" prst="rect">
             <a:avLst/>
@@ -5063,28 +5707,28 @@
       </p:sp>
       <p:sp>
         <p:nvSpPr>
-          <p:cNvPr id="10" name="diagram-shape-2">
-            <a:extLst xmlns:a="http://schemas.openxmlformats.org/drawingml/2006/main">
-              <a:ext uri="{FF2B5EF4-FFF2-40B4-BE49-F238E27FC236}">
-                <a16:creationId xmlns:a16="http://schemas.microsoft.com/office/drawing/2014/main" id="{E73F6559-8E96-4901-9DC6-A4FD45CBA14C}"/>
-              </a:ext>
-            </a:extLst>
-          </p:cNvPr>
-          <p:cNvSpPr>
-            <a:spLocks xmlns:a="http://schemas.openxmlformats.org/drawingml/2006/main" noGrp="1"/>
-          </p:cNvSpPr>
-          <p:nvPr/>
-        </p:nvSpPr>
-        <p:spPr>
-          <a:xfrm xmlns:a="http://schemas.openxmlformats.org/drawingml/2006/main">
-            <a:off x="2762250" y="3638550"/>
-            <a:ext cx="762000" cy="361950"/>
+          <p:cNvPr id="12" name="diagram-shape-4">
+            <a:extLst xmlns:a="http://schemas.openxmlformats.org/drawingml/2006/main">
+              <a:ext uri="{FF2B5EF4-FFF2-40B4-BE49-F238E27FC236}">
+                <a16:creationId xmlns:a16="http://schemas.microsoft.com/office/drawing/2014/main" id="{25A6D868-E91B-49B6-B92C-5BC8E5ACEE5D}"/>
+              </a:ext>
+            </a:extLst>
+          </p:cNvPr>
+          <p:cNvSpPr>
+            <a:spLocks xmlns:a="http://schemas.openxmlformats.org/drawingml/2006/main" noGrp="1"/>
+          </p:cNvSpPr>
+          <p:nvPr/>
+        </p:nvSpPr>
+        <p:spPr>
+          <a:xfrm xmlns:a="http://schemas.openxmlformats.org/drawingml/2006/main">
+            <a:off x="876300" y="4171950"/>
+            <a:ext cx="666750" cy="304800"/>
           </a:xfrm>
           <a:prstGeom xmlns:a="http://schemas.openxmlformats.org/drawingml/2006/main" prst="rect">
             <a:avLst/>
           </a:prstGeom>
           <a:solidFill xmlns:a="http://schemas.openxmlformats.org/drawingml/2006/main">
-            <a:srgbClr val="DCE7DD"/>
+            <a:srgbClr val="B7D3C4"/>
           </a:solidFill>
           <a:ln xmlns:a="http://schemas.openxmlformats.org/drawingml/2006/main" w="19050">
             <a:solidFill>
@@ -5096,72 +5740,6 @@
       </p:sp>
       <p:sp>
         <p:nvSpPr>
-          <p:cNvPr id="11" name="diagram-shape-3">
-            <a:extLst xmlns:a="http://schemas.openxmlformats.org/drawingml/2006/main">
-              <a:ext uri="{FF2B5EF4-FFF2-40B4-BE49-F238E27FC236}">
-                <a16:creationId xmlns:a16="http://schemas.microsoft.com/office/drawing/2014/main" id="{F6A35044-92B8-48E3-B8A2-E108583D86C2}"/>
-              </a:ext>
-            </a:extLst>
-          </p:cNvPr>
-          <p:cNvSpPr>
-            <a:spLocks xmlns:a="http://schemas.openxmlformats.org/drawingml/2006/main" noGrp="1"/>
-          </p:cNvSpPr>
-          <p:nvPr/>
-        </p:nvSpPr>
-        <p:spPr>
-          <a:xfrm xmlns:a="http://schemas.openxmlformats.org/drawingml/2006/main">
-            <a:off x="2762250" y="4067175"/>
-            <a:ext cx="762000" cy="361950"/>
-          </a:xfrm>
-          <a:prstGeom xmlns:a="http://schemas.openxmlformats.org/drawingml/2006/main" prst="rect">
-            <a:avLst/>
-          </a:prstGeom>
-          <a:solidFill xmlns:a="http://schemas.openxmlformats.org/drawingml/2006/main">
-            <a:srgbClr val="DCE7DD"/>
-          </a:solidFill>
-          <a:ln xmlns:a="http://schemas.openxmlformats.org/drawingml/2006/main" w="19050">
-            <a:solidFill>
-              <a:srgbClr val="152B3A"/>
-            </a:solidFill>
-            <a:prstDash val="solid"/>
-          </a:ln>
-        </p:spPr>
-      </p:sp>
-      <p:sp>
-        <p:nvSpPr>
-          <p:cNvPr id="12" name="diagram-shape-4">
-            <a:extLst xmlns:a="http://schemas.openxmlformats.org/drawingml/2006/main">
-              <a:ext uri="{FF2B5EF4-FFF2-40B4-BE49-F238E27FC236}">
-                <a16:creationId xmlns:a16="http://schemas.microsoft.com/office/drawing/2014/main" id="{25A6D868-E91B-49B6-B92C-5BC8E5ACEE5D}"/>
-              </a:ext>
-            </a:extLst>
-          </p:cNvPr>
-          <p:cNvSpPr>
-            <a:spLocks xmlns:a="http://schemas.openxmlformats.org/drawingml/2006/main" noGrp="1"/>
-          </p:cNvSpPr>
-          <p:nvPr/>
-        </p:nvSpPr>
-        <p:spPr>
-          <a:xfrm xmlns:a="http://schemas.openxmlformats.org/drawingml/2006/main">
-            <a:off x="2762250" y="4495800"/>
-            <a:ext cx="762000" cy="361950"/>
-          </a:xfrm>
-          <a:prstGeom xmlns:a="http://schemas.openxmlformats.org/drawingml/2006/main" prst="rect">
-            <a:avLst/>
-          </a:prstGeom>
-          <a:solidFill xmlns:a="http://schemas.openxmlformats.org/drawingml/2006/main">
-            <a:srgbClr val="DCE7DD"/>
-          </a:solidFill>
-          <a:ln xmlns:a="http://schemas.openxmlformats.org/drawingml/2006/main" w="19050">
-            <a:solidFill>
-              <a:srgbClr val="152B3A"/>
-            </a:solidFill>
-            <a:prstDash val="solid"/>
-          </a:ln>
-        </p:spPr>
-      </p:sp>
-      <p:sp>
-        <p:nvSpPr>
           <p:cNvPr id="13" name="diagram-label-5">
             <a:extLst xmlns:a="http://schemas.openxmlformats.org/drawingml/2006/main">
               <a:ext uri="{FF2B5EF4-FFF2-40B4-BE49-F238E27FC236}">
@@ -5176,8 +5754,8 @@
         </p:nvSpPr>
         <p:spPr>
           <a:xfrm xmlns:a="http://schemas.openxmlformats.org/drawingml/2006/main">
-            <a:off x="1476375" y="5095875"/>
-            <a:ext cx="3524250" cy="428625"/>
+            <a:off x="609600" y="5181600"/>
+            <a:ext cx="2362200" cy="533400"/>
           </a:xfrm>
           <a:prstGeom xmlns:a="http://schemas.openxmlformats.org/drawingml/2006/main" prst="rect">
             <a:avLst/>
@@ -5189,21 +5767,30 @@
           </a:ln>
         </p:spPr>
         <p:txBody>
-          <a:bodyPr xmlns:a="http://schemas.openxmlformats.org/drawingml/2006/main" lIns="0" tIns="0" rIns="0" bIns="0" anchor="ctr"/>
+          <a:bodyPr xmlns:a="http://schemas.openxmlformats.org/drawingml/2006/main" wrap="square" lIns="0" tIns="0" rIns="0" bIns="0" anchor="ctr">
+            <a:noAutofit/>
+          </a:bodyPr>
           <a:lstStyle xmlns:a="http://schemas.openxmlformats.org/drawingml/2006/main"/>
           <a:p xmlns:a="http://schemas.openxmlformats.org/drawingml/2006/main">
             <a:pPr>
-              <a:defRPr sz="1875" b="1">
-                <a:solidFill>
-                  <a:srgbClr val="152B3A"/>
-                </a:solidFill>
+              <a:buNone/>
+              <a:defRPr sz="1800" b="1">
+                <a:solidFill>
+                  <a:srgbClr val="152B3A"/>
+                </a:solidFill>
+                <a:latin typeface="Arial"/>
+                <a:ea typeface="Arial"/>
+                <a:cs typeface="Arial"/>
               </a:defRPr>
             </a:pPr>
             <a:r>
-              <a:rPr sz="1875" b="1">
-                <a:solidFill>
-                  <a:srgbClr val="152B3A"/>
-                </a:solidFill>
+              <a:rPr sz="1800" b="1">
+                <a:solidFill>
+                  <a:srgbClr val="152B3A"/>
+                </a:solidFill>
+                <a:latin typeface="Arial"/>
+                <a:ea typeface="Arial"/>
+                <a:cs typeface="Arial"/>
               </a:rPr>
               <a:t>simplified backbone</a:t>
             </a:r>
@@ -5226,8 +5813,8 @@
         </p:nvSpPr>
         <p:spPr>
           <a:xfrm xmlns:a="http://schemas.openxmlformats.org/drawingml/2006/main">
-            <a:off x="3857625" y="3467100"/>
-            <a:ext cx="1857375" cy="428625"/>
+            <a:off x="609600" y="4724400"/>
+            <a:ext cx="2143125" cy="381000"/>
           </a:xfrm>
           <a:prstGeom xmlns:a="http://schemas.openxmlformats.org/drawingml/2006/main" prst="rect">
             <a:avLst/>
@@ -5239,21 +5826,30 @@
           </a:ln>
         </p:spPr>
         <p:txBody>
-          <a:bodyPr xmlns:a="http://schemas.openxmlformats.org/drawingml/2006/main" lIns="0" tIns="0" rIns="0" bIns="0" anchor="ctr"/>
+          <a:bodyPr xmlns:a="http://schemas.openxmlformats.org/drawingml/2006/main" wrap="square" lIns="0" tIns="0" rIns="0" bIns="0" anchor="ctr">
+            <a:noAutofit/>
+          </a:bodyPr>
           <a:lstStyle xmlns:a="http://schemas.openxmlformats.org/drawingml/2006/main"/>
           <a:p xmlns:a="http://schemas.openxmlformats.org/drawingml/2006/main">
             <a:pPr>
-              <a:defRPr sz="1875" b="1">
-                <a:solidFill>
-                  <a:srgbClr val="152B3A"/>
-                </a:solidFill>
+              <a:buNone/>
+              <a:defRPr sz="1800" b="1">
+                <a:solidFill>
+                  <a:srgbClr val="152B3A"/>
+                </a:solidFill>
+                <a:latin typeface="Arial"/>
+                <a:ea typeface="Arial"/>
+                <a:cs typeface="Arial"/>
               </a:defRPr>
             </a:pPr>
             <a:r>
-              <a:rPr sz="1875" b="1">
-                <a:solidFill>
-                  <a:srgbClr val="152B3A"/>
-                </a:solidFill>
+              <a:rPr sz="1800" b="1">
+                <a:solidFill>
+                  <a:srgbClr val="152B3A"/>
+                </a:solidFill>
+                <a:latin typeface="Arial"/>
+                <a:ea typeface="Arial"/>
+                <a:cs typeface="Arial"/>
               </a:rPr>
               <a:t>small bones</a:t>
             </a:r>
@@ -5276,8 +5872,8 @@
         </p:nvSpPr>
         <p:spPr>
           <a:xfrm xmlns:a="http://schemas.openxmlformats.org/drawingml/2006/main">
-            <a:off x="6667500" y="2714625"/>
-            <a:ext cx="4857750" cy="1762125"/>
+            <a:off x="6667500" y="2533650"/>
+            <a:ext cx="4762500" cy="1809750"/>
           </a:xfrm>
           <a:prstGeom xmlns:a="http://schemas.openxmlformats.org/drawingml/2006/main" prst="rect">
             <a:avLst/>
@@ -5289,21 +5885,30 @@
           </a:ln>
         </p:spPr>
         <p:txBody>
-          <a:bodyPr xmlns:a="http://schemas.openxmlformats.org/drawingml/2006/main" lIns="0" tIns="0" rIns="0" bIns="0" anchor="ctr"/>
+          <a:bodyPr xmlns:a="http://schemas.openxmlformats.org/drawingml/2006/main" wrap="square" lIns="0" tIns="0" rIns="0" bIns="0" anchor="ctr">
+            <a:noAutofit/>
+          </a:bodyPr>
           <a:lstStyle xmlns:a="http://schemas.openxmlformats.org/drawingml/2006/main"/>
           <a:p xmlns:a="http://schemas.openxmlformats.org/drawingml/2006/main">
             <a:pPr>
-              <a:defRPr sz="2550" b="1">
-                <a:solidFill>
-                  <a:srgbClr val="152B3A"/>
-                </a:solidFill>
+              <a:buNone/>
+              <a:defRPr sz="2475" b="1">
+                <a:solidFill>
+                  <a:srgbClr val="152B3A"/>
+                </a:solidFill>
+                <a:latin typeface="Arial"/>
+                <a:ea typeface="Arial"/>
+                <a:cs typeface="Arial"/>
               </a:defRPr>
             </a:pPr>
             <a:r>
-              <a:rPr sz="2550" b="1">
-                <a:solidFill>
-                  <a:srgbClr val="152B3A"/>
-                </a:solidFill>
+              <a:rPr sz="2475" b="1">
+                <a:solidFill>
+                  <a:srgbClr val="152B3A"/>
+                </a:solidFill>
+                <a:latin typeface="Arial"/>
+                <a:ea typeface="Arial"/>
+                <a:cs typeface="Arial"/>
               </a:rPr>
               <a:t>A backbone is a connected series of small bones down the back.</a:t>
             </a:r>
@@ -5326,8 +5931,8 @@
         </p:nvSpPr>
         <p:spPr>
           <a:xfrm xmlns:a="http://schemas.openxmlformats.org/drawingml/2006/main">
-            <a:off x="6667500" y="4714875"/>
-            <a:ext cx="4857750" cy="1000125"/>
+            <a:off x="6667500" y="4629150"/>
+            <a:ext cx="4762500" cy="1162050"/>
           </a:xfrm>
           <a:prstGeom xmlns:a="http://schemas.openxmlformats.org/drawingml/2006/main" prst="rect">
             <a:avLst/>
@@ -5339,14 +5944,20 @@
           </a:ln>
         </p:spPr>
         <p:txBody>
-          <a:bodyPr xmlns:a="http://schemas.openxmlformats.org/drawingml/2006/main" lIns="0" tIns="0" rIns="0" bIns="0" anchor="ctr"/>
+          <a:bodyPr xmlns:a="http://schemas.openxmlformats.org/drawingml/2006/main" wrap="square" lIns="0" tIns="0" rIns="0" bIns="0" anchor="ctr">
+            <a:noAutofit/>
+          </a:bodyPr>
           <a:lstStyle xmlns:a="http://schemas.openxmlformats.org/drawingml/2006/main"/>
           <a:p xmlns:a="http://schemas.openxmlformats.org/drawingml/2006/main">
             <a:pPr>
+              <a:buNone/>
               <a:defRPr sz="2175" b="0">
                 <a:solidFill>
                   <a:srgbClr val="28685E"/>
                 </a:solidFill>
+                <a:latin typeface="Arial"/>
+                <a:ea typeface="Arial"/>
+                <a:cs typeface="Arial"/>
               </a:defRPr>
             </a:pPr>
             <a:r>
@@ -5354,12 +5965,37 @@
                 <a:solidFill>
                   <a:srgbClr val="28685E"/>
                 </a:solidFill>
+                <a:latin typeface="Arial"/>
+                <a:ea typeface="Arial"/>
+                <a:cs typeface="Arial"/>
               </a:rPr>
               <a:t>An animal with a backbone is a vertebrate.</a:t>
             </a:r>
           </a:p>
         </p:txBody>
       </p:sp>
+      <p:pic>
+        <p:nvPicPr>
+          <p:cNvPr id="36" name=""/>
+          <p:cNvPicPr>
+            <a:picLocks xmlns:a="http://schemas.openxmlformats.org/drawingml/2006/main" noChangeAspect="1"/>
+          </p:cNvPicPr>
+          <p:nvPr/>
+        </p:nvPicPr>
+        <p:blipFill>
+          <a:blip xmlns:r="http://schemas.openxmlformats.org/officeDocument/2006/relationships" xmlns:a="http://schemas.openxmlformats.org/drawingml/2006/main" r:embed="R6231d2da0002433a"/>
+          <a:stretch xmlns:a="http://schemas.openxmlformats.org/drawingml/2006/main"/>
+        </p:blipFill>
+        <p:spPr>
+          <a:xfrm xmlns:a="http://schemas.openxmlformats.org/drawingml/2006/main">
+            <a:off x="2479675" y="2609850"/>
+            <a:ext cx="3632200" cy="2724150"/>
+          </a:xfrm>
+          <a:prstGeom xmlns:a="http://schemas.openxmlformats.org/drawingml/2006/main" prst="rect">
+            <a:avLst/>
+          </a:prstGeom>
+        </p:spPr>
+      </p:pic>
     </p:spTree>
     <p:extLst>
       <p:ext uri="{BB962C8B-B14F-4D97-AF65-F5344CB8AC3E}">
@@ -5376,7 +6012,7 @@
     <p:bg>
       <p:bgPr>
         <a:solidFill xmlns:a="http://schemas.openxmlformats.org/drawingml/2006/main">
-          <a:srgbClr val="F5F1E8"/>
+          <a:srgbClr val="FBF9F3"/>
         </a:solidFill>
       </p:bgPr>
     </p:bg>
@@ -5405,8 +6041,8 @@
         </p:nvSpPr>
         <p:spPr>
           <a:xfrm xmlns:a="http://schemas.openxmlformats.org/drawingml/2006/main">
-            <a:off x="609600" y="552450"/>
-            <a:ext cx="781050" cy="57150"/>
+            <a:off x="609600" y="742950"/>
+            <a:ext cx="9906000" cy="38100"/>
           </a:xfrm>
           <a:prstGeom xmlns:a="http://schemas.openxmlformats.org/drawingml/2006/main" prst="rect">
             <a:avLst/>
@@ -5436,8 +6072,8 @@
         </p:nvSpPr>
         <p:spPr>
           <a:xfrm xmlns:a="http://schemas.openxmlformats.org/drawingml/2006/main">
-            <a:off x="609600" y="762000"/>
-            <a:ext cx="9334500" cy="285750"/>
+            <a:off x="609600" y="342900"/>
+            <a:ext cx="9334500" cy="266700"/>
           </a:xfrm>
           <a:prstGeom xmlns:a="http://schemas.openxmlformats.org/drawingml/2006/main" prst="rect">
             <a:avLst/>
@@ -5449,21 +6085,30 @@
           </a:ln>
         </p:spPr>
         <p:txBody>
-          <a:bodyPr xmlns:a="http://schemas.openxmlformats.org/drawingml/2006/main" lIns="0" tIns="0" rIns="0" bIns="0" anchor="ctr"/>
+          <a:bodyPr xmlns:a="http://schemas.openxmlformats.org/drawingml/2006/main" wrap="square" lIns="0" tIns="0" rIns="0" bIns="0" anchor="ctr">
+            <a:noAutofit/>
+          </a:bodyPr>
           <a:lstStyle xmlns:a="http://schemas.openxmlformats.org/drawingml/2006/main"/>
           <a:p xmlns:a="http://schemas.openxmlformats.org/drawingml/2006/main">
             <a:pPr>
-              <a:defRPr sz="1500" b="1">
+              <a:buNone/>
+              <a:defRPr sz="1425" b="1">
                 <a:solidFill>
                   <a:srgbClr val="28685E"/>
                 </a:solidFill>
+                <a:latin typeface="Arial"/>
+                <a:ea typeface="Arial"/>
+                <a:cs typeface="Arial"/>
               </a:defRPr>
             </a:pPr>
             <a:r>
-              <a:rPr sz="1500" b="1">
+              <a:rPr sz="1425" b="1">
                 <a:solidFill>
                   <a:srgbClr val="28685E"/>
                 </a:solidFill>
+                <a:latin typeface="Arial"/>
+                <a:ea typeface="Arial"/>
+                <a:cs typeface="Arial"/>
               </a:rPr>
               <a:t>MADE BY MATT  /  BUILD SCIENCE</a:t>
             </a:r>
@@ -5472,14 +6117,14 @@
       </p:sp>
       <p:pic>
         <p:nvPicPr>
-          <p:cNvPr id="14" name=""/>
+          <p:cNvPr id="20" name=""/>
           <p:cNvPicPr>
             <a:picLocks xmlns:a="http://schemas.openxmlformats.org/drawingml/2006/main" noChangeAspect="1"/>
           </p:cNvPicPr>
           <p:nvPr/>
         </p:nvPicPr>
         <p:blipFill>
-          <a:blip xmlns:r="http://schemas.openxmlformats.org/officeDocument/2006/relationships" xmlns:a="http://schemas.openxmlformats.org/drawingml/2006/main" r:embed="R0f5c5512af214285"/>
+          <a:blip xmlns:r="http://schemas.openxmlformats.org/officeDocument/2006/relationships" xmlns:a="http://schemas.openxmlformats.org/drawingml/2006/main" r:embed="R06034f04bddc4a15"/>
           <a:stretch xmlns:a="http://schemas.openxmlformats.org/drawingml/2006/main"/>
         </p:blipFill>
         <p:spPr>
@@ -5508,8 +6153,8 @@
         </p:nvSpPr>
         <p:spPr>
           <a:xfrm xmlns:a="http://schemas.openxmlformats.org/drawingml/2006/main">
-            <a:off x="609600" y="1352550"/>
-            <a:ext cx="10972800" cy="952500"/>
+            <a:off x="609600" y="1047750"/>
+            <a:ext cx="10972800" cy="895350"/>
           </a:xfrm>
           <a:prstGeom xmlns:a="http://schemas.openxmlformats.org/drawingml/2006/main" prst="rect">
             <a:avLst/>
@@ -5521,21 +6166,30 @@
           </a:ln>
         </p:spPr>
         <p:txBody>
-          <a:bodyPr xmlns:a="http://schemas.openxmlformats.org/drawingml/2006/main" lIns="0" tIns="0" rIns="0" bIns="0" anchor="ctr"/>
+          <a:bodyPr xmlns:a="http://schemas.openxmlformats.org/drawingml/2006/main" wrap="square" lIns="0" tIns="0" rIns="0" bIns="0" anchor="ctr">
+            <a:noAutofit/>
+          </a:bodyPr>
           <a:lstStyle xmlns:a="http://schemas.openxmlformats.org/drawingml/2006/main"/>
           <a:p xmlns:a="http://schemas.openxmlformats.org/drawingml/2006/main">
             <a:pPr>
-              <a:defRPr sz="3750" b="1">
-                <a:solidFill>
-                  <a:srgbClr val="152B3A"/>
-                </a:solidFill>
+              <a:buNone/>
+              <a:defRPr sz="3600" b="1">
+                <a:solidFill>
+                  <a:srgbClr val="152B3A"/>
+                </a:solidFill>
+                <a:latin typeface="Arial"/>
+                <a:ea typeface="Arial"/>
+                <a:cs typeface="Arial"/>
               </a:defRPr>
             </a:pPr>
             <a:r>
-              <a:rPr sz="3750" b="1">
-                <a:solidFill>
-                  <a:srgbClr val="152B3A"/>
-                </a:solidFill>
+              <a:rPr sz="3600" b="1">
+                <a:solidFill>
+                  <a:srgbClr val="152B3A"/>
+                </a:solidFill>
+                <a:latin typeface="Arial"/>
+                <a:ea typeface="Arial"/>
+                <a:cs typeface="Arial"/>
               </a:rPr>
               <a:t>A hard outside is different</a:t>
             </a:r>
@@ -5602,21 +6256,30 @@
           </a:ln>
         </p:spPr>
         <p:txBody>
-          <a:bodyPr xmlns:a="http://schemas.openxmlformats.org/drawingml/2006/main" lIns="0" tIns="0" rIns="0" bIns="0" anchor="ctr"/>
+          <a:bodyPr xmlns:a="http://schemas.openxmlformats.org/drawingml/2006/main" wrap="square" lIns="0" tIns="0" rIns="0" bIns="0" anchor="ctr">
+            <a:noAutofit/>
+          </a:bodyPr>
           <a:lstStyle xmlns:a="http://schemas.openxmlformats.org/drawingml/2006/main"/>
           <a:p xmlns:a="http://schemas.openxmlformats.org/drawingml/2006/main">
             <a:pPr>
-              <a:defRPr sz="1275" b="0">
+              <a:buNone/>
+              <a:defRPr sz="1200" b="0">
                 <a:solidFill>
                   <a:srgbClr val="50616B"/>
                 </a:solidFill>
+                <a:latin typeface="Arial"/>
+                <a:ea typeface="Arial"/>
+                <a:cs typeface="Arial"/>
               </a:defRPr>
             </a:pPr>
             <a:r>
-              <a:rPr sz="1275" b="0">
+              <a:rPr sz="1200" b="0">
                 <a:solidFill>
                   <a:srgbClr val="50616B"/>
                 </a:solidFill>
+                <a:latin typeface="Arial"/>
+                <a:ea typeface="Arial"/>
+                <a:cs typeface="Arial"/>
               </a:rPr>
               <a:t>AUTUMN 1  ·  WEEK 3  ·  LESSON A</a:t>
             </a:r>
@@ -5652,14 +6315,20 @@
           </a:ln>
         </p:spPr>
         <p:txBody>
-          <a:bodyPr xmlns:a="http://schemas.openxmlformats.org/drawingml/2006/main" lIns="0" tIns="0" rIns="0" bIns="0" anchor="ctr"/>
+          <a:bodyPr xmlns:a="http://schemas.openxmlformats.org/drawingml/2006/main" wrap="square" lIns="0" tIns="0" rIns="0" bIns="0" anchor="ctr">
+            <a:noAutofit/>
+          </a:bodyPr>
           <a:lstStyle xmlns:a="http://schemas.openxmlformats.org/drawingml/2006/main"/>
           <a:p xmlns:a="http://schemas.openxmlformats.org/drawingml/2006/main">
             <a:pPr>
+              <a:buNone/>
               <a:defRPr sz="1350" b="1">
                 <a:solidFill>
                   <a:srgbClr val="28685E"/>
                 </a:solidFill>
+                <a:latin typeface="Arial"/>
+                <a:ea typeface="Arial"/>
+                <a:cs typeface="Arial"/>
               </a:defRPr>
             </a:pPr>
             <a:r>
@@ -5667,6 +6336,9 @@
                 <a:solidFill>
                   <a:srgbClr val="28685E"/>
                 </a:solidFill>
+                <a:latin typeface="Arial"/>
+                <a:ea typeface="Arial"/>
+                <a:cs typeface="Arial"/>
               </a:rPr>
               <a:t>05</a:t>
             </a:r>
@@ -5689,8 +6361,8 @@
         </p:nvSpPr>
         <p:spPr>
           <a:xfrm xmlns:a="http://schemas.openxmlformats.org/drawingml/2006/main">
-            <a:off x="609600" y="2619375"/>
-            <a:ext cx="4953000" cy="428625"/>
+            <a:off x="609600" y="2257425"/>
+            <a:ext cx="5143500" cy="533400"/>
           </a:xfrm>
           <a:prstGeom xmlns:a="http://schemas.openxmlformats.org/drawingml/2006/main" prst="rect">
             <a:avLst/>
@@ -5702,21 +6374,30 @@
           </a:ln>
         </p:spPr>
         <p:txBody>
-          <a:bodyPr xmlns:a="http://schemas.openxmlformats.org/drawingml/2006/main" lIns="0" tIns="0" rIns="0" bIns="0" anchor="ctr"/>
+          <a:bodyPr xmlns:a="http://schemas.openxmlformats.org/drawingml/2006/main" wrap="square" lIns="0" tIns="0" rIns="0" bIns="0" anchor="ctr">
+            <a:noAutofit/>
+          </a:bodyPr>
           <a:lstStyle xmlns:a="http://schemas.openxmlformats.org/drawingml/2006/main"/>
           <a:p xmlns:a="http://schemas.openxmlformats.org/drawingml/2006/main">
             <a:pPr>
-              <a:defRPr sz="2025" b="1">
+              <a:buNone/>
+              <a:defRPr sz="2100" b="1">
                 <a:solidFill>
                   <a:srgbClr val="28685E"/>
                 </a:solidFill>
+                <a:latin typeface="Arial"/>
+                <a:ea typeface="Arial"/>
+                <a:cs typeface="Arial"/>
               </a:defRPr>
             </a:pPr>
             <a:r>
-              <a:rPr sz="2025" b="1">
+              <a:rPr sz="2100" b="1">
                 <a:solidFill>
                   <a:srgbClr val="28685E"/>
                 </a:solidFill>
+                <a:latin typeface="Arial"/>
+                <a:ea typeface="Arial"/>
+                <a:cs typeface="Arial"/>
               </a:rPr>
               <a:t>FISH</a:t>
             </a:r>
@@ -5739,8 +6420,8 @@
         </p:nvSpPr>
         <p:spPr>
           <a:xfrm xmlns:a="http://schemas.openxmlformats.org/drawingml/2006/main">
-            <a:off x="6572250" y="2619375"/>
-            <a:ext cx="4953000" cy="428625"/>
+            <a:off x="6572250" y="2257425"/>
+            <a:ext cx="5010150" cy="533400"/>
           </a:xfrm>
           <a:prstGeom xmlns:a="http://schemas.openxmlformats.org/drawingml/2006/main" prst="rect">
             <a:avLst/>
@@ -5752,21 +6433,30 @@
           </a:ln>
         </p:spPr>
         <p:txBody>
-          <a:bodyPr xmlns:a="http://schemas.openxmlformats.org/drawingml/2006/main" lIns="0" tIns="0" rIns="0" bIns="0" anchor="ctr"/>
+          <a:bodyPr xmlns:a="http://schemas.openxmlformats.org/drawingml/2006/main" wrap="square" lIns="0" tIns="0" rIns="0" bIns="0" anchor="ctr">
+            <a:noAutofit/>
+          </a:bodyPr>
           <a:lstStyle xmlns:a="http://schemas.openxmlformats.org/drawingml/2006/main"/>
           <a:p xmlns:a="http://schemas.openxmlformats.org/drawingml/2006/main">
             <a:pPr>
-              <a:defRPr sz="2025" b="1">
+              <a:buNone/>
+              <a:defRPr sz="2100" b="1">
                 <a:solidFill>
                   <a:srgbClr val="A65D25"/>
                 </a:solidFill>
+                <a:latin typeface="Arial"/>
+                <a:ea typeface="Arial"/>
+                <a:cs typeface="Arial"/>
               </a:defRPr>
             </a:pPr>
             <a:r>
-              <a:rPr sz="2025" b="1">
+              <a:rPr sz="2100" b="1">
                 <a:solidFill>
                   <a:srgbClr val="A65D25"/>
                 </a:solidFill>
+                <a:latin typeface="Arial"/>
+                <a:ea typeface="Arial"/>
+                <a:cs typeface="Arial"/>
               </a:rPr>
               <a:t>CRAB</a:t>
             </a:r>
@@ -5789,8 +6479,8 @@
         </p:nvSpPr>
         <p:spPr>
           <a:xfrm xmlns:a="http://schemas.openxmlformats.org/drawingml/2006/main">
-            <a:off x="609600" y="3333750"/>
-            <a:ext cx="4953000" cy="2524125"/>
+            <a:off x="609600" y="4381500"/>
+            <a:ext cx="5143500" cy="1571625"/>
           </a:xfrm>
           <a:prstGeom xmlns:a="http://schemas.openxmlformats.org/drawingml/2006/main" prst="rect">
             <a:avLst/>
@@ -5802,14 +6492,20 @@
           </a:ln>
         </p:spPr>
         <p:txBody>
-          <a:bodyPr xmlns:a="http://schemas.openxmlformats.org/drawingml/2006/main" lIns="0" tIns="0" rIns="0" bIns="0" anchor="ctr"/>
+          <a:bodyPr xmlns:a="http://schemas.openxmlformats.org/drawingml/2006/main" wrap="square" lIns="0" tIns="0" rIns="0" bIns="0" anchor="ctr">
+            <a:noAutofit/>
+          </a:bodyPr>
           <a:lstStyle xmlns:a="http://schemas.openxmlformats.org/drawingml/2006/main"/>
           <a:p xmlns:a="http://schemas.openxmlformats.org/drawingml/2006/main">
             <a:pPr>
+              <a:buNone/>
               <a:defRPr sz="2400" b="0">
                 <a:solidFill>
                   <a:srgbClr val="152B3A"/>
                 </a:solidFill>
+                <a:latin typeface="Arial"/>
+                <a:ea typeface="Arial"/>
+                <a:cs typeface="Arial"/>
               </a:defRPr>
             </a:pPr>
             <a:r>
@@ -5817,16 +6513,23 @@
                 <a:solidFill>
                   <a:srgbClr val="152B3A"/>
                 </a:solidFill>
+                <a:latin typeface="Arial"/>
+                <a:ea typeface="Arial"/>
+                <a:cs typeface="Arial"/>
               </a:rPr>
               <a:t>Bones inside the body.</a:t>
             </a:r>
           </a:p>
           <a:p xmlns:a="http://schemas.openxmlformats.org/drawingml/2006/main">
             <a:pPr>
+              <a:buNone/>
               <a:defRPr sz="2400" b="0">
                 <a:solidFill>
                   <a:srgbClr val="152B3A"/>
                 </a:solidFill>
+                <a:latin typeface="Arial"/>
+                <a:ea typeface="Arial"/>
+                <a:cs typeface="Arial"/>
               </a:defRPr>
             </a:pPr>
             <a:r>
@@ -5834,16 +6537,23 @@
                 <a:solidFill>
                   <a:srgbClr val="152B3A"/>
                 </a:solidFill>
+                <a:latin typeface="Arial"/>
+                <a:ea typeface="Arial"/>
+                <a:cs typeface="Arial"/>
               </a:rPr>
               <a:t>A backbone inside.</a:t>
             </a:r>
           </a:p>
           <a:p xmlns:a="http://schemas.openxmlformats.org/drawingml/2006/main">
             <a:pPr>
+              <a:buNone/>
               <a:defRPr sz="2400" b="0">
                 <a:solidFill>
                   <a:srgbClr val="152B3A"/>
                 </a:solidFill>
+                <a:latin typeface="Arial"/>
+                <a:ea typeface="Arial"/>
+                <a:cs typeface="Arial"/>
               </a:defRPr>
             </a:pPr>
             <a:r>
@@ -5851,6 +6561,9 @@
                 <a:solidFill>
                   <a:srgbClr val="152B3A"/>
                 </a:solidFill>
+                <a:latin typeface="Arial"/>
+                <a:ea typeface="Arial"/>
+                <a:cs typeface="Arial"/>
               </a:rPr>
               <a:t>Vertebrate.</a:t>
             </a:r>
@@ -5873,8 +6586,8 @@
         </p:nvSpPr>
         <p:spPr>
           <a:xfrm xmlns:a="http://schemas.openxmlformats.org/drawingml/2006/main">
-            <a:off x="6572250" y="3333750"/>
-            <a:ext cx="4857750" cy="2524125"/>
+            <a:off x="6572250" y="4381500"/>
+            <a:ext cx="5010150" cy="1571625"/>
           </a:xfrm>
           <a:prstGeom xmlns:a="http://schemas.openxmlformats.org/drawingml/2006/main" prst="rect">
             <a:avLst/>
@@ -5886,14 +6599,20 @@
           </a:ln>
         </p:spPr>
         <p:txBody>
-          <a:bodyPr xmlns:a="http://schemas.openxmlformats.org/drawingml/2006/main" lIns="0" tIns="0" rIns="0" bIns="0" anchor="ctr"/>
+          <a:bodyPr xmlns:a="http://schemas.openxmlformats.org/drawingml/2006/main" wrap="square" lIns="0" tIns="0" rIns="0" bIns="0" anchor="ctr">
+            <a:noAutofit/>
+          </a:bodyPr>
           <a:lstStyle xmlns:a="http://schemas.openxmlformats.org/drawingml/2006/main"/>
           <a:p xmlns:a="http://schemas.openxmlformats.org/drawingml/2006/main">
             <a:pPr>
+              <a:buNone/>
               <a:defRPr sz="2400" b="0">
                 <a:solidFill>
                   <a:srgbClr val="152B3A"/>
                 </a:solidFill>
+                <a:latin typeface="Arial"/>
+                <a:ea typeface="Arial"/>
+                <a:cs typeface="Arial"/>
               </a:defRPr>
             </a:pPr>
             <a:r>
@@ -5901,16 +6620,23 @@
                 <a:solidFill>
                   <a:srgbClr val="152B3A"/>
                 </a:solidFill>
+                <a:latin typeface="Arial"/>
+                <a:ea typeface="Arial"/>
+                <a:cs typeface="Arial"/>
               </a:rPr>
               <a:t>Hard case outside the body.</a:t>
             </a:r>
           </a:p>
           <a:p xmlns:a="http://schemas.openxmlformats.org/drawingml/2006/main">
             <a:pPr>
+              <a:buNone/>
               <a:defRPr sz="2400" b="0">
                 <a:solidFill>
                   <a:srgbClr val="152B3A"/>
                 </a:solidFill>
+                <a:latin typeface="Arial"/>
+                <a:ea typeface="Arial"/>
+                <a:cs typeface="Arial"/>
               </a:defRPr>
             </a:pPr>
             <a:r>
@@ -5918,16 +6644,23 @@
                 <a:solidFill>
                   <a:srgbClr val="152B3A"/>
                 </a:solidFill>
+                <a:latin typeface="Arial"/>
+                <a:ea typeface="Arial"/>
+                <a:cs typeface="Arial"/>
               </a:rPr>
               <a:t>No backbone.</a:t>
             </a:r>
           </a:p>
           <a:p xmlns:a="http://schemas.openxmlformats.org/drawingml/2006/main">
             <a:pPr>
+              <a:buNone/>
               <a:defRPr sz="2400" b="0">
                 <a:solidFill>
                   <a:srgbClr val="152B3A"/>
                 </a:solidFill>
+                <a:latin typeface="Arial"/>
+                <a:ea typeface="Arial"/>
+                <a:cs typeface="Arial"/>
               </a:defRPr>
             </a:pPr>
             <a:r>
@@ -5935,12 +6668,121 @@
                 <a:solidFill>
                   <a:srgbClr val="152B3A"/>
                 </a:solidFill>
+                <a:latin typeface="Arial"/>
+                <a:ea typeface="Arial"/>
+                <a:cs typeface="Arial"/>
               </a:rPr>
               <a:t>Invertebrate.</a:t>
             </a:r>
           </a:p>
         </p:txBody>
       </p:sp>
+      <p:sp>
+        <p:nvSpPr>
+          <p:cNvPr id="14" name="">
+            <a:extLst xmlns:a="http://schemas.openxmlformats.org/drawingml/2006/main">
+              <a:ext uri="{FF2B5EF4-FFF2-40B4-BE49-F238E27FC236}">
+                <a16:creationId xmlns:a16="http://schemas.microsoft.com/office/drawing/2014/main" id="{EFEEEF6F-4838-4C1B-8099-1BC9CD9DB2DD}"/>
+              </a:ext>
+            </a:extLst>
+          </p:cNvPr>
+          <p:cNvSpPr>
+            <a:spLocks xmlns:a="http://schemas.openxmlformats.org/drawingml/2006/main" noGrp="1"/>
+          </p:cNvSpPr>
+          <p:nvPr/>
+        </p:nvSpPr>
+        <p:spPr>
+          <a:xfrm xmlns:a="http://schemas.openxmlformats.org/drawingml/2006/main">
+            <a:off x="609600" y="2886075"/>
+            <a:ext cx="5048250" cy="0"/>
+          </a:xfrm>
+          <a:prstGeom xmlns:a="http://schemas.openxmlformats.org/drawingml/2006/main" prst="line">
+            <a:avLst/>
+          </a:prstGeom>
+          <a:noFill xmlns:a="http://schemas.openxmlformats.org/drawingml/2006/main"/>
+          <a:ln xmlns:a="http://schemas.openxmlformats.org/drawingml/2006/main" w="28575">
+            <a:solidFill>
+              <a:srgbClr val="DCE7DD"/>
+            </a:solidFill>
+            <a:prstDash val="solid"/>
+          </a:ln>
+        </p:spPr>
+      </p:sp>
+      <p:sp>
+        <p:nvSpPr>
+          <p:cNvPr id="15" name="">
+            <a:extLst xmlns:a="http://schemas.openxmlformats.org/drawingml/2006/main">
+              <a:ext uri="{FF2B5EF4-FFF2-40B4-BE49-F238E27FC236}">
+                <a16:creationId xmlns:a16="http://schemas.microsoft.com/office/drawing/2014/main" id="{EF2A33C9-5D78-4BC3-BC92-7ECEE123D5EF}"/>
+              </a:ext>
+            </a:extLst>
+          </p:cNvPr>
+          <p:cNvSpPr>
+            <a:spLocks xmlns:a="http://schemas.openxmlformats.org/drawingml/2006/main" noGrp="1"/>
+          </p:cNvSpPr>
+          <p:nvPr/>
+        </p:nvSpPr>
+        <p:spPr>
+          <a:xfrm xmlns:a="http://schemas.openxmlformats.org/drawingml/2006/main">
+            <a:off x="6572250" y="2886075"/>
+            <a:ext cx="5010150" cy="0"/>
+          </a:xfrm>
+          <a:prstGeom xmlns:a="http://schemas.openxmlformats.org/drawingml/2006/main" prst="line">
+            <a:avLst/>
+          </a:prstGeom>
+          <a:noFill xmlns:a="http://schemas.openxmlformats.org/drawingml/2006/main"/>
+          <a:ln xmlns:a="http://schemas.openxmlformats.org/drawingml/2006/main" w="28575">
+            <a:solidFill>
+              <a:srgbClr val="DCE7DD"/>
+            </a:solidFill>
+            <a:prstDash val="solid"/>
+          </a:ln>
+        </p:spPr>
+      </p:sp>
+      <p:pic>
+        <p:nvPicPr>
+          <p:cNvPr id="31" name=""/>
+          <p:cNvPicPr>
+            <a:picLocks xmlns:a="http://schemas.openxmlformats.org/drawingml/2006/main" noChangeAspect="1"/>
+          </p:cNvPicPr>
+          <p:nvPr/>
+        </p:nvPicPr>
+        <p:blipFill>
+          <a:blip xmlns:r="http://schemas.openxmlformats.org/officeDocument/2006/relationships" xmlns:a="http://schemas.openxmlformats.org/drawingml/2006/main" r:embed="R9d87bafce7414c71"/>
+          <a:stretch xmlns:a="http://schemas.openxmlformats.org/drawingml/2006/main"/>
+        </p:blipFill>
+        <p:spPr>
+          <a:xfrm xmlns:a="http://schemas.openxmlformats.org/drawingml/2006/main">
+            <a:off x="2109788" y="2952750"/>
+            <a:ext cx="1905000" cy="1428750"/>
+          </a:xfrm>
+          <a:prstGeom xmlns:a="http://schemas.openxmlformats.org/drawingml/2006/main" prst="rect">
+            <a:avLst/>
+          </a:prstGeom>
+        </p:spPr>
+      </p:pic>
+      <p:pic>
+        <p:nvPicPr>
+          <p:cNvPr id="32" name=""/>
+          <p:cNvPicPr>
+            <a:picLocks xmlns:a="http://schemas.openxmlformats.org/drawingml/2006/main" noChangeAspect="1"/>
+          </p:cNvPicPr>
+          <p:nvPr/>
+        </p:nvPicPr>
+        <p:blipFill>
+          <a:blip xmlns:r="http://schemas.openxmlformats.org/officeDocument/2006/relationships" xmlns:a="http://schemas.openxmlformats.org/drawingml/2006/main" r:embed="R305cc573265b4a08"/>
+          <a:stretch xmlns:a="http://schemas.openxmlformats.org/drawingml/2006/main"/>
+        </p:blipFill>
+        <p:spPr>
+          <a:xfrm xmlns:a="http://schemas.openxmlformats.org/drawingml/2006/main">
+            <a:off x="8072438" y="2952750"/>
+            <a:ext cx="1905000" cy="1428750"/>
+          </a:xfrm>
+          <a:prstGeom xmlns:a="http://schemas.openxmlformats.org/drawingml/2006/main" prst="rect">
+            <a:avLst/>
+          </a:prstGeom>
+        </p:spPr>
+      </p:pic>
     </p:spTree>
     <p:extLst>
       <p:ext uri="{BB962C8B-B14F-4D97-AF65-F5344CB8AC3E}">
@@ -5957,7 +6799,7 @@
     <p:bg>
       <p:bgPr>
         <a:solidFill xmlns:a="http://schemas.openxmlformats.org/drawingml/2006/main">
-          <a:srgbClr val="F5F1E8"/>
+          <a:srgbClr val="FBF9F3"/>
         </a:solidFill>
       </p:bgPr>
     </p:bg>
@@ -5986,8 +6828,8 @@
         </p:nvSpPr>
         <p:spPr>
           <a:xfrm xmlns:a="http://schemas.openxmlformats.org/drawingml/2006/main">
-            <a:off x="609600" y="552450"/>
-            <a:ext cx="781050" cy="57150"/>
+            <a:off x="609600" y="742950"/>
+            <a:ext cx="9906000" cy="38100"/>
           </a:xfrm>
           <a:prstGeom xmlns:a="http://schemas.openxmlformats.org/drawingml/2006/main" prst="rect">
             <a:avLst/>
@@ -6017,8 +6859,8 @@
         </p:nvSpPr>
         <p:spPr>
           <a:xfrm xmlns:a="http://schemas.openxmlformats.org/drawingml/2006/main">
-            <a:off x="609600" y="762000"/>
-            <a:ext cx="9334500" cy="285750"/>
+            <a:off x="609600" y="342900"/>
+            <a:ext cx="9334500" cy="266700"/>
           </a:xfrm>
           <a:prstGeom xmlns:a="http://schemas.openxmlformats.org/drawingml/2006/main" prst="rect">
             <a:avLst/>
@@ -6030,21 +6872,30 @@
           </a:ln>
         </p:spPr>
         <p:txBody>
-          <a:bodyPr xmlns:a="http://schemas.openxmlformats.org/drawingml/2006/main" lIns="0" tIns="0" rIns="0" bIns="0" anchor="ctr"/>
+          <a:bodyPr xmlns:a="http://schemas.openxmlformats.org/drawingml/2006/main" wrap="square" lIns="0" tIns="0" rIns="0" bIns="0" anchor="ctr">
+            <a:noAutofit/>
+          </a:bodyPr>
           <a:lstStyle xmlns:a="http://schemas.openxmlformats.org/drawingml/2006/main"/>
           <a:p xmlns:a="http://schemas.openxmlformats.org/drawingml/2006/main">
             <a:pPr>
-              <a:defRPr sz="1500" b="1">
+              <a:buNone/>
+              <a:defRPr sz="1425" b="1">
                 <a:solidFill>
                   <a:srgbClr val="28685E"/>
                 </a:solidFill>
+                <a:latin typeface="Arial"/>
+                <a:ea typeface="Arial"/>
+                <a:cs typeface="Arial"/>
               </a:defRPr>
             </a:pPr>
             <a:r>
-              <a:rPr sz="1500" b="1">
+              <a:rPr sz="1425" b="1">
                 <a:solidFill>
                   <a:srgbClr val="28685E"/>
                 </a:solidFill>
+                <a:latin typeface="Arial"/>
+                <a:ea typeface="Arial"/>
+                <a:cs typeface="Arial"/>
               </a:rPr>
               <a:t>MADE BY MATT  /  BUILD SCIENCE</a:t>
             </a:r>
@@ -6053,14 +6904,14 @@
       </p:sp>
       <p:pic>
         <p:nvPicPr>
-          <p:cNvPr id="14" name=""/>
+          <p:cNvPr id="17" name=""/>
           <p:cNvPicPr>
             <a:picLocks xmlns:a="http://schemas.openxmlformats.org/drawingml/2006/main" noChangeAspect="1"/>
           </p:cNvPicPr>
           <p:nvPr/>
         </p:nvPicPr>
         <p:blipFill>
-          <a:blip xmlns:r="http://schemas.openxmlformats.org/officeDocument/2006/relationships" xmlns:a="http://schemas.openxmlformats.org/drawingml/2006/main" r:embed="Rdda1bde3f57f4584"/>
+          <a:blip xmlns:r="http://schemas.openxmlformats.org/officeDocument/2006/relationships" xmlns:a="http://schemas.openxmlformats.org/drawingml/2006/main" r:embed="R76b780bbae0c44b3"/>
           <a:stretch xmlns:a="http://schemas.openxmlformats.org/drawingml/2006/main"/>
         </p:blipFill>
         <p:spPr>
@@ -6089,8 +6940,8 @@
         </p:nvSpPr>
         <p:spPr>
           <a:xfrm xmlns:a="http://schemas.openxmlformats.org/drawingml/2006/main">
-            <a:off x="609600" y="1352550"/>
-            <a:ext cx="10972800" cy="952500"/>
+            <a:off x="609600" y="1047750"/>
+            <a:ext cx="10972800" cy="895350"/>
           </a:xfrm>
           <a:prstGeom xmlns:a="http://schemas.openxmlformats.org/drawingml/2006/main" prst="rect">
             <a:avLst/>
@@ -6102,21 +6953,30 @@
           </a:ln>
         </p:spPr>
         <p:txBody>
-          <a:bodyPr xmlns:a="http://schemas.openxmlformats.org/drawingml/2006/main" lIns="0" tIns="0" rIns="0" bIns="0" anchor="ctr"/>
+          <a:bodyPr xmlns:a="http://schemas.openxmlformats.org/drawingml/2006/main" wrap="square" lIns="0" tIns="0" rIns="0" bIns="0" anchor="ctr">
+            <a:noAutofit/>
+          </a:bodyPr>
           <a:lstStyle xmlns:a="http://schemas.openxmlformats.org/drawingml/2006/main"/>
           <a:p xmlns:a="http://schemas.openxmlformats.org/drawingml/2006/main">
             <a:pPr>
-              <a:defRPr sz="3750" b="1">
-                <a:solidFill>
-                  <a:srgbClr val="152B3A"/>
-                </a:solidFill>
+              <a:buNone/>
+              <a:defRPr sz="3600" b="1">
+                <a:solidFill>
+                  <a:srgbClr val="152B3A"/>
+                </a:solidFill>
+                <a:latin typeface="Arial"/>
+                <a:ea typeface="Arial"/>
+                <a:cs typeface="Arial"/>
               </a:defRPr>
             </a:pPr>
             <a:r>
-              <a:rPr sz="3750" b="1">
-                <a:solidFill>
-                  <a:srgbClr val="152B3A"/>
-                </a:solidFill>
+              <a:rPr sz="3600" b="1">
+                <a:solidFill>
+                  <a:srgbClr val="152B3A"/>
+                </a:solidFill>
+                <a:latin typeface="Arial"/>
+                <a:ea typeface="Arial"/>
+                <a:cs typeface="Arial"/>
               </a:rPr>
               <a:t>Decide before the explanation</a:t>
             </a:r>
@@ -6183,21 +7043,30 @@
           </a:ln>
         </p:spPr>
         <p:txBody>
-          <a:bodyPr xmlns:a="http://schemas.openxmlformats.org/drawingml/2006/main" lIns="0" tIns="0" rIns="0" bIns="0" anchor="ctr"/>
+          <a:bodyPr xmlns:a="http://schemas.openxmlformats.org/drawingml/2006/main" wrap="square" lIns="0" tIns="0" rIns="0" bIns="0" anchor="ctr">
+            <a:noAutofit/>
+          </a:bodyPr>
           <a:lstStyle xmlns:a="http://schemas.openxmlformats.org/drawingml/2006/main"/>
           <a:p xmlns:a="http://schemas.openxmlformats.org/drawingml/2006/main">
             <a:pPr>
-              <a:defRPr sz="1275" b="0">
+              <a:buNone/>
+              <a:defRPr sz="1200" b="0">
                 <a:solidFill>
                   <a:srgbClr val="50616B"/>
                 </a:solidFill>
+                <a:latin typeface="Arial"/>
+                <a:ea typeface="Arial"/>
+                <a:cs typeface="Arial"/>
               </a:defRPr>
             </a:pPr>
             <a:r>
-              <a:rPr sz="1275" b="0">
+              <a:rPr sz="1200" b="0">
                 <a:solidFill>
                   <a:srgbClr val="50616B"/>
                 </a:solidFill>
+                <a:latin typeface="Arial"/>
+                <a:ea typeface="Arial"/>
+                <a:cs typeface="Arial"/>
               </a:rPr>
               <a:t>AUTUMN 1  ·  WEEK 3  ·  LESSON A</a:t>
             </a:r>
@@ -6233,14 +7102,20 @@
           </a:ln>
         </p:spPr>
         <p:txBody>
-          <a:bodyPr xmlns:a="http://schemas.openxmlformats.org/drawingml/2006/main" lIns="0" tIns="0" rIns="0" bIns="0" anchor="ctr"/>
+          <a:bodyPr xmlns:a="http://schemas.openxmlformats.org/drawingml/2006/main" wrap="square" lIns="0" tIns="0" rIns="0" bIns="0" anchor="ctr">
+            <a:noAutofit/>
+          </a:bodyPr>
           <a:lstStyle xmlns:a="http://schemas.openxmlformats.org/drawingml/2006/main"/>
           <a:p xmlns:a="http://schemas.openxmlformats.org/drawingml/2006/main">
             <a:pPr>
+              <a:buNone/>
               <a:defRPr sz="1350" b="1">
                 <a:solidFill>
                   <a:srgbClr val="28685E"/>
                 </a:solidFill>
+                <a:latin typeface="Arial"/>
+                <a:ea typeface="Arial"/>
+                <a:cs typeface="Arial"/>
               </a:defRPr>
             </a:pPr>
             <a:r>
@@ -6248,6 +7123,9 @@
                 <a:solidFill>
                   <a:srgbClr val="28685E"/>
                 </a:solidFill>
+                <a:latin typeface="Arial"/>
+                <a:ea typeface="Arial"/>
+                <a:cs typeface="Arial"/>
               </a:rPr>
               <a:t>06</a:t>
             </a:r>
@@ -6270,8 +7148,8 @@
         </p:nvSpPr>
         <p:spPr>
           <a:xfrm xmlns:a="http://schemas.openxmlformats.org/drawingml/2006/main">
-            <a:off x="609600" y="2619375"/>
-            <a:ext cx="10972800" cy="714375"/>
+            <a:off x="609600" y="2305050"/>
+            <a:ext cx="7096125" cy="704850"/>
           </a:xfrm>
           <a:prstGeom xmlns:a="http://schemas.openxmlformats.org/drawingml/2006/main" prst="rect">
             <a:avLst/>
@@ -6283,14 +7161,20 @@
           </a:ln>
         </p:spPr>
         <p:txBody>
-          <a:bodyPr xmlns:a="http://schemas.openxmlformats.org/drawingml/2006/main" lIns="0" tIns="0" rIns="0" bIns="0" anchor="ctr"/>
+          <a:bodyPr xmlns:a="http://schemas.openxmlformats.org/drawingml/2006/main" wrap="square" lIns="0" tIns="0" rIns="0" bIns="0" anchor="ctr">
+            <a:noAutofit/>
+          </a:bodyPr>
           <a:lstStyle xmlns:a="http://schemas.openxmlformats.org/drawingml/2006/main"/>
           <a:p xmlns:a="http://schemas.openxmlformats.org/drawingml/2006/main">
             <a:pPr>
+              <a:buNone/>
               <a:defRPr sz="2550" b="0">
                 <a:solidFill>
                   <a:srgbClr val="152B3A"/>
                 </a:solidFill>
+                <a:latin typeface="Arial"/>
+                <a:ea typeface="Arial"/>
+                <a:cs typeface="Arial"/>
               </a:defRPr>
             </a:pPr>
             <a:r>
@@ -6298,6 +7182,9 @@
                 <a:solidFill>
                   <a:srgbClr val="152B3A"/>
                 </a:solidFill>
+                <a:latin typeface="Arial"/>
+                <a:ea typeface="Arial"/>
+                <a:cs typeface="Arial"/>
               </a:rPr>
               <a:t>Fish: bones inside include a backbone.</a:t>
             </a:r>
@@ -6320,8 +7207,8 @@
         </p:nvSpPr>
         <p:spPr>
           <a:xfrm xmlns:a="http://schemas.openxmlformats.org/drawingml/2006/main">
-            <a:off x="609600" y="3409950"/>
-            <a:ext cx="10972800" cy="714375"/>
+            <a:off x="609600" y="3143250"/>
+            <a:ext cx="7096125" cy="704850"/>
           </a:xfrm>
           <a:prstGeom xmlns:a="http://schemas.openxmlformats.org/drawingml/2006/main" prst="rect">
             <a:avLst/>
@@ -6333,14 +7220,20 @@
           </a:ln>
         </p:spPr>
         <p:txBody>
-          <a:bodyPr xmlns:a="http://schemas.openxmlformats.org/drawingml/2006/main" lIns="0" tIns="0" rIns="0" bIns="0" anchor="ctr"/>
+          <a:bodyPr xmlns:a="http://schemas.openxmlformats.org/drawingml/2006/main" wrap="square" lIns="0" tIns="0" rIns="0" bIns="0" anchor="ctr">
+            <a:noAutofit/>
+          </a:bodyPr>
           <a:lstStyle xmlns:a="http://schemas.openxmlformats.org/drawingml/2006/main"/>
           <a:p xmlns:a="http://schemas.openxmlformats.org/drawingml/2006/main">
             <a:pPr>
+              <a:buNone/>
               <a:defRPr sz="2550" b="0">
                 <a:solidFill>
                   <a:srgbClr val="152B3A"/>
                 </a:solidFill>
+                <a:latin typeface="Arial"/>
+                <a:ea typeface="Arial"/>
+                <a:cs typeface="Arial"/>
               </a:defRPr>
             </a:pPr>
             <a:r>
@@ -6348,6 +7241,9 @@
                 <a:solidFill>
                   <a:srgbClr val="152B3A"/>
                 </a:solidFill>
+                <a:latin typeface="Arial"/>
+                <a:ea typeface="Arial"/>
+                <a:cs typeface="Arial"/>
               </a:rPr>
               <a:t>Snail: a shell, but no backbone.</a:t>
             </a:r>
@@ -6370,8 +7266,8 @@
         </p:nvSpPr>
         <p:spPr>
           <a:xfrm xmlns:a="http://schemas.openxmlformats.org/drawingml/2006/main">
-            <a:off x="609600" y="4200525"/>
-            <a:ext cx="10972800" cy="714375"/>
+            <a:off x="609600" y="3981450"/>
+            <a:ext cx="7096125" cy="704850"/>
           </a:xfrm>
           <a:prstGeom xmlns:a="http://schemas.openxmlformats.org/drawingml/2006/main" prst="rect">
             <a:avLst/>
@@ -6383,14 +7279,20 @@
           </a:ln>
         </p:spPr>
         <p:txBody>
-          <a:bodyPr xmlns:a="http://schemas.openxmlformats.org/drawingml/2006/main" lIns="0" tIns="0" rIns="0" bIns="0" anchor="ctr"/>
+          <a:bodyPr xmlns:a="http://schemas.openxmlformats.org/drawingml/2006/main" wrap="square" lIns="0" tIns="0" rIns="0" bIns="0" anchor="ctr">
+            <a:noAutofit/>
+          </a:bodyPr>
           <a:lstStyle xmlns:a="http://schemas.openxmlformats.org/drawingml/2006/main"/>
           <a:p xmlns:a="http://schemas.openxmlformats.org/drawingml/2006/main">
             <a:pPr>
+              <a:buNone/>
               <a:defRPr sz="2550" b="0">
                 <a:solidFill>
                   <a:srgbClr val="152B3A"/>
                 </a:solidFill>
+                <a:latin typeface="Arial"/>
+                <a:ea typeface="Arial"/>
+                <a:cs typeface="Arial"/>
               </a:defRPr>
             </a:pPr>
             <a:r>
@@ -6398,6 +7300,9 @@
                 <a:solidFill>
                   <a:srgbClr val="152B3A"/>
                 </a:solidFill>
+                <a:latin typeface="Arial"/>
+                <a:ea typeface="Arial"/>
+                <a:cs typeface="Arial"/>
               </a:rPr>
               <a:t>Frog: bones inside include a backbone.</a:t>
             </a:r>
@@ -6420,8 +7325,8 @@
         </p:nvSpPr>
         <p:spPr>
           <a:xfrm xmlns:a="http://schemas.openxmlformats.org/drawingml/2006/main">
-            <a:off x="609600" y="4991100"/>
-            <a:ext cx="10972800" cy="714375"/>
+            <a:off x="609600" y="4819650"/>
+            <a:ext cx="7096125" cy="704850"/>
           </a:xfrm>
           <a:prstGeom xmlns:a="http://schemas.openxmlformats.org/drawingml/2006/main" prst="rect">
             <a:avLst/>
@@ -6433,27 +7338,58 @@
           </a:ln>
         </p:spPr>
         <p:txBody>
-          <a:bodyPr xmlns:a="http://schemas.openxmlformats.org/drawingml/2006/main" lIns="0" tIns="0" rIns="0" bIns="0" anchor="ctr"/>
+          <a:bodyPr xmlns:a="http://schemas.openxmlformats.org/drawingml/2006/main" wrap="square" lIns="0" tIns="0" rIns="0" bIns="0" anchor="ctr">
+            <a:noAutofit/>
+          </a:bodyPr>
           <a:lstStyle xmlns:a="http://schemas.openxmlformats.org/drawingml/2006/main"/>
           <a:p xmlns:a="http://schemas.openxmlformats.org/drawingml/2006/main">
             <a:pPr>
-              <a:defRPr sz="2550" b="0">
-                <a:solidFill>
-                  <a:srgbClr val="152B3A"/>
-                </a:solidFill>
+              <a:buNone/>
+              <a:defRPr sz="2550" b="1">
+                <a:solidFill>
+                  <a:srgbClr val="28685E"/>
+                </a:solidFill>
+                <a:latin typeface="Arial"/>
+                <a:ea typeface="Arial"/>
+                <a:cs typeface="Arial"/>
               </a:defRPr>
             </a:pPr>
             <a:r>
-              <a:rPr sz="2550" b="0">
-                <a:solidFill>
-                  <a:srgbClr val="152B3A"/>
-                </a:solidFill>
+              <a:rPr sz="2550" b="1">
+                <a:solidFill>
+                  <a:srgbClr val="28685E"/>
+                </a:solidFill>
+                <a:latin typeface="Arial"/>
+                <a:ea typeface="Arial"/>
+                <a:cs typeface="Arial"/>
               </a:rPr>
               <a:t>Choose: vertebrate or invertebrate.</a:t>
             </a:r>
           </a:p>
         </p:txBody>
       </p:sp>
+      <p:pic>
+        <p:nvPicPr>
+          <p:cNvPr id="26" name=""/>
+          <p:cNvPicPr>
+            <a:picLocks xmlns:a="http://schemas.openxmlformats.org/drawingml/2006/main" noChangeAspect="1"/>
+          </p:cNvPicPr>
+          <p:nvPr/>
+        </p:nvPicPr>
+        <p:blipFill>
+          <a:blip xmlns:r="http://schemas.openxmlformats.org/officeDocument/2006/relationships" xmlns:a="http://schemas.openxmlformats.org/drawingml/2006/main" r:embed="Rbf67b9d5753e4263"/>
+          <a:stretch xmlns:a="http://schemas.openxmlformats.org/drawingml/2006/main"/>
+        </p:blipFill>
+        <p:spPr>
+          <a:xfrm xmlns:a="http://schemas.openxmlformats.org/drawingml/2006/main">
+            <a:off x="8429625" y="2971800"/>
+            <a:ext cx="2857500" cy="2143125"/>
+          </a:xfrm>
+          <a:prstGeom xmlns:a="http://schemas.openxmlformats.org/drawingml/2006/main" prst="rect">
+            <a:avLst/>
+          </a:prstGeom>
+        </p:spPr>
+      </p:pic>
     </p:spTree>
     <p:extLst>
       <p:ext uri="{BB962C8B-B14F-4D97-AF65-F5344CB8AC3E}">
@@ -6470,7 +7406,7 @@
     <p:bg>
       <p:bgPr>
         <a:solidFill xmlns:a="http://schemas.openxmlformats.org/drawingml/2006/main">
-          <a:srgbClr val="F5F1E8"/>
+          <a:srgbClr val="FBF9F3"/>
         </a:solidFill>
       </p:bgPr>
     </p:bg>
@@ -6499,8 +7435,8 @@
         </p:nvSpPr>
         <p:spPr>
           <a:xfrm xmlns:a="http://schemas.openxmlformats.org/drawingml/2006/main">
-            <a:off x="609600" y="552450"/>
-            <a:ext cx="781050" cy="57150"/>
+            <a:off x="609600" y="742950"/>
+            <a:ext cx="9906000" cy="38100"/>
           </a:xfrm>
           <a:prstGeom xmlns:a="http://schemas.openxmlformats.org/drawingml/2006/main" prst="rect">
             <a:avLst/>
@@ -6530,8 +7466,8 @@
         </p:nvSpPr>
         <p:spPr>
           <a:xfrm xmlns:a="http://schemas.openxmlformats.org/drawingml/2006/main">
-            <a:off x="609600" y="762000"/>
-            <a:ext cx="9334500" cy="285750"/>
+            <a:off x="609600" y="342900"/>
+            <a:ext cx="9334500" cy="266700"/>
           </a:xfrm>
           <a:prstGeom xmlns:a="http://schemas.openxmlformats.org/drawingml/2006/main" prst="rect">
             <a:avLst/>
@@ -6543,21 +7479,30 @@
           </a:ln>
         </p:spPr>
         <p:txBody>
-          <a:bodyPr xmlns:a="http://schemas.openxmlformats.org/drawingml/2006/main" lIns="0" tIns="0" rIns="0" bIns="0" anchor="ctr"/>
+          <a:bodyPr xmlns:a="http://schemas.openxmlformats.org/drawingml/2006/main" wrap="square" lIns="0" tIns="0" rIns="0" bIns="0" anchor="ctr">
+            <a:noAutofit/>
+          </a:bodyPr>
           <a:lstStyle xmlns:a="http://schemas.openxmlformats.org/drawingml/2006/main"/>
           <a:p xmlns:a="http://schemas.openxmlformats.org/drawingml/2006/main">
             <a:pPr>
-              <a:defRPr sz="1500" b="1">
+              <a:buNone/>
+              <a:defRPr sz="1425" b="1">
                 <a:solidFill>
                   <a:srgbClr val="28685E"/>
                 </a:solidFill>
+                <a:latin typeface="Arial"/>
+                <a:ea typeface="Arial"/>
+                <a:cs typeface="Arial"/>
               </a:defRPr>
             </a:pPr>
             <a:r>
-              <a:rPr sz="1500" b="1">
+              <a:rPr sz="1425" b="1">
                 <a:solidFill>
                   <a:srgbClr val="28685E"/>
                 </a:solidFill>
+                <a:latin typeface="Arial"/>
+                <a:ea typeface="Arial"/>
+                <a:cs typeface="Arial"/>
               </a:rPr>
               <a:t>MADE BY MATT  /  BUILD SCIENCE</a:t>
             </a:r>
@@ -6566,14 +7511,14 @@
       </p:sp>
       <p:pic>
         <p:nvPicPr>
-          <p:cNvPr id="14" name=""/>
+          <p:cNvPr id="17" name=""/>
           <p:cNvPicPr>
             <a:picLocks xmlns:a="http://schemas.openxmlformats.org/drawingml/2006/main" noChangeAspect="1"/>
           </p:cNvPicPr>
           <p:nvPr/>
         </p:nvPicPr>
         <p:blipFill>
-          <a:blip xmlns:r="http://schemas.openxmlformats.org/officeDocument/2006/relationships" xmlns:a="http://schemas.openxmlformats.org/drawingml/2006/main" r:embed="Rb2c2584b7fd0423b"/>
+          <a:blip xmlns:r="http://schemas.openxmlformats.org/officeDocument/2006/relationships" xmlns:a="http://schemas.openxmlformats.org/drawingml/2006/main" r:embed="R59e91fc87b9d4a82"/>
           <a:stretch xmlns:a="http://schemas.openxmlformats.org/drawingml/2006/main"/>
         </p:blipFill>
         <p:spPr>
@@ -6602,8 +7547,8 @@
         </p:nvSpPr>
         <p:spPr>
           <a:xfrm xmlns:a="http://schemas.openxmlformats.org/drawingml/2006/main">
-            <a:off x="609600" y="1352550"/>
-            <a:ext cx="10972800" cy="952500"/>
+            <a:off x="609600" y="1047750"/>
+            <a:ext cx="10972800" cy="895350"/>
           </a:xfrm>
           <a:prstGeom xmlns:a="http://schemas.openxmlformats.org/drawingml/2006/main" prst="rect">
             <a:avLst/>
@@ -6615,21 +7560,30 @@
           </a:ln>
         </p:spPr>
         <p:txBody>
-          <a:bodyPr xmlns:a="http://schemas.openxmlformats.org/drawingml/2006/main" lIns="0" tIns="0" rIns="0" bIns="0" anchor="ctr"/>
+          <a:bodyPr xmlns:a="http://schemas.openxmlformats.org/drawingml/2006/main" wrap="square" lIns="0" tIns="0" rIns="0" bIns="0" anchor="ctr">
+            <a:noAutofit/>
+          </a:bodyPr>
           <a:lstStyle xmlns:a="http://schemas.openxmlformats.org/drawingml/2006/main"/>
           <a:p xmlns:a="http://schemas.openxmlformats.org/drawingml/2006/main">
             <a:pPr>
-              <a:defRPr sz="3750" b="1">
-                <a:solidFill>
-                  <a:srgbClr val="152B3A"/>
-                </a:solidFill>
+              <a:buNone/>
+              <a:defRPr sz="3600" b="1">
+                <a:solidFill>
+                  <a:srgbClr val="152B3A"/>
+                </a:solidFill>
+                <a:latin typeface="Arial"/>
+                <a:ea typeface="Arial"/>
+                <a:cs typeface="Arial"/>
               </a:defRPr>
             </a:pPr>
             <a:r>
-              <a:rPr sz="3750" b="1">
-                <a:solidFill>
-                  <a:srgbClr val="152B3A"/>
-                </a:solidFill>
+              <a:rPr sz="3600" b="1">
+                <a:solidFill>
+                  <a:srgbClr val="152B3A"/>
+                </a:solidFill>
+                <a:latin typeface="Arial"/>
+                <a:ea typeface="Arial"/>
+                <a:cs typeface="Arial"/>
               </a:rPr>
               <a:t>Try the rule again</a:t>
             </a:r>
@@ -6696,21 +7650,30 @@
           </a:ln>
         </p:spPr>
         <p:txBody>
-          <a:bodyPr xmlns:a="http://schemas.openxmlformats.org/drawingml/2006/main" lIns="0" tIns="0" rIns="0" bIns="0" anchor="ctr"/>
+          <a:bodyPr xmlns:a="http://schemas.openxmlformats.org/drawingml/2006/main" wrap="square" lIns="0" tIns="0" rIns="0" bIns="0" anchor="ctr">
+            <a:noAutofit/>
+          </a:bodyPr>
           <a:lstStyle xmlns:a="http://schemas.openxmlformats.org/drawingml/2006/main"/>
           <a:p xmlns:a="http://schemas.openxmlformats.org/drawingml/2006/main">
             <a:pPr>
-              <a:defRPr sz="1275" b="0">
+              <a:buNone/>
+              <a:defRPr sz="1200" b="0">
                 <a:solidFill>
                   <a:srgbClr val="50616B"/>
                 </a:solidFill>
+                <a:latin typeface="Arial"/>
+                <a:ea typeface="Arial"/>
+                <a:cs typeface="Arial"/>
               </a:defRPr>
             </a:pPr>
             <a:r>
-              <a:rPr sz="1275" b="0">
+              <a:rPr sz="1200" b="0">
                 <a:solidFill>
                   <a:srgbClr val="50616B"/>
                 </a:solidFill>
+                <a:latin typeface="Arial"/>
+                <a:ea typeface="Arial"/>
+                <a:cs typeface="Arial"/>
               </a:rPr>
               <a:t>AUTUMN 1  ·  WEEK 3  ·  LESSON A</a:t>
             </a:r>
@@ -6746,14 +7709,20 @@
           </a:ln>
         </p:spPr>
         <p:txBody>
-          <a:bodyPr xmlns:a="http://schemas.openxmlformats.org/drawingml/2006/main" lIns="0" tIns="0" rIns="0" bIns="0" anchor="ctr"/>
+          <a:bodyPr xmlns:a="http://schemas.openxmlformats.org/drawingml/2006/main" wrap="square" lIns="0" tIns="0" rIns="0" bIns="0" anchor="ctr">
+            <a:noAutofit/>
+          </a:bodyPr>
           <a:lstStyle xmlns:a="http://schemas.openxmlformats.org/drawingml/2006/main"/>
           <a:p xmlns:a="http://schemas.openxmlformats.org/drawingml/2006/main">
             <a:pPr>
+              <a:buNone/>
               <a:defRPr sz="1350" b="1">
                 <a:solidFill>
                   <a:srgbClr val="28685E"/>
                 </a:solidFill>
+                <a:latin typeface="Arial"/>
+                <a:ea typeface="Arial"/>
+                <a:cs typeface="Arial"/>
               </a:defRPr>
             </a:pPr>
             <a:r>
@@ -6761,6 +7730,9 @@
                 <a:solidFill>
                   <a:srgbClr val="28685E"/>
                 </a:solidFill>
+                <a:latin typeface="Arial"/>
+                <a:ea typeface="Arial"/>
+                <a:cs typeface="Arial"/>
               </a:rPr>
               <a:t>07</a:t>
             </a:r>
@@ -6783,8 +7755,8 @@
         </p:nvSpPr>
         <p:spPr>
           <a:xfrm xmlns:a="http://schemas.openxmlformats.org/drawingml/2006/main">
-            <a:off x="609600" y="2619375"/>
-            <a:ext cx="10972800" cy="714375"/>
+            <a:off x="609600" y="2305050"/>
+            <a:ext cx="7096125" cy="704850"/>
           </a:xfrm>
           <a:prstGeom xmlns:a="http://schemas.openxmlformats.org/drawingml/2006/main" prst="rect">
             <a:avLst/>
@@ -6796,14 +7768,20 @@
           </a:ln>
         </p:spPr>
         <p:txBody>
-          <a:bodyPr xmlns:a="http://schemas.openxmlformats.org/drawingml/2006/main" lIns="0" tIns="0" rIns="0" bIns="0" anchor="ctr"/>
+          <a:bodyPr xmlns:a="http://schemas.openxmlformats.org/drawingml/2006/main" wrap="square" lIns="0" tIns="0" rIns="0" bIns="0" anchor="ctr">
+            <a:noAutofit/>
+          </a:bodyPr>
           <a:lstStyle xmlns:a="http://schemas.openxmlformats.org/drawingml/2006/main"/>
           <a:p xmlns:a="http://schemas.openxmlformats.org/drawingml/2006/main">
             <a:pPr>
+              <a:buNone/>
               <a:defRPr sz="2550" b="0">
                 <a:solidFill>
                   <a:srgbClr val="152B3A"/>
                 </a:solidFill>
+                <a:latin typeface="Arial"/>
+                <a:ea typeface="Arial"/>
+                <a:cs typeface="Arial"/>
               </a:defRPr>
             </a:pPr>
             <a:r>
@@ -6811,6 +7789,9 @@
                 <a:solidFill>
                   <a:srgbClr val="152B3A"/>
                 </a:solidFill>
+                <a:latin typeface="Arial"/>
+                <a:ea typeface="Arial"/>
+                <a:cs typeface="Arial"/>
               </a:rPr>
               <a:t>Mouse: an internal backbone.</a:t>
             </a:r>
@@ -6833,8 +7814,8 @@
         </p:nvSpPr>
         <p:spPr>
           <a:xfrm xmlns:a="http://schemas.openxmlformats.org/drawingml/2006/main">
-            <a:off x="609600" y="3409950"/>
-            <a:ext cx="10972800" cy="714375"/>
+            <a:off x="609600" y="3143250"/>
+            <a:ext cx="7096125" cy="704850"/>
           </a:xfrm>
           <a:prstGeom xmlns:a="http://schemas.openxmlformats.org/drawingml/2006/main" prst="rect">
             <a:avLst/>
@@ -6846,14 +7827,20 @@
           </a:ln>
         </p:spPr>
         <p:txBody>
-          <a:bodyPr xmlns:a="http://schemas.openxmlformats.org/drawingml/2006/main" lIns="0" tIns="0" rIns="0" bIns="0" anchor="ctr"/>
+          <a:bodyPr xmlns:a="http://schemas.openxmlformats.org/drawingml/2006/main" wrap="square" lIns="0" tIns="0" rIns="0" bIns="0" anchor="ctr">
+            <a:noAutofit/>
+          </a:bodyPr>
           <a:lstStyle xmlns:a="http://schemas.openxmlformats.org/drawingml/2006/main"/>
           <a:p xmlns:a="http://schemas.openxmlformats.org/drawingml/2006/main">
             <a:pPr>
+              <a:buNone/>
               <a:defRPr sz="2550" b="0">
                 <a:solidFill>
                   <a:srgbClr val="152B3A"/>
                 </a:solidFill>
+                <a:latin typeface="Arial"/>
+                <a:ea typeface="Arial"/>
+                <a:cs typeface="Arial"/>
               </a:defRPr>
             </a:pPr>
             <a:r>
@@ -6861,6 +7848,9 @@
                 <a:solidFill>
                   <a:srgbClr val="152B3A"/>
                 </a:solidFill>
+                <a:latin typeface="Arial"/>
+                <a:ea typeface="Arial"/>
+                <a:cs typeface="Arial"/>
               </a:rPr>
               <a:t>Crab: a hard outside; no backbone.</a:t>
             </a:r>
@@ -6883,8 +7873,8 @@
         </p:nvSpPr>
         <p:spPr>
           <a:xfrm xmlns:a="http://schemas.openxmlformats.org/drawingml/2006/main">
-            <a:off x="609600" y="4200525"/>
-            <a:ext cx="10972800" cy="714375"/>
+            <a:off x="609600" y="3981450"/>
+            <a:ext cx="7096125" cy="704850"/>
           </a:xfrm>
           <a:prstGeom xmlns:a="http://schemas.openxmlformats.org/drawingml/2006/main" prst="rect">
             <a:avLst/>
@@ -6896,14 +7886,20 @@
           </a:ln>
         </p:spPr>
         <p:txBody>
-          <a:bodyPr xmlns:a="http://schemas.openxmlformats.org/drawingml/2006/main" lIns="0" tIns="0" rIns="0" bIns="0" anchor="ctr"/>
+          <a:bodyPr xmlns:a="http://schemas.openxmlformats.org/drawingml/2006/main" wrap="square" lIns="0" tIns="0" rIns="0" bIns="0" anchor="ctr">
+            <a:noAutofit/>
+          </a:bodyPr>
           <a:lstStyle xmlns:a="http://schemas.openxmlformats.org/drawingml/2006/main"/>
           <a:p xmlns:a="http://schemas.openxmlformats.org/drawingml/2006/main">
             <a:pPr>
+              <a:buNone/>
               <a:defRPr sz="2550" b="0">
                 <a:solidFill>
                   <a:srgbClr val="152B3A"/>
                 </a:solidFill>
+                <a:latin typeface="Arial"/>
+                <a:ea typeface="Arial"/>
+                <a:cs typeface="Arial"/>
               </a:defRPr>
             </a:pPr>
             <a:r>
@@ -6911,6 +7907,9 @@
                 <a:solidFill>
                   <a:srgbClr val="152B3A"/>
                 </a:solidFill>
+                <a:latin typeface="Arial"/>
+                <a:ea typeface="Arial"/>
+                <a:cs typeface="Arial"/>
               </a:rPr>
               <a:t>Earthworm: fluid support; no backbone.</a:t>
             </a:r>
@@ -6933,8 +7932,8 @@
         </p:nvSpPr>
         <p:spPr>
           <a:xfrm xmlns:a="http://schemas.openxmlformats.org/drawingml/2006/main">
-            <a:off x="609600" y="4991100"/>
-            <a:ext cx="10972800" cy="714375"/>
+            <a:off x="609600" y="4819650"/>
+            <a:ext cx="7096125" cy="704850"/>
           </a:xfrm>
           <a:prstGeom xmlns:a="http://schemas.openxmlformats.org/drawingml/2006/main" prst="rect">
             <a:avLst/>
@@ -6946,27 +7945,58 @@
           </a:ln>
         </p:spPr>
         <p:txBody>
-          <a:bodyPr xmlns:a="http://schemas.openxmlformats.org/drawingml/2006/main" lIns="0" tIns="0" rIns="0" bIns="0" anchor="ctr"/>
+          <a:bodyPr xmlns:a="http://schemas.openxmlformats.org/drawingml/2006/main" wrap="square" lIns="0" tIns="0" rIns="0" bIns="0" anchor="ctr">
+            <a:noAutofit/>
+          </a:bodyPr>
           <a:lstStyle xmlns:a="http://schemas.openxmlformats.org/drawingml/2006/main"/>
           <a:p xmlns:a="http://schemas.openxmlformats.org/drawingml/2006/main">
             <a:pPr>
-              <a:defRPr sz="2550" b="0">
-                <a:solidFill>
-                  <a:srgbClr val="152B3A"/>
-                </a:solidFill>
+              <a:buNone/>
+              <a:defRPr sz="2550" b="1">
+                <a:solidFill>
+                  <a:srgbClr val="28685E"/>
+                </a:solidFill>
+                <a:latin typeface="Arial"/>
+                <a:ea typeface="Arial"/>
+                <a:cs typeface="Arial"/>
               </a:defRPr>
             </a:pPr>
             <a:r>
-              <a:rPr sz="2550" b="0">
-                <a:solidFill>
-                  <a:srgbClr val="152B3A"/>
-                </a:solidFill>
+              <a:rPr sz="2550" b="1">
+                <a:solidFill>
+                  <a:srgbClr val="28685E"/>
+                </a:solidFill>
+                <a:latin typeface="Arial"/>
+                <a:ea typeface="Arial"/>
+                <a:cs typeface="Arial"/>
               </a:rPr>
               <a:t>Which body clue decides each group?</a:t>
             </a:r>
           </a:p>
         </p:txBody>
       </p:sp>
+      <p:pic>
+        <p:nvPicPr>
+          <p:cNvPr id="26" name=""/>
+          <p:cNvPicPr>
+            <a:picLocks xmlns:a="http://schemas.openxmlformats.org/drawingml/2006/main" noChangeAspect="1"/>
+          </p:cNvPicPr>
+          <p:nvPr/>
+        </p:nvPicPr>
+        <p:blipFill>
+          <a:blip xmlns:r="http://schemas.openxmlformats.org/officeDocument/2006/relationships" xmlns:a="http://schemas.openxmlformats.org/drawingml/2006/main" r:embed="Rb6dd17a4e0f54198"/>
+          <a:stretch xmlns:a="http://schemas.openxmlformats.org/drawingml/2006/main"/>
+        </p:blipFill>
+        <p:spPr>
+          <a:xfrm xmlns:a="http://schemas.openxmlformats.org/drawingml/2006/main">
+            <a:off x="8429625" y="2971800"/>
+            <a:ext cx="2857500" cy="2143125"/>
+          </a:xfrm>
+          <a:prstGeom xmlns:a="http://schemas.openxmlformats.org/drawingml/2006/main" prst="rect">
+            <a:avLst/>
+          </a:prstGeom>
+        </p:spPr>
+      </p:pic>
     </p:spTree>
     <p:extLst>
       <p:ext uri="{BB962C8B-B14F-4D97-AF65-F5344CB8AC3E}">
@@ -6983,7 +8013,7 @@
     <p:bg>
       <p:bgPr>
         <a:solidFill xmlns:a="http://schemas.openxmlformats.org/drawingml/2006/main">
-          <a:srgbClr val="F5F1E8"/>
+          <a:srgbClr val="FBF9F3"/>
         </a:solidFill>
       </p:bgPr>
     </p:bg>
@@ -7012,8 +8042,8 @@
         </p:nvSpPr>
         <p:spPr>
           <a:xfrm xmlns:a="http://schemas.openxmlformats.org/drawingml/2006/main">
-            <a:off x="609600" y="552450"/>
-            <a:ext cx="781050" cy="57150"/>
+            <a:off x="609600" y="742950"/>
+            <a:ext cx="9906000" cy="38100"/>
           </a:xfrm>
           <a:prstGeom xmlns:a="http://schemas.openxmlformats.org/drawingml/2006/main" prst="rect">
             <a:avLst/>
@@ -7043,8 +8073,8 @@
         </p:nvSpPr>
         <p:spPr>
           <a:xfrm xmlns:a="http://schemas.openxmlformats.org/drawingml/2006/main">
-            <a:off x="609600" y="762000"/>
-            <a:ext cx="9334500" cy="285750"/>
+            <a:off x="609600" y="342900"/>
+            <a:ext cx="9334500" cy="266700"/>
           </a:xfrm>
           <a:prstGeom xmlns:a="http://schemas.openxmlformats.org/drawingml/2006/main" prst="rect">
             <a:avLst/>
@@ -7056,21 +8086,30 @@
           </a:ln>
         </p:spPr>
         <p:txBody>
-          <a:bodyPr xmlns:a="http://schemas.openxmlformats.org/drawingml/2006/main" lIns="0" tIns="0" rIns="0" bIns="0" anchor="ctr"/>
+          <a:bodyPr xmlns:a="http://schemas.openxmlformats.org/drawingml/2006/main" wrap="square" lIns="0" tIns="0" rIns="0" bIns="0" anchor="ctr">
+            <a:noAutofit/>
+          </a:bodyPr>
           <a:lstStyle xmlns:a="http://schemas.openxmlformats.org/drawingml/2006/main"/>
           <a:p xmlns:a="http://schemas.openxmlformats.org/drawingml/2006/main">
             <a:pPr>
-              <a:defRPr sz="1500" b="1">
+              <a:buNone/>
+              <a:defRPr sz="1425" b="1">
                 <a:solidFill>
                   <a:srgbClr val="28685E"/>
                 </a:solidFill>
+                <a:latin typeface="Arial"/>
+                <a:ea typeface="Arial"/>
+                <a:cs typeface="Arial"/>
               </a:defRPr>
             </a:pPr>
             <a:r>
-              <a:rPr sz="1500" b="1">
+              <a:rPr sz="1425" b="1">
                 <a:solidFill>
                   <a:srgbClr val="28685E"/>
                 </a:solidFill>
+                <a:latin typeface="Arial"/>
+                <a:ea typeface="Arial"/>
+                <a:cs typeface="Arial"/>
               </a:rPr>
               <a:t>MADE BY MATT  /  BUILD SCIENCE</a:t>
             </a:r>
@@ -7079,14 +8118,14 @@
       </p:sp>
       <p:pic>
         <p:nvPicPr>
-          <p:cNvPr id="14" name=""/>
+          <p:cNvPr id="18" name=""/>
           <p:cNvPicPr>
             <a:picLocks xmlns:a="http://schemas.openxmlformats.org/drawingml/2006/main" noChangeAspect="1"/>
           </p:cNvPicPr>
           <p:nvPr/>
         </p:nvPicPr>
         <p:blipFill>
-          <a:blip xmlns:r="http://schemas.openxmlformats.org/officeDocument/2006/relationships" xmlns:a="http://schemas.openxmlformats.org/drawingml/2006/main" r:embed="Rb1b68d5727c64637"/>
+          <a:blip xmlns:r="http://schemas.openxmlformats.org/officeDocument/2006/relationships" xmlns:a="http://schemas.openxmlformats.org/drawingml/2006/main" r:embed="R8321bedc096b410f"/>
           <a:stretch xmlns:a="http://schemas.openxmlformats.org/drawingml/2006/main"/>
         </p:blipFill>
         <p:spPr>
@@ -7115,8 +8154,8 @@
         </p:nvSpPr>
         <p:spPr>
           <a:xfrm xmlns:a="http://schemas.openxmlformats.org/drawingml/2006/main">
-            <a:off x="609600" y="1352550"/>
-            <a:ext cx="10972800" cy="952500"/>
+            <a:off x="609600" y="1047750"/>
+            <a:ext cx="10972800" cy="895350"/>
           </a:xfrm>
           <a:prstGeom xmlns:a="http://schemas.openxmlformats.org/drawingml/2006/main" prst="rect">
             <a:avLst/>
@@ -7128,21 +8167,30 @@
           </a:ln>
         </p:spPr>
         <p:txBody>
-          <a:bodyPr xmlns:a="http://schemas.openxmlformats.org/drawingml/2006/main" lIns="0" tIns="0" rIns="0" bIns="0" anchor="ctr"/>
+          <a:bodyPr xmlns:a="http://schemas.openxmlformats.org/drawingml/2006/main" wrap="square" lIns="0" tIns="0" rIns="0" bIns="0" anchor="ctr">
+            <a:noAutofit/>
+          </a:bodyPr>
           <a:lstStyle xmlns:a="http://schemas.openxmlformats.org/drawingml/2006/main"/>
           <a:p xmlns:a="http://schemas.openxmlformats.org/drawingml/2006/main">
             <a:pPr>
-              <a:defRPr sz="3750" b="1">
-                <a:solidFill>
-                  <a:srgbClr val="152B3A"/>
-                </a:solidFill>
+              <a:buNone/>
+              <a:defRPr sz="3600" b="1">
+                <a:solidFill>
+                  <a:srgbClr val="152B3A"/>
+                </a:solidFill>
+                <a:latin typeface="Arial"/>
+                <a:ea typeface="Arial"/>
+                <a:cs typeface="Arial"/>
               </a:defRPr>
             </a:pPr>
             <a:r>
-              <a:rPr sz="3750" b="1">
-                <a:solidFill>
-                  <a:srgbClr val="152B3A"/>
-                </a:solidFill>
+              <a:rPr sz="3600" b="1">
+                <a:solidFill>
+                  <a:srgbClr val="152B3A"/>
+                </a:solidFill>
+                <a:latin typeface="Arial"/>
+                <a:ea typeface="Arial"/>
+                <a:cs typeface="Arial"/>
               </a:rPr>
               <a:t>Different outsides, same test</a:t>
             </a:r>
@@ -7209,21 +8257,30 @@
           </a:ln>
         </p:spPr>
         <p:txBody>
-          <a:bodyPr xmlns:a="http://schemas.openxmlformats.org/drawingml/2006/main" lIns="0" tIns="0" rIns="0" bIns="0" anchor="ctr"/>
+          <a:bodyPr xmlns:a="http://schemas.openxmlformats.org/drawingml/2006/main" wrap="square" lIns="0" tIns="0" rIns="0" bIns="0" anchor="ctr">
+            <a:noAutofit/>
+          </a:bodyPr>
           <a:lstStyle xmlns:a="http://schemas.openxmlformats.org/drawingml/2006/main"/>
           <a:p xmlns:a="http://schemas.openxmlformats.org/drawingml/2006/main">
             <a:pPr>
-              <a:defRPr sz="1275" b="0">
+              <a:buNone/>
+              <a:defRPr sz="1200" b="0">
                 <a:solidFill>
                   <a:srgbClr val="50616B"/>
                 </a:solidFill>
+                <a:latin typeface="Arial"/>
+                <a:ea typeface="Arial"/>
+                <a:cs typeface="Arial"/>
               </a:defRPr>
             </a:pPr>
             <a:r>
-              <a:rPr sz="1275" b="0">
+              <a:rPr sz="1200" b="0">
                 <a:solidFill>
                   <a:srgbClr val="50616B"/>
                 </a:solidFill>
+                <a:latin typeface="Arial"/>
+                <a:ea typeface="Arial"/>
+                <a:cs typeface="Arial"/>
               </a:rPr>
               <a:t>AUTUMN 1  ·  WEEK 3  ·  LESSON A</a:t>
             </a:r>
@@ -7259,14 +8316,20 @@
           </a:ln>
         </p:spPr>
         <p:txBody>
-          <a:bodyPr xmlns:a="http://schemas.openxmlformats.org/drawingml/2006/main" lIns="0" tIns="0" rIns="0" bIns="0" anchor="ctr"/>
+          <a:bodyPr xmlns:a="http://schemas.openxmlformats.org/drawingml/2006/main" wrap="square" lIns="0" tIns="0" rIns="0" bIns="0" anchor="ctr">
+            <a:noAutofit/>
+          </a:bodyPr>
           <a:lstStyle xmlns:a="http://schemas.openxmlformats.org/drawingml/2006/main"/>
           <a:p xmlns:a="http://schemas.openxmlformats.org/drawingml/2006/main">
             <a:pPr>
+              <a:buNone/>
               <a:defRPr sz="1350" b="1">
                 <a:solidFill>
                   <a:srgbClr val="28685E"/>
                 </a:solidFill>
+                <a:latin typeface="Arial"/>
+                <a:ea typeface="Arial"/>
+                <a:cs typeface="Arial"/>
               </a:defRPr>
             </a:pPr>
             <a:r>
@@ -7274,6 +8337,9 @@
                 <a:solidFill>
                   <a:srgbClr val="28685E"/>
                 </a:solidFill>
+                <a:latin typeface="Arial"/>
+                <a:ea typeface="Arial"/>
+                <a:cs typeface="Arial"/>
               </a:rPr>
               <a:t>08</a:t>
             </a:r>
@@ -7296,8 +8362,8 @@
         </p:nvSpPr>
         <p:spPr>
           <a:xfrm xmlns:a="http://schemas.openxmlformats.org/drawingml/2006/main">
-            <a:off x="609600" y="2619375"/>
-            <a:ext cx="4953000" cy="428625"/>
+            <a:off x="609600" y="2257425"/>
+            <a:ext cx="5143500" cy="533400"/>
           </a:xfrm>
           <a:prstGeom xmlns:a="http://schemas.openxmlformats.org/drawingml/2006/main" prst="rect">
             <a:avLst/>
@@ -7309,21 +8375,30 @@
           </a:ln>
         </p:spPr>
         <p:txBody>
-          <a:bodyPr xmlns:a="http://schemas.openxmlformats.org/drawingml/2006/main" lIns="0" tIns="0" rIns="0" bIns="0" anchor="ctr"/>
+          <a:bodyPr xmlns:a="http://schemas.openxmlformats.org/drawingml/2006/main" wrap="square" lIns="0" tIns="0" rIns="0" bIns="0" anchor="ctr">
+            <a:noAutofit/>
+          </a:bodyPr>
           <a:lstStyle xmlns:a="http://schemas.openxmlformats.org/drawingml/2006/main"/>
           <a:p xmlns:a="http://schemas.openxmlformats.org/drawingml/2006/main">
             <a:pPr>
-              <a:defRPr sz="2025" b="1">
+              <a:buNone/>
+              <a:defRPr sz="2100" b="1">
                 <a:solidFill>
                   <a:srgbClr val="28685E"/>
                 </a:solidFill>
+                <a:latin typeface="Arial"/>
+                <a:ea typeface="Arial"/>
+                <a:cs typeface="Arial"/>
               </a:defRPr>
             </a:pPr>
             <a:r>
-              <a:rPr sz="2025" b="1">
+              <a:rPr sz="2100" b="1">
                 <a:solidFill>
                   <a:srgbClr val="28685E"/>
                 </a:solidFill>
+                <a:latin typeface="Arial"/>
+                <a:ea typeface="Arial"/>
+                <a:cs typeface="Arial"/>
               </a:rPr>
               <a:t>THE ANIMALS</a:t>
             </a:r>
@@ -7346,8 +8421,8 @@
         </p:nvSpPr>
         <p:spPr>
           <a:xfrm xmlns:a="http://schemas.openxmlformats.org/drawingml/2006/main">
-            <a:off x="6572250" y="2619375"/>
-            <a:ext cx="4953000" cy="428625"/>
+            <a:off x="6572250" y="2257425"/>
+            <a:ext cx="5010150" cy="533400"/>
           </a:xfrm>
           <a:prstGeom xmlns:a="http://schemas.openxmlformats.org/drawingml/2006/main" prst="rect">
             <a:avLst/>
@@ -7359,21 +8434,30 @@
           </a:ln>
         </p:spPr>
         <p:txBody>
-          <a:bodyPr xmlns:a="http://schemas.openxmlformats.org/drawingml/2006/main" lIns="0" tIns="0" rIns="0" bIns="0" anchor="ctr"/>
+          <a:bodyPr xmlns:a="http://schemas.openxmlformats.org/drawingml/2006/main" wrap="square" lIns="0" tIns="0" rIns="0" bIns="0" anchor="ctr">
+            <a:noAutofit/>
+          </a:bodyPr>
           <a:lstStyle xmlns:a="http://schemas.openxmlformats.org/drawingml/2006/main"/>
           <a:p xmlns:a="http://schemas.openxmlformats.org/drawingml/2006/main">
             <a:pPr>
-              <a:defRPr sz="2025" b="1">
+              <a:buNone/>
+              <a:defRPr sz="2100" b="1">
                 <a:solidFill>
                   <a:srgbClr val="A65D25"/>
                 </a:solidFill>
+                <a:latin typeface="Arial"/>
+                <a:ea typeface="Arial"/>
+                <a:cs typeface="Arial"/>
               </a:defRPr>
             </a:pPr>
             <a:r>
-              <a:rPr sz="2025" b="1">
+              <a:rPr sz="2100" b="1">
                 <a:solidFill>
                   <a:srgbClr val="A65D25"/>
                 </a:solidFill>
+                <a:latin typeface="Arial"/>
+                <a:ea typeface="Arial"/>
+                <a:cs typeface="Arial"/>
               </a:rPr>
               <a:t>THE BODY EVIDENCE</a:t>
             </a:r>
@@ -7396,8 +8480,8 @@
         </p:nvSpPr>
         <p:spPr>
           <a:xfrm xmlns:a="http://schemas.openxmlformats.org/drawingml/2006/main">
-            <a:off x="609600" y="3333750"/>
-            <a:ext cx="4953000" cy="2524125"/>
+            <a:off x="609600" y="3238500"/>
+            <a:ext cx="5143500" cy="2286000"/>
           </a:xfrm>
           <a:prstGeom xmlns:a="http://schemas.openxmlformats.org/drawingml/2006/main" prst="rect">
             <a:avLst/>
@@ -7409,14 +8493,20 @@
           </a:ln>
         </p:spPr>
         <p:txBody>
-          <a:bodyPr xmlns:a="http://schemas.openxmlformats.org/drawingml/2006/main" lIns="0" tIns="0" rIns="0" bIns="0" anchor="ctr"/>
+          <a:bodyPr xmlns:a="http://schemas.openxmlformats.org/drawingml/2006/main" wrap="square" lIns="0" tIns="0" rIns="0" bIns="0" anchor="ctr">
+            <a:noAutofit/>
+          </a:bodyPr>
           <a:lstStyle xmlns:a="http://schemas.openxmlformats.org/drawingml/2006/main"/>
           <a:p xmlns:a="http://schemas.openxmlformats.org/drawingml/2006/main">
             <a:pPr>
+              <a:buNone/>
               <a:defRPr sz="2400" b="0">
                 <a:solidFill>
                   <a:srgbClr val="152B3A"/>
                 </a:solidFill>
+                <a:latin typeface="Arial"/>
+                <a:ea typeface="Arial"/>
+                <a:cs typeface="Arial"/>
               </a:defRPr>
             </a:pPr>
             <a:r>
@@ -7424,16 +8514,23 @@
                 <a:solidFill>
                   <a:srgbClr val="152B3A"/>
                 </a:solidFill>
+                <a:latin typeface="Arial"/>
+                <a:ea typeface="Arial"/>
+                <a:cs typeface="Arial"/>
               </a:rPr>
               <a:t>Fish and frog</a:t>
             </a:r>
           </a:p>
           <a:p xmlns:a="http://schemas.openxmlformats.org/drawingml/2006/main">
             <a:pPr>
+              <a:buNone/>
               <a:defRPr sz="2400" b="0">
                 <a:solidFill>
                   <a:srgbClr val="152B3A"/>
                 </a:solidFill>
+                <a:latin typeface="Arial"/>
+                <a:ea typeface="Arial"/>
+                <a:cs typeface="Arial"/>
               </a:defRPr>
             </a:pPr>
             <a:r>
@@ -7441,16 +8538,23 @@
                 <a:solidFill>
                   <a:srgbClr val="152B3A"/>
                 </a:solidFill>
+                <a:latin typeface="Arial"/>
+                <a:ea typeface="Arial"/>
+                <a:cs typeface="Arial"/>
               </a:rPr>
               <a:t>Bird and lizard</a:t>
             </a:r>
           </a:p>
           <a:p xmlns:a="http://schemas.openxmlformats.org/drawingml/2006/main">
             <a:pPr>
+              <a:buNone/>
               <a:defRPr sz="2400" b="0">
                 <a:solidFill>
                   <a:srgbClr val="152B3A"/>
                 </a:solidFill>
+                <a:latin typeface="Arial"/>
+                <a:ea typeface="Arial"/>
+                <a:cs typeface="Arial"/>
               </a:defRPr>
             </a:pPr>
             <a:r>
@@ -7458,6 +8562,9 @@
                 <a:solidFill>
                   <a:srgbClr val="152B3A"/>
                 </a:solidFill>
+                <a:latin typeface="Arial"/>
+                <a:ea typeface="Arial"/>
+                <a:cs typeface="Arial"/>
               </a:rPr>
               <a:t>Very different outsides.</a:t>
             </a:r>
@@ -7480,8 +8587,8 @@
         </p:nvSpPr>
         <p:spPr>
           <a:xfrm xmlns:a="http://schemas.openxmlformats.org/drawingml/2006/main">
-            <a:off x="6572250" y="3333750"/>
-            <a:ext cx="4857750" cy="2524125"/>
+            <a:off x="6572250" y="3238500"/>
+            <a:ext cx="5010150" cy="2286000"/>
           </a:xfrm>
           <a:prstGeom xmlns:a="http://schemas.openxmlformats.org/drawingml/2006/main" prst="rect">
             <a:avLst/>
@@ -7493,14 +8600,20 @@
           </a:ln>
         </p:spPr>
         <p:txBody>
-          <a:bodyPr xmlns:a="http://schemas.openxmlformats.org/drawingml/2006/main" lIns="0" tIns="0" rIns="0" bIns="0" anchor="ctr"/>
+          <a:bodyPr xmlns:a="http://schemas.openxmlformats.org/drawingml/2006/main" wrap="square" lIns="0" tIns="0" rIns="0" bIns="0" anchor="ctr">
+            <a:noAutofit/>
+          </a:bodyPr>
           <a:lstStyle xmlns:a="http://schemas.openxmlformats.org/drawingml/2006/main"/>
           <a:p xmlns:a="http://schemas.openxmlformats.org/drawingml/2006/main">
             <a:pPr>
+              <a:buNone/>
               <a:defRPr sz="2400" b="0">
                 <a:solidFill>
                   <a:srgbClr val="152B3A"/>
                 </a:solidFill>
+                <a:latin typeface="Arial"/>
+                <a:ea typeface="Arial"/>
+                <a:cs typeface="Arial"/>
               </a:defRPr>
             </a:pPr>
             <a:r>
@@ -7508,16 +8621,23 @@
                 <a:solidFill>
                   <a:srgbClr val="152B3A"/>
                 </a:solidFill>
+                <a:latin typeface="Arial"/>
+                <a:ea typeface="Arial"/>
+                <a:cs typeface="Arial"/>
               </a:rPr>
               <a:t>All have an internal backbone.</a:t>
             </a:r>
           </a:p>
           <a:p xmlns:a="http://schemas.openxmlformats.org/drawingml/2006/main">
             <a:pPr>
+              <a:buNone/>
               <a:defRPr sz="2400" b="0">
                 <a:solidFill>
                   <a:srgbClr val="152B3A"/>
                 </a:solidFill>
+                <a:latin typeface="Arial"/>
+                <a:ea typeface="Arial"/>
+                <a:cs typeface="Arial"/>
               </a:defRPr>
             </a:pPr>
             <a:r>
@@ -7525,16 +8645,23 @@
                 <a:solidFill>
                   <a:srgbClr val="152B3A"/>
                 </a:solidFill>
+                <a:latin typeface="Arial"/>
+                <a:ea typeface="Arial"/>
+                <a:cs typeface="Arial"/>
               </a:rPr>
               <a:t>All are vertebrates.</a:t>
             </a:r>
           </a:p>
           <a:p xmlns:a="http://schemas.openxmlformats.org/drawingml/2006/main">
             <a:pPr>
+              <a:buNone/>
               <a:defRPr sz="2400" b="0">
                 <a:solidFill>
                   <a:srgbClr val="152B3A"/>
                 </a:solidFill>
+                <a:latin typeface="Arial"/>
+                <a:ea typeface="Arial"/>
+                <a:cs typeface="Arial"/>
               </a:defRPr>
             </a:pPr>
             <a:r>
@@ -7542,11 +8669,76 @@
                 <a:solidFill>
                   <a:srgbClr val="152B3A"/>
                 </a:solidFill>
+                <a:latin typeface="Arial"/>
+                <a:ea typeface="Arial"/>
+                <a:cs typeface="Arial"/>
               </a:rPr>
               <a:t>Fur and legs are not the test.</a:t>
             </a:r>
           </a:p>
         </p:txBody>
+      </p:sp>
+      <p:sp>
+        <p:nvSpPr>
+          <p:cNvPr id="14" name="">
+            <a:extLst xmlns:a="http://schemas.openxmlformats.org/drawingml/2006/main">
+              <a:ext uri="{FF2B5EF4-FFF2-40B4-BE49-F238E27FC236}">
+                <a16:creationId xmlns:a16="http://schemas.microsoft.com/office/drawing/2014/main" id="{2ED7A34E-60B9-43D9-A2D4-72E80AFB5450}"/>
+              </a:ext>
+            </a:extLst>
+          </p:cNvPr>
+          <p:cNvSpPr>
+            <a:spLocks xmlns:a="http://schemas.openxmlformats.org/drawingml/2006/main" noGrp="1"/>
+          </p:cNvSpPr>
+          <p:nvPr/>
+        </p:nvSpPr>
+        <p:spPr>
+          <a:xfrm xmlns:a="http://schemas.openxmlformats.org/drawingml/2006/main">
+            <a:off x="609600" y="2886075"/>
+            <a:ext cx="5048250" cy="0"/>
+          </a:xfrm>
+          <a:prstGeom xmlns:a="http://schemas.openxmlformats.org/drawingml/2006/main" prst="line">
+            <a:avLst/>
+          </a:prstGeom>
+          <a:noFill xmlns:a="http://schemas.openxmlformats.org/drawingml/2006/main"/>
+          <a:ln xmlns:a="http://schemas.openxmlformats.org/drawingml/2006/main" w="28575">
+            <a:solidFill>
+              <a:srgbClr val="DCE7DD"/>
+            </a:solidFill>
+            <a:prstDash val="solid"/>
+          </a:ln>
+        </p:spPr>
+      </p:sp>
+      <p:sp>
+        <p:nvSpPr>
+          <p:cNvPr id="15" name="">
+            <a:extLst xmlns:a="http://schemas.openxmlformats.org/drawingml/2006/main">
+              <a:ext uri="{FF2B5EF4-FFF2-40B4-BE49-F238E27FC236}">
+                <a16:creationId xmlns:a16="http://schemas.microsoft.com/office/drawing/2014/main" id="{EF7D3D05-6E36-4FEA-8679-B33644206819}"/>
+              </a:ext>
+            </a:extLst>
+          </p:cNvPr>
+          <p:cNvSpPr>
+            <a:spLocks xmlns:a="http://schemas.openxmlformats.org/drawingml/2006/main" noGrp="1"/>
+          </p:cNvSpPr>
+          <p:nvPr/>
+        </p:nvSpPr>
+        <p:spPr>
+          <a:xfrm xmlns:a="http://schemas.openxmlformats.org/drawingml/2006/main">
+            <a:off x="6572250" y="2886075"/>
+            <a:ext cx="5010150" cy="0"/>
+          </a:xfrm>
+          <a:prstGeom xmlns:a="http://schemas.openxmlformats.org/drawingml/2006/main" prst="line">
+            <a:avLst/>
+          </a:prstGeom>
+          <a:noFill xmlns:a="http://schemas.openxmlformats.org/drawingml/2006/main"/>
+          <a:ln xmlns:a="http://schemas.openxmlformats.org/drawingml/2006/main" w="28575">
+            <a:solidFill>
+              <a:srgbClr val="DCE7DD"/>
+            </a:solidFill>
+            <a:prstDash val="solid"/>
+          </a:ln>
+        </p:spPr>
       </p:sp>
     </p:spTree>
     <p:extLst>
@@ -7564,7 +8756,7 @@
     <p:bg>
       <p:bgPr>
         <a:solidFill xmlns:a="http://schemas.openxmlformats.org/drawingml/2006/main">
-          <a:srgbClr val="F5F1E8"/>
+          <a:srgbClr val="FBF9F3"/>
         </a:solidFill>
       </p:bgPr>
     </p:bg>
@@ -7593,8 +8785,8 @@
         </p:nvSpPr>
         <p:spPr>
           <a:xfrm xmlns:a="http://schemas.openxmlformats.org/drawingml/2006/main">
-            <a:off x="609600" y="552450"/>
-            <a:ext cx="781050" cy="57150"/>
+            <a:off x="609600" y="742950"/>
+            <a:ext cx="9906000" cy="38100"/>
           </a:xfrm>
           <a:prstGeom xmlns:a="http://schemas.openxmlformats.org/drawingml/2006/main" prst="rect">
             <a:avLst/>
@@ -7624,8 +8816,8 @@
         </p:nvSpPr>
         <p:spPr>
           <a:xfrm xmlns:a="http://schemas.openxmlformats.org/drawingml/2006/main">
-            <a:off x="609600" y="762000"/>
-            <a:ext cx="9334500" cy="285750"/>
+            <a:off x="609600" y="342900"/>
+            <a:ext cx="9334500" cy="266700"/>
           </a:xfrm>
           <a:prstGeom xmlns:a="http://schemas.openxmlformats.org/drawingml/2006/main" prst="rect">
             <a:avLst/>
@@ -7637,21 +8829,30 @@
           </a:ln>
         </p:spPr>
         <p:txBody>
-          <a:bodyPr xmlns:a="http://schemas.openxmlformats.org/drawingml/2006/main" lIns="0" tIns="0" rIns="0" bIns="0" anchor="ctr"/>
+          <a:bodyPr xmlns:a="http://schemas.openxmlformats.org/drawingml/2006/main" wrap="square" lIns="0" tIns="0" rIns="0" bIns="0" anchor="ctr">
+            <a:noAutofit/>
+          </a:bodyPr>
           <a:lstStyle xmlns:a="http://schemas.openxmlformats.org/drawingml/2006/main"/>
           <a:p xmlns:a="http://schemas.openxmlformats.org/drawingml/2006/main">
             <a:pPr>
-              <a:defRPr sz="1500" b="1">
+              <a:buNone/>
+              <a:defRPr sz="1425" b="1">
                 <a:solidFill>
                   <a:srgbClr val="28685E"/>
                 </a:solidFill>
+                <a:latin typeface="Arial"/>
+                <a:ea typeface="Arial"/>
+                <a:cs typeface="Arial"/>
               </a:defRPr>
             </a:pPr>
             <a:r>
-              <a:rPr sz="1500" b="1">
+              <a:rPr sz="1425" b="1">
                 <a:solidFill>
                   <a:srgbClr val="28685E"/>
                 </a:solidFill>
+                <a:latin typeface="Arial"/>
+                <a:ea typeface="Arial"/>
+                <a:cs typeface="Arial"/>
               </a:rPr>
               <a:t>MADE BY MATT  /  BUILD SCIENCE</a:t>
             </a:r>
@@ -7660,14 +8861,14 @@
       </p:sp>
       <p:pic>
         <p:nvPicPr>
-          <p:cNvPr id="12" name=""/>
+          <p:cNvPr id="15" name=""/>
           <p:cNvPicPr>
             <a:picLocks xmlns:a="http://schemas.openxmlformats.org/drawingml/2006/main" noChangeAspect="1"/>
           </p:cNvPicPr>
           <p:nvPr/>
         </p:nvPicPr>
         <p:blipFill>
-          <a:blip xmlns:r="http://schemas.openxmlformats.org/officeDocument/2006/relationships" xmlns:a="http://schemas.openxmlformats.org/drawingml/2006/main" r:embed="R34fe384b72cb40b9"/>
+          <a:blip xmlns:r="http://schemas.openxmlformats.org/officeDocument/2006/relationships" xmlns:a="http://schemas.openxmlformats.org/drawingml/2006/main" r:embed="R2fc999e9c5dd4b36"/>
           <a:stretch xmlns:a="http://schemas.openxmlformats.org/drawingml/2006/main"/>
         </p:blipFill>
         <p:spPr>
@@ -7696,8 +8897,8 @@
         </p:nvSpPr>
         <p:spPr>
           <a:xfrm xmlns:a="http://schemas.openxmlformats.org/drawingml/2006/main">
-            <a:off x="609600" y="1352550"/>
-            <a:ext cx="10972800" cy="952500"/>
+            <a:off x="609600" y="1047750"/>
+            <a:ext cx="10972800" cy="895350"/>
           </a:xfrm>
           <a:prstGeom xmlns:a="http://schemas.openxmlformats.org/drawingml/2006/main" prst="rect">
             <a:avLst/>
@@ -7709,21 +8910,30 @@
           </a:ln>
         </p:spPr>
         <p:txBody>
-          <a:bodyPr xmlns:a="http://schemas.openxmlformats.org/drawingml/2006/main" lIns="0" tIns="0" rIns="0" bIns="0" anchor="ctr"/>
+          <a:bodyPr xmlns:a="http://schemas.openxmlformats.org/drawingml/2006/main" wrap="square" lIns="0" tIns="0" rIns="0" bIns="0" anchor="ctr">
+            <a:noAutofit/>
+          </a:bodyPr>
           <a:lstStyle xmlns:a="http://schemas.openxmlformats.org/drawingml/2006/main"/>
           <a:p xmlns:a="http://schemas.openxmlformats.org/drawingml/2006/main">
             <a:pPr>
-              <a:defRPr sz="3750" b="1">
-                <a:solidFill>
-                  <a:srgbClr val="152B3A"/>
-                </a:solidFill>
+              <a:buNone/>
+              <a:defRPr sz="3600" b="1">
+                <a:solidFill>
+                  <a:srgbClr val="152B3A"/>
+                </a:solidFill>
+                <a:latin typeface="Arial"/>
+                <a:ea typeface="Arial"/>
+                <a:cs typeface="Arial"/>
               </a:defRPr>
             </a:pPr>
             <a:r>
-              <a:rPr sz="3750" b="1">
-                <a:solidFill>
-                  <a:srgbClr val="152B3A"/>
-                </a:solidFill>
+              <a:rPr sz="3600" b="1">
+                <a:solidFill>
+                  <a:srgbClr val="152B3A"/>
+                </a:solidFill>
+                <a:latin typeface="Arial"/>
+                <a:ea typeface="Arial"/>
+                <a:cs typeface="Arial"/>
               </a:rPr>
               <a:t>Use because to show your reason</a:t>
             </a:r>
@@ -7790,21 +9000,30 @@
           </a:ln>
         </p:spPr>
         <p:txBody>
-          <a:bodyPr xmlns:a="http://schemas.openxmlformats.org/drawingml/2006/main" lIns="0" tIns="0" rIns="0" bIns="0" anchor="ctr"/>
+          <a:bodyPr xmlns:a="http://schemas.openxmlformats.org/drawingml/2006/main" wrap="square" lIns="0" tIns="0" rIns="0" bIns="0" anchor="ctr">
+            <a:noAutofit/>
+          </a:bodyPr>
           <a:lstStyle xmlns:a="http://schemas.openxmlformats.org/drawingml/2006/main"/>
           <a:p xmlns:a="http://schemas.openxmlformats.org/drawingml/2006/main">
             <a:pPr>
-              <a:defRPr sz="1275" b="0">
+              <a:buNone/>
+              <a:defRPr sz="1200" b="0">
                 <a:solidFill>
                   <a:srgbClr val="50616B"/>
                 </a:solidFill>
+                <a:latin typeface="Arial"/>
+                <a:ea typeface="Arial"/>
+                <a:cs typeface="Arial"/>
               </a:defRPr>
             </a:pPr>
             <a:r>
-              <a:rPr sz="1275" b="0">
+              <a:rPr sz="1200" b="0">
                 <a:solidFill>
                   <a:srgbClr val="50616B"/>
                 </a:solidFill>
+                <a:latin typeface="Arial"/>
+                <a:ea typeface="Arial"/>
+                <a:cs typeface="Arial"/>
               </a:rPr>
               <a:t>AUTUMN 1  ·  WEEK 3  ·  LESSON A</a:t>
             </a:r>
@@ -7840,14 +9059,20 @@
           </a:ln>
         </p:spPr>
         <p:txBody>
-          <a:bodyPr xmlns:a="http://schemas.openxmlformats.org/drawingml/2006/main" lIns="0" tIns="0" rIns="0" bIns="0" anchor="ctr"/>
+          <a:bodyPr xmlns:a="http://schemas.openxmlformats.org/drawingml/2006/main" wrap="square" lIns="0" tIns="0" rIns="0" bIns="0" anchor="ctr">
+            <a:noAutofit/>
+          </a:bodyPr>
           <a:lstStyle xmlns:a="http://schemas.openxmlformats.org/drawingml/2006/main"/>
           <a:p xmlns:a="http://schemas.openxmlformats.org/drawingml/2006/main">
             <a:pPr>
+              <a:buNone/>
               <a:defRPr sz="1350" b="1">
                 <a:solidFill>
                   <a:srgbClr val="28685E"/>
                 </a:solidFill>
+                <a:latin typeface="Arial"/>
+                <a:ea typeface="Arial"/>
+                <a:cs typeface="Arial"/>
               </a:defRPr>
             </a:pPr>
             <a:r>
@@ -7855,6 +9080,9 @@
                 <a:solidFill>
                   <a:srgbClr val="28685E"/>
                 </a:solidFill>
+                <a:latin typeface="Arial"/>
+                <a:ea typeface="Arial"/>
+                <a:cs typeface="Arial"/>
               </a:rPr>
               <a:t>09</a:t>
             </a:r>
@@ -7877,8 +9105,8 @@
         </p:nvSpPr>
         <p:spPr>
           <a:xfrm xmlns:a="http://schemas.openxmlformats.org/drawingml/2006/main">
-            <a:off x="609600" y="2686050"/>
-            <a:ext cx="10858500" cy="1524000"/>
+            <a:off x="609600" y="2428875"/>
+            <a:ext cx="6762750" cy="2190750"/>
           </a:xfrm>
           <a:prstGeom xmlns:a="http://schemas.openxmlformats.org/drawingml/2006/main" prst="rect">
             <a:avLst/>
@@ -7890,21 +9118,30 @@
           </a:ln>
         </p:spPr>
         <p:txBody>
-          <a:bodyPr xmlns:a="http://schemas.openxmlformats.org/drawingml/2006/main" lIns="0" tIns="0" rIns="0" bIns="0" anchor="ctr"/>
+          <a:bodyPr xmlns:a="http://schemas.openxmlformats.org/drawingml/2006/main" wrap="square" lIns="0" tIns="0" rIns="0" bIns="0" anchor="ctr">
+            <a:noAutofit/>
+          </a:bodyPr>
           <a:lstStyle xmlns:a="http://schemas.openxmlformats.org/drawingml/2006/main"/>
           <a:p xmlns:a="http://schemas.openxmlformats.org/drawingml/2006/main">
             <a:pPr>
-              <a:defRPr sz="2925" b="1">
+              <a:buNone/>
+              <a:defRPr sz="2850" b="1">
                 <a:solidFill>
                   <a:srgbClr val="28685E"/>
                 </a:solidFill>
+                <a:latin typeface="Arial"/>
+                <a:ea typeface="Arial"/>
+                <a:cs typeface="Arial"/>
               </a:defRPr>
             </a:pPr>
             <a:r>
-              <a:rPr sz="2925" b="1">
+              <a:rPr sz="2850" b="1">
                 <a:solidFill>
                   <a:srgbClr val="28685E"/>
                 </a:solidFill>
+                <a:latin typeface="Arial"/>
+                <a:ea typeface="Arial"/>
+                <a:cs typeface="Arial"/>
               </a:rPr>
               <a:t>The robin is a vertebrate because its body has an internal backbone.</a:t>
             </a:r>
@@ -7927,8 +9164,8 @@
         </p:nvSpPr>
         <p:spPr>
           <a:xfrm xmlns:a="http://schemas.openxmlformats.org/drawingml/2006/main">
-            <a:off x="609600" y="4552950"/>
-            <a:ext cx="10858500" cy="1285875"/>
+            <a:off x="609600" y="4972050"/>
+            <a:ext cx="7191375" cy="981075"/>
           </a:xfrm>
           <a:prstGeom xmlns:a="http://schemas.openxmlformats.org/drawingml/2006/main" prst="rect">
             <a:avLst/>
@@ -7940,27 +9177,58 @@
           </a:ln>
         </p:spPr>
         <p:txBody>
-          <a:bodyPr xmlns:a="http://schemas.openxmlformats.org/drawingml/2006/main" lIns="0" tIns="0" rIns="0" bIns="0" anchor="ctr"/>
+          <a:bodyPr xmlns:a="http://schemas.openxmlformats.org/drawingml/2006/main" wrap="square" lIns="0" tIns="0" rIns="0" bIns="0" anchor="ctr">
+            <a:noAutofit/>
+          </a:bodyPr>
           <a:lstStyle xmlns:a="http://schemas.openxmlformats.org/drawingml/2006/main"/>
           <a:p xmlns:a="http://schemas.openxmlformats.org/drawingml/2006/main">
             <a:pPr>
-              <a:defRPr sz="2700" b="0">
-                <a:solidFill>
-                  <a:srgbClr val="152B3A"/>
-                </a:solidFill>
+              <a:buNone/>
+              <a:defRPr sz="2325" b="0">
+                <a:solidFill>
+                  <a:srgbClr val="152B3A"/>
+                </a:solidFill>
+                <a:latin typeface="Arial"/>
+                <a:ea typeface="Arial"/>
+                <a:cs typeface="Arial"/>
               </a:defRPr>
             </a:pPr>
             <a:r>
-              <a:rPr sz="2700" b="0">
-                <a:solidFill>
-                  <a:srgbClr val="152B3A"/>
-                </a:solidFill>
+              <a:rPr sz="2325" b="0">
+                <a:solidFill>
+                  <a:srgbClr val="152B3A"/>
+                </a:solidFill>
+                <a:latin typeface="Arial"/>
+                <a:ea typeface="Arial"/>
+                <a:cs typeface="Arial"/>
               </a:rPr>
               <a:t>Name the animal. Name the group. Give the body evidence.</a:t>
             </a:r>
           </a:p>
         </p:txBody>
       </p:sp>
+      <p:pic>
+        <p:nvPicPr>
+          <p:cNvPr id="22" name=""/>
+          <p:cNvPicPr>
+            <a:picLocks xmlns:a="http://schemas.openxmlformats.org/drawingml/2006/main" noChangeAspect="1"/>
+          </p:cNvPicPr>
+          <p:nvPr/>
+        </p:nvPicPr>
+        <p:blipFill>
+          <a:blip xmlns:r="http://schemas.openxmlformats.org/officeDocument/2006/relationships" xmlns:a="http://schemas.openxmlformats.org/drawingml/2006/main" r:embed="R237484532ed24c23"/>
+          <a:stretch xmlns:a="http://schemas.openxmlformats.org/drawingml/2006/main"/>
+        </p:blipFill>
+        <p:spPr>
+          <a:xfrm xmlns:a="http://schemas.openxmlformats.org/drawingml/2006/main">
+            <a:off x="8286750" y="2747963"/>
+            <a:ext cx="3048000" cy="2286000"/>
+          </a:xfrm>
+          <a:prstGeom xmlns:a="http://schemas.openxmlformats.org/drawingml/2006/main" prst="rect">
+            <a:avLst/>
+          </a:prstGeom>
+        </p:spPr>
+      </p:pic>
     </p:spTree>
     <p:extLst>
       <p:ext uri="{BB962C8B-B14F-4D97-AF65-F5344CB8AC3E}">
